--- a/aulas/aula-04-app-e-genie/slides/aula-04-app-e-genie.pptx
+++ b/aulas/aula-04-app-e-genie/slides/aula-04-app-e-genie.pptx
@@ -49,6 +49,9 @@
     <p:sldId id="297" r:id="rId49"/>
     <p:sldId id="298" r:id="rId50"/>
     <p:sldId id="299" r:id="rId51"/>
+    <p:sldId id="300" r:id="rId52"/>
+    <p:sldId id="301" r:id="rId53"/>
+    <p:sldId id="302" r:id="rId54"/>
   </p:sldIdLst>
   <p:sldSz cx="12191695" cy="6858000" type="screen4x3"/>
   <p:notesSz cx="6858000" cy="9144000"/>
@@ -965,7 +968,147 @@
           <a:lstStyle/>
           <a:p>
             <a:r>
+              <a:t>O roteiro completo, com as queries prontas, está em passo-a-passo/03-retorno.md.</a:t>
+            </a:r>
+          </a:p>
+        </p:txBody>
+      </p:sp>
+      <p:sp>
+        <p:nvSpPr>
+          <p:cNvPr id="4" name="Slide Number Placeholder 3"/>
+          <p:cNvSpPr>
+            <a:spLocks noGrp="1"/>
+          </p:cNvSpPr>
+          <p:nvPr>
+            <p:ph type="sldNum" idx="5" sz="quarter"/>
+          </p:nvPr>
+        </p:nvSpPr>
+        <p:spPr/>
+      </p:sp>
+    </p:spTree>
+  </p:cSld>
+  <p:clrMapOvr>
+    <a:masterClrMapping/>
+  </p:clrMapOvr>
+</p:notes>
+</file>
+
+<file path=ppt/notesSlides/notesSlide8.xml><?xml version="1.0" encoding="utf-8"?>
+<p:notes xmlns:a="http://schemas.openxmlformats.org/drawingml/2006/main" xmlns:p="http://schemas.openxmlformats.org/presentationml/2006/main" xmlns:r="http://schemas.openxmlformats.org/officeDocument/2006/relationships">
+  <p:cSld>
+    <p:spTree>
+      <p:nvGrpSpPr>
+        <p:cNvPr id="1" name=""/>
+        <p:cNvGrpSpPr/>
+        <p:nvPr/>
+      </p:nvGrpSpPr>
+      <p:grpSpPr>
+        <a:xfrm>
+          <a:off x="0" y="0"/>
+          <a:ext cx="0" cy="0"/>
+          <a:chOff x="0" y="0"/>
+          <a:chExt cx="0" cy="0"/>
+        </a:xfrm>
+      </p:grpSpPr>
+      <p:sp>
+        <p:nvSpPr>
+          <p:cNvPr id="2" name="Slide Image Placeholder 1"/>
+          <p:cNvSpPr>
+            <a:spLocks noGrp="1"/>
+          </p:cNvSpPr>
+          <p:nvPr>
+            <p:ph type="sldImg" idx="2"/>
+          </p:nvPr>
+        </p:nvSpPr>
+        <p:spPr/>
+      </p:sp>
+      <p:sp>
+        <p:nvSpPr>
+          <p:cNvPr id="3" name="Notes Placeholder 2"/>
+          <p:cNvSpPr>
+            <a:spLocks noGrp="1"/>
+          </p:cNvSpPr>
+          <p:nvPr>
+            <p:ph type="body" idx="3" sz="quarter"/>
+          </p:nvPr>
+        </p:nvSpPr>
+        <p:spPr/>
+        <p:txBody>
+          <a:bodyPr/>
+          <a:lstStyle/>
+          <a:p>
+            <a:r>
               <a:t>É o melhor momento da noite. Não corra: faça os quatro passos devagar, com a sala olhando a tela.</a:t>
+            </a:r>
+          </a:p>
+        </p:txBody>
+      </p:sp>
+      <p:sp>
+        <p:nvSpPr>
+          <p:cNvPr id="4" name="Slide Number Placeholder 3"/>
+          <p:cNvSpPr>
+            <a:spLocks noGrp="1"/>
+          </p:cNvSpPr>
+          <p:nvPr>
+            <p:ph type="sldNum" idx="5" sz="quarter"/>
+          </p:nvPr>
+        </p:nvSpPr>
+        <p:spPr/>
+      </p:sp>
+    </p:spTree>
+  </p:cSld>
+  <p:clrMapOvr>
+    <a:masterClrMapping/>
+  </p:clrMapOvr>
+</p:notes>
+</file>
+
+<file path=ppt/notesSlides/notesSlide9.xml><?xml version="1.0" encoding="utf-8"?>
+<p:notes xmlns:a="http://schemas.openxmlformats.org/drawingml/2006/main" xmlns:p="http://schemas.openxmlformats.org/presentationml/2006/main" xmlns:r="http://schemas.openxmlformats.org/officeDocument/2006/relationships">
+  <p:cSld>
+    <p:spTree>
+      <p:nvGrpSpPr>
+        <p:cNvPr id="1" name=""/>
+        <p:cNvGrpSpPr/>
+        <p:nvPr/>
+      </p:nvGrpSpPr>
+      <p:grpSpPr>
+        <a:xfrm>
+          <a:off x="0" y="0"/>
+          <a:ext cx="0" cy="0"/>
+          <a:chOff x="0" y="0"/>
+          <a:chExt cx="0" cy="0"/>
+        </a:xfrm>
+      </p:grpSpPr>
+      <p:sp>
+        <p:nvSpPr>
+          <p:cNvPr id="2" name="Slide Image Placeholder 1"/>
+          <p:cNvSpPr>
+            <a:spLocks noGrp="1"/>
+          </p:cNvSpPr>
+          <p:nvPr>
+            <p:ph type="sldImg" idx="2"/>
+          </p:nvPr>
+        </p:nvSpPr>
+        <p:spPr/>
+      </p:sp>
+      <p:sp>
+        <p:nvSpPr>
+          <p:cNvPr id="3" name="Notes Placeholder 2"/>
+          <p:cNvSpPr>
+            <a:spLocks noGrp="1"/>
+          </p:cNvSpPr>
+          <p:nvPr>
+            <p:ph type="body" idx="3" sz="quarter"/>
+          </p:nvPr>
+        </p:nvSpPr>
+        <p:spPr/>
+        <p:txBody>
+          <a:bodyPr/>
+          <a:lstStyle/>
+          <a:p>
+            <a:r>
+              <a:t>Links conferidos contra o índice oficial (docs.databricks.com/llms.txt) no dia da aula.</a:t>
             </a:r>
           </a:p>
         </p:txBody>
@@ -21934,7 +22077,7 @@
                 </a:solidFill>
                 <a:latin typeface="Arial"/>
               </a:rPr>
-              <a:t>DEPLOY Nº 3 · PRONTO</a:t>
+              <a:t>ANTES DE CLICAR EM NADA</a:t>
             </a:r>
           </a:p>
         </p:txBody>
@@ -21973,7 +22116,7 @@
                 </a:solidFill>
                 <a:latin typeface="Arial"/>
               </a:rPr>
-              <a:t>Agora clique — e volte para o SQL</a:t>
+              <a:t>O teste que prova o ciclo inteiro</a:t>
             </a:r>
           </a:p>
         </p:txBody>
@@ -21981,6 +22124,45 @@
       <p:sp>
         <p:nvSpPr>
           <p:cNvPr id="4" name="TextBox 3"/>
+          <p:cNvSpPr txBox="1"/>
+          <p:nvPr/>
+        </p:nvSpPr>
+        <p:spPr>
+          <a:xfrm>
+            <a:off x="685800" y="1508760"/>
+            <a:ext cx="10820095" cy="365760"/>
+          </a:xfrm>
+          <a:prstGeom prst="rect">
+            <a:avLst/>
+          </a:prstGeom>
+          <a:noFill/>
+        </p:spPr>
+        <p:txBody>
+          <a:bodyPr wrap="square" lIns="0" rIns="0" tIns="0" bIns="0" anchor="t">
+            <a:spAutoFit/>
+          </a:bodyPr>
+          <a:lstStyle/>
+          <a:p>
+            <a:pPr algn="l">
+              <a:lnSpc>
+                <a:spcPct val="115000"/>
+              </a:lnSpc>
+            </a:pPr>
+            <a:r>
+              <a:rPr sz="1400" b="0">
+                <a:solidFill>
+                  <a:srgbClr val="9BAAC0"/>
+                </a:solidFill>
+                <a:latin typeface="Arial"/>
+              </a:rPr>
+              <a:t>Sete passos com o SQL Editor e o app lado a lado. É o que transforma “o app grava” em “eu vi gravar”.</a:t>
+            </a:r>
+          </a:p>
+        </p:txBody>
+      </p:sp>
+      <p:sp>
+        <p:nvSpPr>
+          <p:cNvPr id="5" name="TextBox 4"/>
           <p:cNvSpPr txBox="1"/>
           <p:nvPr/>
         </p:nvSpPr>
@@ -22019,14 +22201,14 @@
       </p:sp>
       <p:sp>
         <p:nvSpPr>
-          <p:cNvPr id="5" name="TextBox 4"/>
-          <p:cNvSpPr txBox="1"/>
-          <p:nvPr/>
-        </p:nvSpPr>
-        <p:spPr>
-          <a:xfrm>
-            <a:off x="886968" y="1554480"/>
-            <a:ext cx="4663440" cy="274320"/>
+          <p:cNvPr id="6" name="TextBox 5"/>
+          <p:cNvSpPr txBox="1"/>
+          <p:nvPr/>
+        </p:nvSpPr>
+        <p:spPr>
+          <a:xfrm>
+            <a:off x="886968" y="2066543"/>
+            <a:ext cx="3383280" cy="274320"/>
           </a:xfrm>
           <a:prstGeom prst="rect">
             <a:avLst/>
@@ -22051,21 +22233,21 @@
                 </a:solidFill>
                 <a:latin typeface="Arial"/>
               </a:rPr>
-              <a:t>A SEQUÊNCIA</a:t>
-            </a:r>
-          </a:p>
-        </p:txBody>
-      </p:sp>
-      <p:sp>
-        <p:nvSpPr>
-          <p:cNvPr id="6" name="TextBox 5"/>
-          <p:cNvSpPr txBox="1"/>
-          <p:nvPr/>
-        </p:nvSpPr>
-        <p:spPr>
-          <a:xfrm>
-            <a:off x="5824728" y="1554480"/>
-            <a:ext cx="5608015" cy="274320"/>
+              <a:t>PASSO</a:t>
+            </a:r>
+          </a:p>
+        </p:txBody>
+      </p:sp>
+      <p:sp>
+        <p:nvSpPr>
+          <p:cNvPr id="7" name="TextBox 6"/>
+          <p:cNvSpPr txBox="1"/>
+          <p:nvPr/>
+        </p:nvSpPr>
+        <p:spPr>
+          <a:xfrm>
+            <a:off x="4544568" y="2066543"/>
+            <a:ext cx="2011680" cy="274320"/>
           </a:xfrm>
           <a:prstGeom prst="rect">
             <a:avLst/>
@@ -22090,21 +22272,60 @@
                 </a:solidFill>
                 <a:latin typeface="Arial"/>
               </a:rPr>
-              <a:t>O QUE A SALA VÊ</a:t>
-            </a:r>
-          </a:p>
-        </p:txBody>
-      </p:sp>
-      <p:sp>
-        <p:nvSpPr>
-          <p:cNvPr id="7" name="Rounded Rectangle 6"/>
+              <a:t>ONDE</a:t>
+            </a:r>
+          </a:p>
+        </p:txBody>
+      </p:sp>
+      <p:sp>
+        <p:nvSpPr>
+          <p:cNvPr id="8" name="TextBox 7"/>
+          <p:cNvSpPr txBox="1"/>
+          <p:nvPr/>
+        </p:nvSpPr>
+        <p:spPr>
+          <a:xfrm>
+            <a:off x="6830568" y="2066543"/>
+            <a:ext cx="4602175" cy="274320"/>
+          </a:xfrm>
+          <a:prstGeom prst="rect">
+            <a:avLst/>
+          </a:prstGeom>
+          <a:noFill/>
+        </p:spPr>
+        <p:txBody>
+          <a:bodyPr wrap="square" lIns="0" rIns="0" tIns="0" bIns="0" anchor="t">
+            <a:spAutoFit/>
+          </a:bodyPr>
+          <a:lstStyle/>
+          <a:p>
+            <a:pPr algn="l">
+              <a:lnSpc>
+                <a:spcPct val="100000"/>
+              </a:lnSpc>
+            </a:pPr>
+            <a:r>
+              <a:rPr sz="1100" b="1" spc="120">
+                <a:solidFill>
+                  <a:srgbClr val="3B9DF5"/>
+                </a:solidFill>
+                <a:latin typeface="Arial"/>
+              </a:rPr>
+              <a:t>O QUE VOCÊ VÊ</a:t>
+            </a:r>
+          </a:p>
+        </p:txBody>
+      </p:sp>
+      <p:sp>
+        <p:nvSpPr>
+          <p:cNvPr id="9" name="Rounded Rectangle 8"/>
           <p:cNvSpPr/>
           <p:nvPr/>
         </p:nvSpPr>
         <p:spPr>
           <a:xfrm>
-            <a:off x="685800" y="1920240"/>
-            <a:ext cx="10820095" cy="566928"/>
+            <a:off x="685800" y="2432303"/>
+            <a:ext cx="10820095" cy="475488"/>
           </a:xfrm>
           <a:prstGeom prst="roundRect">
             <a:avLst>
@@ -22145,14 +22366,14 @@
       </p:sp>
       <p:sp>
         <p:nvSpPr>
-          <p:cNvPr id="8" name="TextBox 7"/>
-          <p:cNvSpPr txBox="1"/>
-          <p:nvPr/>
-        </p:nvSpPr>
-        <p:spPr>
-          <a:xfrm>
-            <a:off x="886968" y="2096389"/>
-            <a:ext cx="4663440" cy="566928"/>
+          <p:cNvPr id="10" name="TextBox 9"/>
+          <p:cNvSpPr txBox="1"/>
+          <p:nvPr/>
+        </p:nvSpPr>
+        <p:spPr>
+          <a:xfrm>
+            <a:off x="886968" y="2562733"/>
+            <a:ext cx="3383280" cy="475488"/>
           </a:xfrm>
           <a:prstGeom prst="rect">
             <a:avLst/>
@@ -22177,21 +22398,21 @@
                 </a:solidFill>
                 <a:latin typeface="Arial"/>
               </a:rPr>
-              <a:t>1 · Farmácia Serena, Goiânia</a:t>
-            </a:r>
-          </a:p>
-        </p:txBody>
-      </p:sp>
-      <p:sp>
-        <p:nvSpPr>
-          <p:cNvPr id="9" name="TextBox 8"/>
-          <p:cNvSpPr txBox="1"/>
-          <p:nvPr/>
-        </p:nvSpPr>
-        <p:spPr>
-          <a:xfrm>
-            <a:off x="5824728" y="2096389"/>
-            <a:ext cx="5608015" cy="566928"/>
+              <a:t>1 · o estado inicial</a:t>
+            </a:r>
+          </a:p>
+        </p:txBody>
+      </p:sp>
+      <p:sp>
+        <p:nvSpPr>
+          <p:cNvPr id="11" name="TextBox 10"/>
+          <p:cNvSpPr txBox="1"/>
+          <p:nvPr/>
+        </p:nvSpPr>
+        <p:spPr>
+          <a:xfrm>
+            <a:off x="4544568" y="2562733"/>
+            <a:ext cx="2011680" cy="475488"/>
           </a:xfrm>
           <a:prstGeom prst="rect">
             <a:avLst/>
@@ -22216,21 +22437,60 @@
                 </a:solidFill>
                 <a:latin typeface="Consolas"/>
               </a:rPr>
-              <a:t>o primeiro da fila, chance de 97%</a:t>
-            </a:r>
-          </a:p>
-        </p:txBody>
-      </p:sp>
-      <p:sp>
-        <p:nvSpPr>
-          <p:cNvPr id="10" name="Rounded Rectangle 9"/>
+              <a:t>SQL Editor</a:t>
+            </a:r>
+          </a:p>
+        </p:txBody>
+      </p:sp>
+      <p:sp>
+        <p:nvSpPr>
+          <p:cNvPr id="12" name="TextBox 11"/>
+          <p:cNvSpPr txBox="1"/>
+          <p:nvPr/>
+        </p:nvSpPr>
+        <p:spPr>
+          <a:xfrm>
+            <a:off x="6830568" y="2562733"/>
+            <a:ext cx="4602175" cy="475488"/>
+          </a:xfrm>
+          <a:prstGeom prst="rect">
+            <a:avLst/>
+          </a:prstGeom>
+          <a:noFill/>
+        </p:spPr>
+        <p:txBody>
+          <a:bodyPr wrap="square" lIns="0" rIns="0" tIns="0" bIns="0" anchor="t">
+            <a:spAutoFit/>
+          </a:bodyPr>
+          <a:lstStyle/>
+          <a:p>
+            <a:pPr algn="l">
+              <a:lnSpc>
+                <a:spcPct val="100000"/>
+              </a:lnSpc>
+            </a:pPr>
+            <a:r>
+              <a:rPr sz="1300" b="0">
+                <a:solidFill>
+                  <a:srgbClr val="9BAAC0"/>
+                </a:solidFill>
+                <a:latin typeface="Consolas"/>
+              </a:rPr>
+              <a:t>SELECT COUNT(*) em retorno_ligacao → 0</a:t>
+            </a:r>
+          </a:p>
+        </p:txBody>
+      </p:sp>
+      <p:sp>
+        <p:nvSpPr>
+          <p:cNvPr id="13" name="Rounded Rectangle 12"/>
           <p:cNvSpPr/>
           <p:nvPr/>
         </p:nvSpPr>
         <p:spPr>
           <a:xfrm>
-            <a:off x="685800" y="2578608"/>
-            <a:ext cx="10820095" cy="566928"/>
+            <a:off x="685800" y="2999232"/>
+            <a:ext cx="10820095" cy="475488"/>
           </a:xfrm>
           <a:prstGeom prst="roundRect">
             <a:avLst>
@@ -22271,14 +22531,14 @@
       </p:sp>
       <p:sp>
         <p:nvSpPr>
-          <p:cNvPr id="11" name="TextBox 10"/>
-          <p:cNvSpPr txBox="1"/>
-          <p:nvPr/>
-        </p:nvSpPr>
-        <p:spPr>
-          <a:xfrm>
-            <a:off x="886968" y="2754757"/>
-            <a:ext cx="4663440" cy="566928"/>
+          <p:cNvPr id="14" name="TextBox 13"/>
+          <p:cNvSpPr txBox="1"/>
+          <p:nvPr/>
+        </p:nvSpPr>
+        <p:spPr>
+          <a:xfrm>
+            <a:off x="886968" y="3129661"/>
+            <a:ext cx="3383280" cy="475488"/>
           </a:xfrm>
           <a:prstGeom prst="rect">
             <a:avLst/>
@@ -22303,21 +22563,21 @@
                 </a:solidFill>
                 <a:latin typeface="Arial"/>
               </a:rPr>
-              <a:t>2 · comentário e “Vendeu”</a:t>
-            </a:r>
-          </a:p>
-        </p:txBody>
-      </p:sp>
-      <p:sp>
-        <p:nvSpPr>
-          <p:cNvPr id="12" name="TextBox 11"/>
-          <p:cNvSpPr txBox="1"/>
-          <p:nvPr/>
-        </p:nvSpPr>
-        <p:spPr>
-          <a:xfrm>
-            <a:off x="5824728" y="2754757"/>
-            <a:ext cx="5608015" cy="566928"/>
+              <a:t>2 · escolher quem ligar</a:t>
+            </a:r>
+          </a:p>
+        </p:txBody>
+      </p:sp>
+      <p:sp>
+        <p:nvSpPr>
+          <p:cNvPr id="15" name="TextBox 14"/>
+          <p:cNvSpPr txBox="1"/>
+          <p:nvPr/>
+        </p:nvSpPr>
+        <p:spPr>
+          <a:xfrm>
+            <a:off x="4544568" y="3129661"/>
+            <a:ext cx="2011680" cy="475488"/>
           </a:xfrm>
           <a:prstGeom prst="rect">
             <a:avLst/>
@@ -22342,21 +22602,60 @@
                 </a:solidFill>
                 <a:latin typeface="Consolas"/>
               </a:rPr>
-              <a:t>o cartão vai de 0 para 1</a:t>
-            </a:r>
-          </a:p>
-        </p:txBody>
-      </p:sp>
-      <p:sp>
-        <p:nvSpPr>
-          <p:cNvPr id="13" name="Rounded Rectangle 12"/>
+              <a:t>SQL Editor</a:t>
+            </a:r>
+          </a:p>
+        </p:txBody>
+      </p:sp>
+      <p:sp>
+        <p:nvSpPr>
+          <p:cNvPr id="16" name="TextBox 15"/>
+          <p:cNvSpPr txBox="1"/>
+          <p:nvPr/>
+        </p:nvSpPr>
+        <p:spPr>
+          <a:xfrm>
+            <a:off x="6830568" y="3129661"/>
+            <a:ext cx="4602175" cy="475488"/>
+          </a:xfrm>
+          <a:prstGeom prst="rect">
+            <a:avLst/>
+          </a:prstGeom>
+          <a:noFill/>
+        </p:spPr>
+        <p:txBody>
+          <a:bodyPr wrap="square" lIns="0" rIns="0" tIns="0" bIns="0" anchor="t">
+            <a:spAutoFit/>
+          </a:bodyPr>
+          <a:lstStyle/>
+          <a:p>
+            <a:pPr algn="l">
+              <a:lnSpc>
+                <a:spcPct val="100000"/>
+              </a:lnSpc>
+            </a:pPr>
+            <a:r>
+              <a:rPr sz="1300" b="0">
+                <a:solidFill>
+                  <a:srgbClr val="9BAAC0"/>
+                </a:solidFill>
+                <a:latin typeface="Consolas"/>
+              </a:rPr>
+              <a:t>cliente 2137 · Farmácia Serena · score 0,974</a:t>
+            </a:r>
+          </a:p>
+        </p:txBody>
+      </p:sp>
+      <p:sp>
+        <p:nvSpPr>
+          <p:cNvPr id="17" name="Rounded Rectangle 16"/>
           <p:cNvSpPr/>
           <p:nvPr/>
         </p:nvSpPr>
         <p:spPr>
           <a:xfrm>
-            <a:off x="685800" y="3236976"/>
-            <a:ext cx="10820095" cy="566928"/>
+            <a:off x="685800" y="3566160"/>
+            <a:ext cx="10820095" cy="475488"/>
           </a:xfrm>
           <a:prstGeom prst="roundRect">
             <a:avLst>
@@ -22397,14 +22696,14 @@
       </p:sp>
       <p:sp>
         <p:nvSpPr>
-          <p:cNvPr id="14" name="TextBox 13"/>
-          <p:cNvSpPr txBox="1"/>
-          <p:nvPr/>
-        </p:nvSpPr>
-        <p:spPr>
-          <a:xfrm>
-            <a:off x="886968" y="3413125"/>
-            <a:ext cx="4663440" cy="566928"/>
+          <p:cNvPr id="18" name="TextBox 17"/>
+          <p:cNvSpPr txBox="1"/>
+          <p:nvPr/>
+        </p:nvSpPr>
+        <p:spPr>
+          <a:xfrm>
+            <a:off x="886968" y="3696589"/>
+            <a:ext cx="3383280" cy="475488"/>
           </a:xfrm>
           <a:prstGeom prst="rect">
             <a:avLst/>
@@ -22429,21 +22728,21 @@
                 </a:solidFill>
                 <a:latin typeface="Arial"/>
               </a:rPr>
-              <a:t>3 · SELECT na retorno_ligacao</a:t>
-            </a:r>
-          </a:p>
-        </p:txBody>
-      </p:sp>
-      <p:sp>
-        <p:nvSpPr>
-          <p:cNvPr id="15" name="TextBox 14"/>
-          <p:cNvSpPr txBox="1"/>
-          <p:nvPr/>
-        </p:nvSpPr>
-        <p:spPr>
-          <a:xfrm>
-            <a:off x="5824728" y="3413125"/>
-            <a:ext cx="5608015" cy="566928"/>
+              <a:t>3 · o mesmo cliente com LEFT JOIN</a:t>
+            </a:r>
+          </a:p>
+        </p:txBody>
+      </p:sp>
+      <p:sp>
+        <p:nvSpPr>
+          <p:cNvPr id="19" name="TextBox 18"/>
+          <p:cNvSpPr txBox="1"/>
+          <p:nvPr/>
+        </p:nvSpPr>
+        <p:spPr>
+          <a:xfrm>
+            <a:off x="4544568" y="3696589"/>
+            <a:ext cx="2011680" cy="475488"/>
           </a:xfrm>
           <a:prstGeom prst="rect">
             <a:avLst/>
@@ -22468,21 +22767,225 @@
                 </a:solidFill>
                 <a:latin typeface="Consolas"/>
               </a:rPr>
-              <a:t>a linha está lá, com o SEU e-mail</a:t>
-            </a:r>
-          </a:p>
-        </p:txBody>
-      </p:sp>
-      <p:sp>
-        <p:nvSpPr>
-          <p:cNvPr id="16" name="Rounded Rectangle 15"/>
+              <a:t>SQL Editor</a:t>
+            </a:r>
+          </a:p>
+        </p:txBody>
+      </p:sp>
+      <p:sp>
+        <p:nvSpPr>
+          <p:cNvPr id="20" name="TextBox 19"/>
+          <p:cNvSpPr txBox="1"/>
+          <p:nvPr/>
+        </p:nvSpPr>
+        <p:spPr>
+          <a:xfrm>
+            <a:off x="6830568" y="3696589"/>
+            <a:ext cx="4602175" cy="475488"/>
+          </a:xfrm>
+          <a:prstGeom prst="rect">
+            <a:avLst/>
+          </a:prstGeom>
+          <a:noFill/>
+        </p:spPr>
+        <p:txBody>
+          <a:bodyPr wrap="square" lIns="0" rIns="0" tIns="0" bIns="0" anchor="t">
+            <a:spAutoFit/>
+          </a:bodyPr>
+          <a:lstStyle/>
+          <a:p>
+            <a:pPr algn="l">
+              <a:lnSpc>
+                <a:spcPct val="100000"/>
+              </a:lnSpc>
+            </a:pPr>
+            <a:r>
+              <a:rPr sz="1300" b="0">
+                <a:solidFill>
+                  <a:srgbClr val="9BAAC0"/>
+                </a:solidFill>
+                <a:latin typeface="Consolas"/>
+              </a:rPr>
+              <a:t>retorno e registrado_por vêm NULL</a:t>
+            </a:r>
+          </a:p>
+        </p:txBody>
+      </p:sp>
+      <p:sp>
+        <p:nvSpPr>
+          <p:cNvPr id="21" name="Rounded Rectangle 20"/>
           <p:cNvSpPr/>
           <p:nvPr/>
         </p:nvSpPr>
         <p:spPr>
           <a:xfrm>
-            <a:off x="685800" y="3895344"/>
-            <a:ext cx="10820095" cy="566928"/>
+            <a:off x="685800" y="4133087"/>
+            <a:ext cx="10820095" cy="475488"/>
+          </a:xfrm>
+          <a:prstGeom prst="roundRect">
+            <a:avLst>
+              <a:gd name="adj" fmla="val 8000"/>
+            </a:avLst>
+          </a:prstGeom>
+          <a:solidFill>
+            <a:srgbClr val="0D1522"/>
+          </a:solidFill>
+          <a:ln w="15875">
+            <a:solidFill>
+              <a:srgbClr val="1F3A5A"/>
+            </a:solidFill>
+          </a:ln>
+          <a:effectLst/>
+        </p:spPr>
+        <p:style>
+          <a:lnRef idx="1">
+            <a:schemeClr val="accent1"/>
+          </a:lnRef>
+          <a:fillRef idx="3">
+            <a:schemeClr val="accent1"/>
+          </a:fillRef>
+          <a:effectRef idx="2">
+            <a:schemeClr val="accent1"/>
+          </a:effectRef>
+          <a:fontRef idx="minor">
+            <a:schemeClr val="lt1"/>
+          </a:fontRef>
+        </p:style>
+        <p:txBody>
+          <a:bodyPr rtlCol="0" anchor="ctr"/>
+          <a:lstStyle/>
+          <a:p>
+            <a:pPr algn="ctr"/>
+          </a:p>
+        </p:txBody>
+      </p:sp>
+      <p:sp>
+        <p:nvSpPr>
+          <p:cNvPr id="22" name="TextBox 21"/>
+          <p:cNvSpPr txBox="1"/>
+          <p:nvPr/>
+        </p:nvSpPr>
+        <p:spPr>
+          <a:xfrm>
+            <a:off x="886968" y="4263516"/>
+            <a:ext cx="3383280" cy="475488"/>
+          </a:xfrm>
+          <a:prstGeom prst="rect">
+            <a:avLst/>
+          </a:prstGeom>
+          <a:noFill/>
+        </p:spPr>
+        <p:txBody>
+          <a:bodyPr wrap="square" lIns="0" rIns="0" tIns="0" bIns="0" anchor="t">
+            <a:spAutoFit/>
+          </a:bodyPr>
+          <a:lstStyle/>
+          <a:p>
+            <a:pPr algn="l">
+              <a:lnSpc>
+                <a:spcPct val="100000"/>
+              </a:lnSpc>
+            </a:pPr>
+            <a:r>
+              <a:rPr sz="1300" b="1">
+                <a:solidFill>
+                  <a:srgbClr val="FFFFFF"/>
+                </a:solidFill>
+                <a:latin typeface="Arial"/>
+              </a:rPr>
+              <a:t>4 · o apontamento</a:t>
+            </a:r>
+          </a:p>
+        </p:txBody>
+      </p:sp>
+      <p:sp>
+        <p:nvSpPr>
+          <p:cNvPr id="23" name="TextBox 22"/>
+          <p:cNvSpPr txBox="1"/>
+          <p:nvPr/>
+        </p:nvSpPr>
+        <p:spPr>
+          <a:xfrm>
+            <a:off x="4544568" y="4263516"/>
+            <a:ext cx="2011680" cy="475488"/>
+          </a:xfrm>
+          <a:prstGeom prst="rect">
+            <a:avLst/>
+          </a:prstGeom>
+          <a:noFill/>
+        </p:spPr>
+        <p:txBody>
+          <a:bodyPr wrap="square" lIns="0" rIns="0" tIns="0" bIns="0" anchor="t">
+            <a:spAutoFit/>
+          </a:bodyPr>
+          <a:lstStyle/>
+          <a:p>
+            <a:pPr algn="l">
+              <a:lnSpc>
+                <a:spcPct val="100000"/>
+              </a:lnSpc>
+            </a:pPr>
+            <a:r>
+              <a:rPr sz="1300" b="0">
+                <a:solidFill>
+                  <a:srgbClr val="9BAAC0"/>
+                </a:solidFill>
+                <a:latin typeface="Consolas"/>
+              </a:rPr>
+              <a:t>o app</a:t>
+            </a:r>
+          </a:p>
+        </p:txBody>
+      </p:sp>
+      <p:sp>
+        <p:nvSpPr>
+          <p:cNvPr id="24" name="TextBox 23"/>
+          <p:cNvSpPr txBox="1"/>
+          <p:nvPr/>
+        </p:nvSpPr>
+        <p:spPr>
+          <a:xfrm>
+            <a:off x="6830568" y="4263516"/>
+            <a:ext cx="4602175" cy="475488"/>
+          </a:xfrm>
+          <a:prstGeom prst="rect">
+            <a:avLst/>
+          </a:prstGeom>
+          <a:noFill/>
+        </p:spPr>
+        <p:txBody>
+          <a:bodyPr wrap="square" lIns="0" rIns="0" tIns="0" bIns="0" anchor="t">
+            <a:spAutoFit/>
+          </a:bodyPr>
+          <a:lstStyle/>
+          <a:p>
+            <a:pPr algn="l">
+              <a:lnSpc>
+                <a:spcPct val="100000"/>
+              </a:lnSpc>
+            </a:pPr>
+            <a:r>
+              <a:rPr sz="1300" b="0">
+                <a:solidFill>
+                  <a:srgbClr val="9BAAC0"/>
+                </a:solidFill>
+                <a:latin typeface="Consolas"/>
+              </a:rPr>
+              <a:t>comentário + Vendeu. O cartão sobe na hora</a:t>
+            </a:r>
+          </a:p>
+        </p:txBody>
+      </p:sp>
+      <p:sp>
+        <p:nvSpPr>
+          <p:cNvPr id="25" name="Rounded Rectangle 24"/>
+          <p:cNvSpPr/>
+          <p:nvPr/>
+        </p:nvSpPr>
+        <p:spPr>
+          <a:xfrm>
+            <a:off x="685800" y="4700016"/>
+            <a:ext cx="10820095" cy="475488"/>
           </a:xfrm>
           <a:prstGeom prst="roundRect">
             <a:avLst>
@@ -22523,14 +23026,14 @@
       </p:sp>
       <p:sp>
         <p:nvSpPr>
-          <p:cNvPr id="17" name="TextBox 16"/>
-          <p:cNvSpPr txBox="1"/>
-          <p:nvPr/>
-        </p:nvSpPr>
-        <p:spPr>
-          <a:xfrm>
-            <a:off x="886968" y="4071493"/>
-            <a:ext cx="4663440" cy="566928"/>
+          <p:cNvPr id="26" name="TextBox 25"/>
+          <p:cNvSpPr txBox="1"/>
+          <p:nvPr/>
+        </p:nvSpPr>
+        <p:spPr>
+          <a:xfrm>
+            <a:off x="886968" y="4830444"/>
+            <a:ext cx="3383280" cy="475488"/>
           </a:xfrm>
           <a:prstGeom prst="rect">
             <a:avLst/>
@@ -22555,21 +23058,21 @@
                 </a:solidFill>
                 <a:latin typeface="Arial"/>
               </a:rPr>
-              <a:t>4 · a mesma pergunta ao Genie</a:t>
-            </a:r>
-          </a:p>
-        </p:txBody>
-      </p:sp>
-      <p:sp>
-        <p:nvSpPr>
-          <p:cNvPr id="18" name="TextBox 17"/>
-          <p:cNvSpPr txBox="1"/>
-          <p:nvPr/>
-        </p:nvSpPr>
-        <p:spPr>
-          <a:xfrm>
-            <a:off x="5824728" y="4071493"/>
-            <a:ext cx="5608015" cy="566928"/>
+              <a:t>5 · a mesma query de novo</a:t>
+            </a:r>
+          </a:p>
+        </p:txBody>
+      </p:sp>
+      <p:sp>
+        <p:nvSpPr>
+          <p:cNvPr id="27" name="TextBox 26"/>
+          <p:cNvSpPr txBox="1"/>
+          <p:nvPr/>
+        </p:nvSpPr>
+        <p:spPr>
+          <a:xfrm>
+            <a:off x="4544568" y="4830444"/>
+            <a:ext cx="2011680" cy="475488"/>
           </a:xfrm>
           <a:prstGeom prst="rect">
             <a:avLst/>
@@ -22594,21 +23097,390 @@
                 </a:solidFill>
                 <a:latin typeface="Consolas"/>
               </a:rPr>
-              <a:t>responde 1 e 1 — e há 20 min respondia zero</a:t>
-            </a:r>
-          </a:p>
-        </p:txBody>
-      </p:sp>
-      <p:sp>
-        <p:nvSpPr>
-          <p:cNvPr id="19" name="Rounded Rectangle 18"/>
+              <a:t>SQL Editor</a:t>
+            </a:r>
+          </a:p>
+        </p:txBody>
+      </p:sp>
+      <p:sp>
+        <p:nvSpPr>
+          <p:cNvPr id="28" name="TextBox 27"/>
+          <p:cNvSpPr txBox="1"/>
+          <p:nvPr/>
+        </p:nvSpPr>
+        <p:spPr>
+          <a:xfrm>
+            <a:off x="6830568" y="4830444"/>
+            <a:ext cx="4602175" cy="475488"/>
+          </a:xfrm>
+          <a:prstGeom prst="rect">
+            <a:avLst/>
+          </a:prstGeom>
+          <a:noFill/>
+        </p:spPr>
+        <p:txBody>
+          <a:bodyPr wrap="square" lIns="0" rIns="0" tIns="0" bIns="0" anchor="t">
+            <a:spAutoFit/>
+          </a:bodyPr>
+          <a:lstStyle/>
+          <a:p>
+            <a:pPr algn="l">
+              <a:lnSpc>
+                <a:spcPct val="100000"/>
+              </a:lnSpc>
+            </a:pPr>
+            <a:r>
+              <a:rPr sz="1300" b="1">
+                <a:solidFill>
+                  <a:srgbClr val="3B9DF5"/>
+                </a:solidFill>
+                <a:latin typeface="Consolas"/>
+              </a:rPr>
+              <a:t>a linha existe, com o SEU e-mail</a:t>
+            </a:r>
+          </a:p>
+        </p:txBody>
+      </p:sp>
+      <p:sp>
+        <p:nvSpPr>
+          <p:cNvPr id="29" name="Rounded Rectangle 28"/>
           <p:cNvSpPr/>
           <p:nvPr/>
         </p:nvSpPr>
         <p:spPr>
           <a:xfrm>
-            <a:off x="685800" y="5394960"/>
-            <a:ext cx="10820095" cy="658368"/>
+            <a:off x="685800" y="5266944"/>
+            <a:ext cx="10820095" cy="475488"/>
+          </a:xfrm>
+          <a:prstGeom prst="roundRect">
+            <a:avLst>
+              <a:gd name="adj" fmla="val 8000"/>
+            </a:avLst>
+          </a:prstGeom>
+          <a:solidFill>
+            <a:srgbClr val="0D1522"/>
+          </a:solidFill>
+          <a:ln w="15875">
+            <a:solidFill>
+              <a:srgbClr val="1F3A5A"/>
+            </a:solidFill>
+          </a:ln>
+          <a:effectLst/>
+        </p:spPr>
+        <p:style>
+          <a:lnRef idx="1">
+            <a:schemeClr val="accent1"/>
+          </a:lnRef>
+          <a:fillRef idx="3">
+            <a:schemeClr val="accent1"/>
+          </a:fillRef>
+          <a:effectRef idx="2">
+            <a:schemeClr val="accent1"/>
+          </a:effectRef>
+          <a:fontRef idx="minor">
+            <a:schemeClr val="lt1"/>
+          </a:fontRef>
+        </p:style>
+        <p:txBody>
+          <a:bodyPr rtlCol="0" anchor="ctr"/>
+          <a:lstStyle/>
+          <a:p>
+            <a:pPr algn="ctr"/>
+          </a:p>
+        </p:txBody>
+      </p:sp>
+      <p:sp>
+        <p:nvSpPr>
+          <p:cNvPr id="30" name="TextBox 29"/>
+          <p:cNvSpPr txBox="1"/>
+          <p:nvPr/>
+        </p:nvSpPr>
+        <p:spPr>
+          <a:xfrm>
+            <a:off x="886968" y="5397372"/>
+            <a:ext cx="3383280" cy="475488"/>
+          </a:xfrm>
+          <a:prstGeom prst="rect">
+            <a:avLst/>
+          </a:prstGeom>
+          <a:noFill/>
+        </p:spPr>
+        <p:txBody>
+          <a:bodyPr wrap="square" lIns="0" rIns="0" tIns="0" bIns="0" anchor="t">
+            <a:spAutoFit/>
+          </a:bodyPr>
+          <a:lstStyle/>
+          <a:p>
+            <a:pPr algn="l">
+              <a:lnSpc>
+                <a:spcPct val="100000"/>
+              </a:lnSpc>
+            </a:pPr>
+            <a:r>
+              <a:rPr sz="1300" b="1">
+                <a:solidFill>
+                  <a:srgbClr val="FFFFFF"/>
+                </a:solidFill>
+                <a:latin typeface="Arial"/>
+              </a:rPr>
+              <a:t>6 · o acompanhamento</a:t>
+            </a:r>
+          </a:p>
+        </p:txBody>
+      </p:sp>
+      <p:sp>
+        <p:nvSpPr>
+          <p:cNvPr id="31" name="TextBox 30"/>
+          <p:cNvSpPr txBox="1"/>
+          <p:nvPr/>
+        </p:nvSpPr>
+        <p:spPr>
+          <a:xfrm>
+            <a:off x="4544568" y="5397372"/>
+            <a:ext cx="2011680" cy="475488"/>
+          </a:xfrm>
+          <a:prstGeom prst="rect">
+            <a:avLst/>
+          </a:prstGeom>
+          <a:noFill/>
+        </p:spPr>
+        <p:txBody>
+          <a:bodyPr wrap="square" lIns="0" rIns="0" tIns="0" bIns="0" anchor="t">
+            <a:spAutoFit/>
+          </a:bodyPr>
+          <a:lstStyle/>
+          <a:p>
+            <a:pPr algn="l">
+              <a:lnSpc>
+                <a:spcPct val="100000"/>
+              </a:lnSpc>
+            </a:pPr>
+            <a:r>
+              <a:rPr sz="1300" b="0">
+                <a:solidFill>
+                  <a:srgbClr val="9BAAC0"/>
+                </a:solidFill>
+                <a:latin typeface="Consolas"/>
+              </a:rPr>
+              <a:t>os dois</a:t>
+            </a:r>
+          </a:p>
+        </p:txBody>
+      </p:sp>
+      <p:sp>
+        <p:nvSpPr>
+          <p:cNvPr id="32" name="TextBox 31"/>
+          <p:cNvSpPr txBox="1"/>
+          <p:nvPr/>
+        </p:nvSpPr>
+        <p:spPr>
+          <a:xfrm>
+            <a:off x="6830568" y="5397372"/>
+            <a:ext cx="4602175" cy="475488"/>
+          </a:xfrm>
+          <a:prstGeom prst="rect">
+            <a:avLst/>
+          </a:prstGeom>
+          <a:noFill/>
+        </p:spPr>
+        <p:txBody>
+          <a:bodyPr wrap="square" lIns="0" rIns="0" tIns="0" bIns="0" anchor="t">
+            <a:spAutoFit/>
+          </a:bodyPr>
+          <a:lstStyle/>
+          <a:p>
+            <a:pPr algn="l">
+              <a:lnSpc>
+                <a:spcPct val="100000"/>
+              </a:lnSpc>
+            </a:pPr>
+            <a:r>
+              <a:rPr sz="1300" b="0">
+                <a:solidFill>
+                  <a:srgbClr val="9BAAC0"/>
+                </a:solidFill>
+                <a:latin typeface="Consolas"/>
+              </a:rPr>
+              <a:t>o número da tela bate com o do banco</a:t>
+            </a:r>
+          </a:p>
+        </p:txBody>
+      </p:sp>
+      <p:sp>
+        <p:nvSpPr>
+          <p:cNvPr id="33" name="Rounded Rectangle 32"/>
+          <p:cNvSpPr/>
+          <p:nvPr/>
+        </p:nvSpPr>
+        <p:spPr>
+          <a:xfrm>
+            <a:off x="685800" y="5833872"/>
+            <a:ext cx="10820095" cy="475488"/>
+          </a:xfrm>
+          <a:prstGeom prst="roundRect">
+            <a:avLst>
+              <a:gd name="adj" fmla="val 8000"/>
+            </a:avLst>
+          </a:prstGeom>
+          <a:solidFill>
+            <a:srgbClr val="0D1522"/>
+          </a:solidFill>
+          <a:ln w="15875">
+            <a:solidFill>
+              <a:srgbClr val="1F3A5A"/>
+            </a:solidFill>
+          </a:ln>
+          <a:effectLst/>
+        </p:spPr>
+        <p:style>
+          <a:lnRef idx="1">
+            <a:schemeClr val="accent1"/>
+          </a:lnRef>
+          <a:fillRef idx="3">
+            <a:schemeClr val="accent1"/>
+          </a:fillRef>
+          <a:effectRef idx="2">
+            <a:schemeClr val="accent1"/>
+          </a:effectRef>
+          <a:fontRef idx="minor">
+            <a:schemeClr val="lt1"/>
+          </a:fontRef>
+        </p:style>
+        <p:txBody>
+          <a:bodyPr rtlCol="0" anchor="ctr"/>
+          <a:lstStyle/>
+          <a:p>
+            <a:pPr algn="ctr"/>
+          </a:p>
+        </p:txBody>
+      </p:sp>
+      <p:sp>
+        <p:nvSpPr>
+          <p:cNvPr id="34" name="TextBox 33"/>
+          <p:cNvSpPr txBox="1"/>
+          <p:nvPr/>
+        </p:nvSpPr>
+        <p:spPr>
+          <a:xfrm>
+            <a:off x="886968" y="5964301"/>
+            <a:ext cx="3383280" cy="475488"/>
+          </a:xfrm>
+          <a:prstGeom prst="rect">
+            <a:avLst/>
+          </a:prstGeom>
+          <a:noFill/>
+        </p:spPr>
+        <p:txBody>
+          <a:bodyPr wrap="square" lIns="0" rIns="0" tIns="0" bIns="0" anchor="t">
+            <a:spAutoFit/>
+          </a:bodyPr>
+          <a:lstStyle/>
+          <a:p>
+            <a:pPr algn="l">
+              <a:lnSpc>
+                <a:spcPct val="100000"/>
+              </a:lnSpc>
+            </a:pPr>
+            <a:r>
+              <a:rPr sz="1300" b="1">
+                <a:solidFill>
+                  <a:srgbClr val="FFFFFF"/>
+                </a:solidFill>
+                <a:latin typeface="Arial"/>
+              </a:rPr>
+              <a:t>7 · a pergunta ao Genie</a:t>
+            </a:r>
+          </a:p>
+        </p:txBody>
+      </p:sp>
+      <p:sp>
+        <p:nvSpPr>
+          <p:cNvPr id="35" name="TextBox 34"/>
+          <p:cNvSpPr txBox="1"/>
+          <p:nvPr/>
+        </p:nvSpPr>
+        <p:spPr>
+          <a:xfrm>
+            <a:off x="4544568" y="5964301"/>
+            <a:ext cx="2011680" cy="475488"/>
+          </a:xfrm>
+          <a:prstGeom prst="rect">
+            <a:avLst/>
+          </a:prstGeom>
+          <a:noFill/>
+        </p:spPr>
+        <p:txBody>
+          <a:bodyPr wrap="square" lIns="0" rIns="0" tIns="0" bIns="0" anchor="t">
+            <a:spAutoFit/>
+          </a:bodyPr>
+          <a:lstStyle/>
+          <a:p>
+            <a:pPr algn="l">
+              <a:lnSpc>
+                <a:spcPct val="100000"/>
+              </a:lnSpc>
+            </a:pPr>
+            <a:r>
+              <a:rPr sz="1300" b="0">
+                <a:solidFill>
+                  <a:srgbClr val="9BAAC0"/>
+                </a:solidFill>
+                <a:latin typeface="Consolas"/>
+              </a:rPr>
+              <a:t>Genie</a:t>
+            </a:r>
+          </a:p>
+        </p:txBody>
+      </p:sp>
+      <p:sp>
+        <p:nvSpPr>
+          <p:cNvPr id="36" name="TextBox 35"/>
+          <p:cNvSpPr txBox="1"/>
+          <p:nvPr/>
+        </p:nvSpPr>
+        <p:spPr>
+          <a:xfrm>
+            <a:off x="6830568" y="5964301"/>
+            <a:ext cx="4602175" cy="475488"/>
+          </a:xfrm>
+          <a:prstGeom prst="rect">
+            <a:avLst/>
+          </a:prstGeom>
+          <a:noFill/>
+        </p:spPr>
+        <p:txBody>
+          <a:bodyPr wrap="square" lIns="0" rIns="0" tIns="0" bIns="0" anchor="t">
+            <a:spAutoFit/>
+          </a:bodyPr>
+          <a:lstStyle/>
+          <a:p>
+            <a:pPr algn="l">
+              <a:lnSpc>
+                <a:spcPct val="100000"/>
+              </a:lnSpc>
+            </a:pPr>
+            <a:r>
+              <a:rPr sz="1300" b="0">
+                <a:solidFill>
+                  <a:srgbClr val="9BAAC0"/>
+                </a:solidFill>
+                <a:latin typeface="Consolas"/>
+              </a:rPr>
+              <a:t>ele responde o número novo, sem mudar nada</a:t>
+            </a:r>
+          </a:p>
+        </p:txBody>
+      </p:sp>
+      <p:sp>
+        <p:nvSpPr>
+          <p:cNvPr id="37" name="Rounded Rectangle 36"/>
+          <p:cNvSpPr/>
+          <p:nvPr/>
+        </p:nvSpPr>
+        <p:spPr>
+          <a:xfrm>
+            <a:off x="685800" y="5806440"/>
+            <a:ext cx="10820095" cy="603504"/>
           </a:xfrm>
           <a:prstGeom prst="roundRect">
             <a:avLst>
@@ -22649,39 +23521,39 @@
       </p:sp>
       <p:sp>
         <p:nvSpPr>
-          <p:cNvPr id="20" name="TextBox 19"/>
-          <p:cNvSpPr txBox="1"/>
-          <p:nvPr/>
-        </p:nvSpPr>
-        <p:spPr>
-          <a:xfrm>
-            <a:off x="1069848" y="5604256"/>
-            <a:ext cx="10051999" cy="658368"/>
-          </a:xfrm>
-          <a:prstGeom prst="rect">
-            <a:avLst/>
-          </a:prstGeom>
-          <a:noFill/>
-        </p:spPr>
-        <p:txBody>
-          <a:bodyPr wrap="square" lIns="0" rIns="0" tIns="0" bIns="0" anchor="t">
-            <a:spAutoFit/>
-          </a:bodyPr>
-          <a:lstStyle/>
-          <a:p>
-            <a:pPr algn="ctr">
+          <p:cNvPr id="38" name="TextBox 37"/>
+          <p:cNvSpPr txBox="1"/>
+          <p:nvPr/>
+        </p:nvSpPr>
+        <p:spPr>
+          <a:xfrm>
+            <a:off x="1069848" y="6000495"/>
+            <a:ext cx="10051999" cy="603504"/>
+          </a:xfrm>
+          <a:prstGeom prst="rect">
+            <a:avLst/>
+          </a:prstGeom>
+          <a:noFill/>
+        </p:spPr>
+        <p:txBody>
+          <a:bodyPr wrap="square" lIns="0" rIns="0" tIns="0" bIns="0" anchor="t">
+            <a:spAutoFit/>
+          </a:bodyPr>
+          <a:lstStyle/>
+          <a:p>
+            <a:pPr algn="l">
               <a:lnSpc>
                 <a:spcPct val="128000"/>
               </a:lnSpc>
             </a:pPr>
             <a:r>
-              <a:rPr sz="1700" b="1">
+              <a:rPr sz="1550" b="1">
                 <a:solidFill>
                   <a:srgbClr val="FFFFFF"/>
                 </a:solidFill>
                 <a:latin typeface="Arial"/>
               </a:rPr>
-              <a:t>Nenhuma linha do Genie mudou. Mudou o dado embaixo dele.</a:t>
+              <a:t>O passo 5 é o que a sala precisa ver: o NULL de trinta segundos atrás virou dado.</a:t>
             </a:r>
           </a:p>
         </p:txBody>
@@ -22843,7 +23715,7 @@
                 </a:solidFill>
                 <a:latin typeface="Arial"/>
               </a:rPr>
-              <a:t>O QUE EXISTE AGORA</a:t>
+              <a:t>O PASSO 3 E O PASSO 5</a:t>
             </a:r>
           </a:p>
         </p:txBody>
@@ -22882,7 +23754,7 @@
                 </a:solidFill>
                 <a:latin typeface="Arial"/>
               </a:rPr>
-              <a:t>O ciclo fechado</a:t>
+              <a:t>A mesma query, trinta segundos depois</a:t>
             </a:r>
           </a:p>
         </p:txBody>
@@ -22934,8 +23806,143 @@
         </p:nvSpPr>
         <p:spPr>
           <a:xfrm>
-            <a:off x="685800" y="1691640"/>
-            <a:ext cx="10820095" cy="1569720"/>
+            <a:off x="685800" y="1554480"/>
+            <a:ext cx="10820095" cy="1394968"/>
+          </a:xfrm>
+          <a:prstGeom prst="roundRect">
+            <a:avLst>
+              <a:gd name="adj" fmla="val 8000"/>
+            </a:avLst>
+          </a:prstGeom>
+          <a:solidFill>
+            <a:srgbClr val="0D1522"/>
+          </a:solidFill>
+          <a:ln w="15875">
+            <a:solidFill>
+              <a:srgbClr val="3B9DF5"/>
+            </a:solidFill>
+          </a:ln>
+          <a:effectLst/>
+        </p:spPr>
+        <p:style>
+          <a:lnRef idx="1">
+            <a:schemeClr val="accent1"/>
+          </a:lnRef>
+          <a:fillRef idx="3">
+            <a:schemeClr val="accent1"/>
+          </a:fillRef>
+          <a:effectRef idx="2">
+            <a:schemeClr val="accent1"/>
+          </a:effectRef>
+          <a:fontRef idx="minor">
+            <a:schemeClr val="lt1"/>
+          </a:fontRef>
+        </p:style>
+        <p:txBody>
+          <a:bodyPr rtlCol="0" anchor="ctr"/>
+          <a:lstStyle/>
+          <a:p>
+            <a:pPr algn="ctr"/>
+          </a:p>
+        </p:txBody>
+      </p:sp>
+      <p:sp>
+        <p:nvSpPr>
+          <p:cNvPr id="6" name="TextBox 5"/>
+          <p:cNvSpPr txBox="1"/>
+          <p:nvPr/>
+        </p:nvSpPr>
+        <p:spPr>
+          <a:xfrm>
+            <a:off x="1051560" y="1783080"/>
+            <a:ext cx="10088575" cy="1394968"/>
+          </a:xfrm>
+          <a:prstGeom prst="rect">
+            <a:avLst/>
+          </a:prstGeom>
+          <a:noFill/>
+        </p:spPr>
+        <p:txBody>
+          <a:bodyPr wrap="square" lIns="0" rIns="0" tIns="0" bIns="0" anchor="t">
+            <a:spAutoFit/>
+          </a:bodyPr>
+          <a:lstStyle/>
+          <a:p>
+            <a:pPr algn="l">
+              <a:lnSpc>
+                <a:spcPct val="142000"/>
+              </a:lnSpc>
+            </a:pPr>
+            <a:r>
+              <a:rPr sz="1300" b="0">
+                <a:solidFill>
+                  <a:srgbClr val="7CC8FF"/>
+                </a:solidFill>
+                <a:latin typeface="Consolas"/>
+              </a:rPr>
+              <a:t>SELECT f.razao_social, r.status AS retorno, r.registrado_por</a:t>
+            </a:r>
+          </a:p>
+          <a:p>
+            <a:pPr algn="l">
+              <a:lnSpc>
+                <a:spcPct val="142000"/>
+              </a:lnSpc>
+            </a:pPr>
+            <a:r>
+              <a:rPr sz="1300" b="0">
+                <a:solidFill>
+                  <a:srgbClr val="7CC8FF"/>
+                </a:solidFill>
+                <a:latin typeface="Consolas"/>
+              </a:rPr>
+              <a:t>FROM   gold.fila_semanal f</a:t>
+            </a:r>
+          </a:p>
+          <a:p>
+            <a:pPr algn="l">
+              <a:lnSpc>
+                <a:spcPct val="142000"/>
+              </a:lnSpc>
+            </a:pPr>
+            <a:r>
+              <a:rPr sz="1300" b="0">
+                <a:solidFill>
+                  <a:srgbClr val="7CC8FF"/>
+                </a:solidFill>
+                <a:latin typeface="Consolas"/>
+              </a:rPr>
+              <a:t>LEFT JOIN gold.retorno_ligacao r ON r.cliente_id = f.cliente_id</a:t>
+            </a:r>
+          </a:p>
+          <a:p>
+            <a:pPr algn="l">
+              <a:lnSpc>
+                <a:spcPct val="142000"/>
+              </a:lnSpc>
+            </a:pPr>
+            <a:r>
+              <a:rPr sz="1300" b="0">
+                <a:solidFill>
+                  <a:srgbClr val="7CC8FF"/>
+                </a:solidFill>
+                <a:latin typeface="Consolas"/>
+              </a:rPr>
+              <a:t>WHERE  f.cliente_id = 2137;</a:t>
+            </a:r>
+          </a:p>
+        </p:txBody>
+      </p:sp>
+      <p:sp>
+        <p:nvSpPr>
+          <p:cNvPr id="7" name="Rounded Rectangle 6"/>
+          <p:cNvSpPr/>
+          <p:nvPr/>
+        </p:nvSpPr>
+        <p:spPr>
+          <a:xfrm>
+            <a:off x="685800" y="3178047"/>
+            <a:ext cx="5291175" cy="1600200"/>
           </a:xfrm>
           <a:prstGeom prst="roundRect">
             <a:avLst>
@@ -22976,101 +23983,140 @@
       </p:sp>
       <p:sp>
         <p:nvSpPr>
-          <p:cNvPr id="6" name="TextBox 5"/>
-          <p:cNvSpPr txBox="1"/>
-          <p:nvPr/>
-        </p:nvSpPr>
-        <p:spPr>
-          <a:xfrm>
-            <a:off x="2575407" y="1947672"/>
-            <a:ext cx="8930487" cy="1569720"/>
-          </a:xfrm>
-          <a:prstGeom prst="rect">
-            <a:avLst/>
-          </a:prstGeom>
-          <a:noFill/>
-        </p:spPr>
-        <p:txBody>
-          <a:bodyPr wrap="square" lIns="0" rIns="0" tIns="0" bIns="0" anchor="t">
-            <a:spAutoFit/>
-          </a:bodyPr>
-          <a:lstStyle/>
-          <a:p>
-            <a:pPr algn="l">
-              <a:lnSpc>
-                <a:spcPct val="150000"/>
-              </a:lnSpc>
-            </a:pPr>
-            <a:r>
-              <a:rPr sz="1400" b="1">
-                <a:solidFill>
-                  <a:srgbClr val="7CC8FF"/>
-                </a:solidFill>
-                <a:latin typeface="Consolas"/>
-              </a:rPr>
-              <a:t>  CSV  →  bronze  →  silver  →  gold  →  modelo  →  fila  →  app</a:t>
-            </a:r>
-          </a:p>
-          <a:p>
-            <a:pPr algn="l">
-              <a:lnSpc>
-                <a:spcPct val="150000"/>
-              </a:lnSpc>
-            </a:pPr>
-            <a:r>
-              <a:rPr sz="1400" b="1">
-                <a:solidFill>
-                  <a:srgbClr val="7CC8FF"/>
-                </a:solidFill>
-                <a:latin typeface="Consolas"/>
-              </a:rPr>
-              <a:t>                                  ↑                              │</a:t>
-            </a:r>
-          </a:p>
-          <a:p>
-            <a:pPr algn="l">
-              <a:lnSpc>
-                <a:spcPct val="150000"/>
-              </a:lnSpc>
-            </a:pPr>
-            <a:r>
-              <a:rPr sz="1400" b="1">
-                <a:solidFill>
-                  <a:srgbClr val="7CC8FF"/>
-                </a:solidFill>
-                <a:latin typeface="Consolas"/>
-              </a:rPr>
-              <a:t>                                  │        retorno da ligação    │</a:t>
-            </a:r>
-          </a:p>
-          <a:p>
-            <a:pPr algn="l">
-              <a:lnSpc>
-                <a:spcPct val="150000"/>
-              </a:lnSpc>
-            </a:pPr>
-            <a:r>
-              <a:rPr sz="1400" b="1">
-                <a:solidFill>
-                  <a:srgbClr val="7CC8FF"/>
-                </a:solidFill>
-                <a:latin typeface="Consolas"/>
-              </a:rPr>
-              <a:t>                                  └──────────────────────────────┘</a:t>
-            </a:r>
-          </a:p>
-        </p:txBody>
-      </p:sp>
-      <p:sp>
-        <p:nvSpPr>
-          <p:cNvPr id="7" name="Rounded Rectangle 6"/>
+          <p:cNvPr id="8" name="TextBox 7"/>
+          <p:cNvSpPr txBox="1"/>
+          <p:nvPr/>
+        </p:nvSpPr>
+        <p:spPr>
+          <a:xfrm>
+            <a:off x="941832" y="3415791"/>
+            <a:ext cx="4779111" cy="822960"/>
+          </a:xfrm>
+          <a:prstGeom prst="rect">
+            <a:avLst/>
+          </a:prstGeom>
+          <a:noFill/>
+        </p:spPr>
+        <p:txBody>
+          <a:bodyPr wrap="square" lIns="0" rIns="0" tIns="0" bIns="0" anchor="t">
+            <a:spAutoFit/>
+          </a:bodyPr>
+          <a:lstStyle/>
+          <a:p>
+            <a:pPr algn="l">
+              <a:lnSpc>
+                <a:spcPct val="105000"/>
+              </a:lnSpc>
+            </a:pPr>
+            <a:r>
+              <a:rPr sz="1700" b="1">
+                <a:solidFill>
+                  <a:srgbClr val="FFFFFF"/>
+                </a:solidFill>
+                <a:latin typeface="Arial"/>
+              </a:rPr>
+              <a:t>ANTES do clique</a:t>
+            </a:r>
+          </a:p>
+        </p:txBody>
+      </p:sp>
+      <p:sp>
+        <p:nvSpPr>
+          <p:cNvPr id="9" name="TextBox 8"/>
+          <p:cNvSpPr txBox="1"/>
+          <p:nvPr/>
+        </p:nvSpPr>
+        <p:spPr>
+          <a:xfrm>
+            <a:off x="941832" y="3825493"/>
+            <a:ext cx="4779111" cy="1600200"/>
+          </a:xfrm>
+          <a:prstGeom prst="rect">
+            <a:avLst/>
+          </a:prstGeom>
+          <a:noFill/>
+        </p:spPr>
+        <p:txBody>
+          <a:bodyPr wrap="square" lIns="0" rIns="0" tIns="0" bIns="0" anchor="t">
+            <a:spAutoFit/>
+          </a:bodyPr>
+          <a:lstStyle/>
+          <a:p>
+            <a:pPr algn="l">
+              <a:lnSpc>
+                <a:spcPct val="128000"/>
+              </a:lnSpc>
+            </a:pPr>
+            <a:r>
+              <a:rPr sz="1250" b="0">
+                <a:solidFill>
+                  <a:srgbClr val="9BAAC0"/>
+                </a:solidFill>
+                <a:latin typeface="Arial"/>
+              </a:rPr>
+              <a:t>retorno → NULL</a:t>
+            </a:r>
+          </a:p>
+          <a:p>
+            <a:pPr algn="l">
+              <a:lnSpc>
+                <a:spcPct val="128000"/>
+              </a:lnSpc>
+            </a:pPr>
+            <a:r>
+              <a:rPr sz="1250" b="0">
+                <a:solidFill>
+                  <a:srgbClr val="9BAAC0"/>
+                </a:solidFill>
+                <a:latin typeface="Arial"/>
+              </a:rPr>
+              <a:t>registrado_por → NULL</a:t>
+            </a:r>
+          </a:p>
+          <a:p>
+            <a:pPr algn="l">
+              <a:lnSpc>
+                <a:spcPct val="128000"/>
+              </a:lnSpc>
+            </a:pPr>
+            <a:r>
+              <a:rPr sz="1250" b="0">
+                <a:solidFill>
+                  <a:srgbClr val="9BAAC0"/>
+                </a:solidFill>
+                <a:latin typeface="Arial"/>
+              </a:rPr>
+              <a:t/>
+            </a:r>
+          </a:p>
+          <a:p>
+            <a:pPr algn="l">
+              <a:lnSpc>
+                <a:spcPct val="128000"/>
+              </a:lnSpc>
+            </a:pPr>
+            <a:r>
+              <a:rPr sz="1250" b="0">
+                <a:solidFill>
+                  <a:srgbClr val="9BAAC0"/>
+                </a:solidFill>
+                <a:latin typeface="Arial"/>
+              </a:rPr>
+              <a:t>O pipeline sabe a quem ligar e não sabe o que aconteceu.</a:t>
+            </a:r>
+          </a:p>
+        </p:txBody>
+      </p:sp>
+      <p:sp>
+        <p:nvSpPr>
+          <p:cNvPr id="10" name="Rounded Rectangle 9"/>
           <p:cNvSpPr/>
           <p:nvPr/>
         </p:nvSpPr>
         <p:spPr>
           <a:xfrm>
-            <a:off x="685800" y="3489960"/>
-            <a:ext cx="10820095" cy="1097280"/>
+            <a:off x="6214719" y="3178047"/>
+            <a:ext cx="5291175" cy="1600200"/>
           </a:xfrm>
           <a:prstGeom prst="roundRect">
             <a:avLst>
@@ -23111,14 +24157,188 @@
       </p:sp>
       <p:sp>
         <p:nvSpPr>
-          <p:cNvPr id="8" name="TextBox 7"/>
-          <p:cNvSpPr txBox="1"/>
-          <p:nvPr/>
-        </p:nvSpPr>
-        <p:spPr>
-          <a:xfrm>
-            <a:off x="1069848" y="3788664"/>
-            <a:ext cx="10051999" cy="1097280"/>
+          <p:cNvPr id="11" name="TextBox 10"/>
+          <p:cNvSpPr txBox="1"/>
+          <p:nvPr/>
+        </p:nvSpPr>
+        <p:spPr>
+          <a:xfrm>
+            <a:off x="6470751" y="3415791"/>
+            <a:ext cx="4779111" cy="822960"/>
+          </a:xfrm>
+          <a:prstGeom prst="rect">
+            <a:avLst/>
+          </a:prstGeom>
+          <a:noFill/>
+        </p:spPr>
+        <p:txBody>
+          <a:bodyPr wrap="square" lIns="0" rIns="0" tIns="0" bIns="0" anchor="t">
+            <a:spAutoFit/>
+          </a:bodyPr>
+          <a:lstStyle/>
+          <a:p>
+            <a:pPr algn="l">
+              <a:lnSpc>
+                <a:spcPct val="105000"/>
+              </a:lnSpc>
+            </a:pPr>
+            <a:r>
+              <a:rPr sz="1700" b="1">
+                <a:solidFill>
+                  <a:srgbClr val="3B9DF5"/>
+                </a:solidFill>
+                <a:latin typeface="Arial"/>
+              </a:rPr>
+              <a:t>DEPOIS do clique</a:t>
+            </a:r>
+          </a:p>
+        </p:txBody>
+      </p:sp>
+      <p:sp>
+        <p:nvSpPr>
+          <p:cNvPr id="12" name="TextBox 11"/>
+          <p:cNvSpPr txBox="1"/>
+          <p:nvPr/>
+        </p:nvSpPr>
+        <p:spPr>
+          <a:xfrm>
+            <a:off x="6470751" y="3825493"/>
+            <a:ext cx="4779111" cy="1600200"/>
+          </a:xfrm>
+          <a:prstGeom prst="rect">
+            <a:avLst/>
+          </a:prstGeom>
+          <a:noFill/>
+        </p:spPr>
+        <p:txBody>
+          <a:bodyPr wrap="square" lIns="0" rIns="0" tIns="0" bIns="0" anchor="t">
+            <a:spAutoFit/>
+          </a:bodyPr>
+          <a:lstStyle/>
+          <a:p>
+            <a:pPr algn="l">
+              <a:lnSpc>
+                <a:spcPct val="128000"/>
+              </a:lnSpc>
+            </a:pPr>
+            <a:r>
+              <a:rPr sz="1250" b="0">
+                <a:solidFill>
+                  <a:srgbClr val="9BAAC0"/>
+                </a:solidFill>
+                <a:latin typeface="Arial"/>
+              </a:rPr>
+              <a:t>retorno → vendeu</a:t>
+            </a:r>
+          </a:p>
+          <a:p>
+            <a:pPr algn="l">
+              <a:lnSpc>
+                <a:spcPct val="128000"/>
+              </a:lnSpc>
+            </a:pPr>
+            <a:r>
+              <a:rPr sz="1250" b="0">
+                <a:solidFill>
+                  <a:srgbClr val="9BAAC0"/>
+                </a:solidFill>
+                <a:latin typeface="Arial"/>
+              </a:rPr>
+              <a:t>registrado_por → o seu e-mail</a:t>
+            </a:r>
+          </a:p>
+          <a:p>
+            <a:pPr algn="l">
+              <a:lnSpc>
+                <a:spcPct val="128000"/>
+              </a:lnSpc>
+            </a:pPr>
+            <a:r>
+              <a:rPr sz="1250" b="0">
+                <a:solidFill>
+                  <a:srgbClr val="9BAAC0"/>
+                </a:solidFill>
+                <a:latin typeface="Arial"/>
+              </a:rPr>
+              <a:t/>
+            </a:r>
+          </a:p>
+          <a:p>
+            <a:pPr algn="l">
+              <a:lnSpc>
+                <a:spcPct val="128000"/>
+              </a:lnSpc>
+            </a:pPr>
+            <a:r>
+              <a:rPr sz="1250" b="0">
+                <a:solidFill>
+                  <a:srgbClr val="9BAAC0"/>
+                </a:solidFill>
+                <a:latin typeface="Arial"/>
+              </a:rPr>
+              <a:t>O caminho de volta existe, e tem nome e hora.</a:t>
+            </a:r>
+          </a:p>
+        </p:txBody>
+      </p:sp>
+      <p:sp>
+        <p:nvSpPr>
+          <p:cNvPr id="13" name="Rounded Rectangle 12"/>
+          <p:cNvSpPr/>
+          <p:nvPr/>
+        </p:nvSpPr>
+        <p:spPr>
+          <a:xfrm>
+            <a:off x="685800" y="5760720"/>
+            <a:ext cx="10820095" cy="603504"/>
+          </a:xfrm>
+          <a:prstGeom prst="roundRect">
+            <a:avLst>
+              <a:gd name="adj" fmla="val 8000"/>
+            </a:avLst>
+          </a:prstGeom>
+          <a:solidFill>
+            <a:srgbClr val="142337"/>
+          </a:solidFill>
+          <a:ln w="19050">
+            <a:solidFill>
+              <a:srgbClr val="3B9DF5"/>
+            </a:solidFill>
+          </a:ln>
+          <a:effectLst/>
+        </p:spPr>
+        <p:style>
+          <a:lnRef idx="1">
+            <a:schemeClr val="accent1"/>
+          </a:lnRef>
+          <a:fillRef idx="3">
+            <a:schemeClr val="accent1"/>
+          </a:fillRef>
+          <a:effectRef idx="2">
+            <a:schemeClr val="accent1"/>
+          </a:effectRef>
+          <a:fontRef idx="minor">
+            <a:schemeClr val="lt1"/>
+          </a:fontRef>
+        </p:style>
+        <p:txBody>
+          <a:bodyPr rtlCol="0" anchor="ctr"/>
+          <a:lstStyle/>
+          <a:p>
+            <a:pPr algn="ctr"/>
+          </a:p>
+        </p:txBody>
+      </p:sp>
+      <p:sp>
+        <p:nvSpPr>
+          <p:cNvPr id="14" name="TextBox 13"/>
+          <p:cNvSpPr txBox="1"/>
+          <p:nvPr/>
+        </p:nvSpPr>
+        <p:spPr>
+          <a:xfrm>
+            <a:off x="1069848" y="5950711"/>
+            <a:ext cx="10051999" cy="603504"/>
           </a:xfrm>
           <a:prstGeom prst="rect">
             <a:avLst/>
@@ -23137,29 +24357,13 @@
               </a:lnSpc>
             </a:pPr>
             <a:r>
-              <a:rPr sz="1650" b="1">
+              <a:rPr sz="1600" b="1">
                 <a:solidFill>
                   <a:srgbClr val="FFFFFF"/>
                 </a:solidFill>
                 <a:latin typeface="Arial"/>
               </a:rPr>
-              <a:t>Quatro noites. Um catálogo, um pipeline de 16 tarefas, um modelo, dois Genies e um app.</a:t>
-            </a:r>
-          </a:p>
-          <a:p>
-            <a:pPr algn="ctr">
-              <a:lnSpc>
-                <a:spcPct val="128000"/>
-              </a:lnSpc>
-            </a:pPr>
-            <a:r>
-              <a:rPr sz="1650" b="1">
-                <a:solidFill>
-                  <a:srgbClr val="FFFFFF"/>
-                </a:solidFill>
-                <a:latin typeface="Arial"/>
-              </a:rPr>
-              <a:t>E o dado dá a volta inteira.</a:t>
+              <a:t>Não é o app que impressiona. É o NULL que virou dado.</a:t>
             </a:r>
           </a:p>
         </p:txBody>
@@ -23224,7 +24428,7 @@
                 </a:solidFill>
                 <a:latin typeface="Arial"/>
               </a:rPr>
-              <a:t>UMA QUERY SÓ</a:t>
+              <a:t>DEPLOY Nº 3 · PRONTO</a:t>
             </a:r>
           </a:p>
         </p:txBody>
@@ -23263,7 +24467,7 @@
                 </a:solidFill>
                 <a:latin typeface="Arial"/>
               </a:rPr>
-              <a:t>A imersão inteira, em quatro linhas</a:t>
+              <a:t>Agora clique — e volte para o SQL</a:t>
             </a:r>
           </a:p>
         </p:txBody>
@@ -23315,8 +24519,8 @@
         </p:nvSpPr>
         <p:spPr>
           <a:xfrm>
-            <a:off x="886968" y="1600200"/>
-            <a:ext cx="3566160" cy="274320"/>
+            <a:off x="886968" y="1554480"/>
+            <a:ext cx="4663440" cy="274320"/>
           </a:xfrm>
           <a:prstGeom prst="rect">
             <a:avLst/>
@@ -23341,7 +24545,7 @@
                 </a:solidFill>
                 <a:latin typeface="Arial"/>
               </a:rPr>
-              <a:t>ETAPA</a:t>
+              <a:t>A SEQUÊNCIA</a:t>
             </a:r>
           </a:p>
         </p:txBody>
@@ -23354,8 +24558,8 @@
         </p:nvSpPr>
         <p:spPr>
           <a:xfrm>
-            <a:off x="4727448" y="1600200"/>
-            <a:ext cx="1920240" cy="274320"/>
+            <a:off x="5824728" y="1554480"/>
+            <a:ext cx="5608015" cy="274320"/>
           </a:xfrm>
           <a:prstGeom prst="rect">
             <a:avLst/>
@@ -23380,59 +24584,20 @@
                 </a:solidFill>
                 <a:latin typeface="Arial"/>
               </a:rPr>
-              <a:t>NÚMERO</a:t>
-            </a:r>
-          </a:p>
-        </p:txBody>
-      </p:sp>
-      <p:sp>
-        <p:nvSpPr>
-          <p:cNvPr id="7" name="TextBox 6"/>
-          <p:cNvSpPr txBox="1"/>
-          <p:nvPr/>
-        </p:nvSpPr>
-        <p:spPr>
-          <a:xfrm>
-            <a:off x="6922007" y="1600200"/>
-            <a:ext cx="4510735" cy="274320"/>
-          </a:xfrm>
-          <a:prstGeom prst="rect">
-            <a:avLst/>
-          </a:prstGeom>
-          <a:noFill/>
-        </p:spPr>
-        <p:txBody>
-          <a:bodyPr wrap="square" lIns="0" rIns="0" tIns="0" bIns="0" anchor="t">
-            <a:spAutoFit/>
-          </a:bodyPr>
-          <a:lstStyle/>
-          <a:p>
-            <a:pPr algn="l">
-              <a:lnSpc>
-                <a:spcPct val="100000"/>
-              </a:lnSpc>
-            </a:pPr>
-            <a:r>
-              <a:rPr sz="1100" b="1" spc="120">
-                <a:solidFill>
-                  <a:srgbClr val="3B9DF5"/>
-                </a:solidFill>
-                <a:latin typeface="Arial"/>
-              </a:rPr>
-              <a:t>O QUE É</a:t>
-            </a:r>
-          </a:p>
-        </p:txBody>
-      </p:sp>
-      <p:sp>
-        <p:nvSpPr>
-          <p:cNvPr id="8" name="Rounded Rectangle 7"/>
+              <a:t>O QUE A SALA VÊ</a:t>
+            </a:r>
+          </a:p>
+        </p:txBody>
+      </p:sp>
+      <p:sp>
+        <p:nvSpPr>
+          <p:cNvPr id="7" name="Rounded Rectangle 6"/>
           <p:cNvSpPr/>
           <p:nvPr/>
         </p:nvSpPr>
         <p:spPr>
           <a:xfrm>
-            <a:off x="685800" y="1965960"/>
+            <a:off x="685800" y="1920240"/>
             <a:ext cx="10820095" cy="566928"/>
           </a:xfrm>
           <a:prstGeom prst="roundRect">
@@ -23474,14 +24639,53 @@
       </p:sp>
       <p:sp>
         <p:nvSpPr>
+          <p:cNvPr id="8" name="TextBox 7"/>
+          <p:cNvSpPr txBox="1"/>
+          <p:nvPr/>
+        </p:nvSpPr>
+        <p:spPr>
+          <a:xfrm>
+            <a:off x="886968" y="2096389"/>
+            <a:ext cx="4663440" cy="566928"/>
+          </a:xfrm>
+          <a:prstGeom prst="rect">
+            <a:avLst/>
+          </a:prstGeom>
+          <a:noFill/>
+        </p:spPr>
+        <p:txBody>
+          <a:bodyPr wrap="square" lIns="0" rIns="0" tIns="0" bIns="0" anchor="t">
+            <a:spAutoFit/>
+          </a:bodyPr>
+          <a:lstStyle/>
+          <a:p>
+            <a:pPr algn="l">
+              <a:lnSpc>
+                <a:spcPct val="100000"/>
+              </a:lnSpc>
+            </a:pPr>
+            <a:r>
+              <a:rPr sz="1300" b="1">
+                <a:solidFill>
+                  <a:srgbClr val="FFFFFF"/>
+                </a:solidFill>
+                <a:latin typeface="Arial"/>
+              </a:rPr>
+              <a:t>1 · Farmácia Serena, Goiânia</a:t>
+            </a:r>
+          </a:p>
+        </p:txBody>
+      </p:sp>
+      <p:sp>
+        <p:nvSpPr>
           <p:cNvPr id="9" name="TextBox 8"/>
           <p:cNvSpPr txBox="1"/>
           <p:nvPr/>
         </p:nvSpPr>
         <p:spPr>
           <a:xfrm>
-            <a:off x="886968" y="2142109"/>
-            <a:ext cx="3566160" cy="566928"/>
+            <a:off x="5824728" y="2096389"/>
+            <a:ext cx="5608015" cy="566928"/>
           </a:xfrm>
           <a:prstGeom prst="rect">
             <a:avLst/>
@@ -23500,104 +24704,26 @@
               </a:lnSpc>
             </a:pPr>
             <a:r>
-              <a:rPr sz="1300" b="1">
-                <a:solidFill>
-                  <a:srgbClr val="FFFFFF"/>
-                </a:solidFill>
-                <a:latin typeface="Arial"/>
-              </a:rPr>
-              <a:t>noite 1 · o dado</a:t>
-            </a:r>
-          </a:p>
-        </p:txBody>
-      </p:sp>
-      <p:sp>
-        <p:nvSpPr>
-          <p:cNvPr id="10" name="TextBox 9"/>
-          <p:cNvSpPr txBox="1"/>
-          <p:nvPr/>
-        </p:nvSpPr>
-        <p:spPr>
-          <a:xfrm>
-            <a:off x="4727448" y="2142109"/>
-            <a:ext cx="1920240" cy="566928"/>
-          </a:xfrm>
-          <a:prstGeom prst="rect">
-            <a:avLst/>
-          </a:prstGeom>
-          <a:noFill/>
-        </p:spPr>
-        <p:txBody>
-          <a:bodyPr wrap="square" lIns="0" rIns="0" tIns="0" bIns="0" anchor="t">
-            <a:spAutoFit/>
-          </a:bodyPr>
-          <a:lstStyle/>
-          <a:p>
-            <a:pPr algn="l">
-              <a:lnSpc>
-                <a:spcPct val="100000"/>
-              </a:lnSpc>
-            </a:pPr>
-            <a:r>
               <a:rPr sz="1300" b="0">
                 <a:solidFill>
                   <a:srgbClr val="9BAAC0"/>
                 </a:solidFill>
                 <a:latin typeface="Consolas"/>
               </a:rPr>
-              <a:t>28.729</a:t>
-            </a:r>
-          </a:p>
-        </p:txBody>
-      </p:sp>
-      <p:sp>
-        <p:nvSpPr>
-          <p:cNvPr id="11" name="TextBox 10"/>
-          <p:cNvSpPr txBox="1"/>
-          <p:nvPr/>
-        </p:nvSpPr>
-        <p:spPr>
-          <a:xfrm>
-            <a:off x="6922007" y="2142109"/>
-            <a:ext cx="4510735" cy="566928"/>
-          </a:xfrm>
-          <a:prstGeom prst="rect">
-            <a:avLst/>
-          </a:prstGeom>
-          <a:noFill/>
-        </p:spPr>
-        <p:txBody>
-          <a:bodyPr wrap="square" lIns="0" rIns="0" tIns="0" bIns="0" anchor="t">
-            <a:spAutoFit/>
-          </a:bodyPr>
-          <a:lstStyle/>
-          <a:p>
-            <a:pPr algn="l">
-              <a:lnSpc>
-                <a:spcPct val="100000"/>
-              </a:lnSpc>
-            </a:pPr>
-            <a:r>
-              <a:rPr sz="1300" b="0">
-                <a:solidFill>
-                  <a:srgbClr val="9BAAC0"/>
-                </a:solidFill>
-                <a:latin typeface="Consolas"/>
-              </a:rPr>
-              <a:t>pedidos que chegaram do ERP</a:t>
-            </a:r>
-          </a:p>
-        </p:txBody>
-      </p:sp>
-      <p:sp>
-        <p:nvSpPr>
-          <p:cNvPr id="12" name="Rounded Rectangle 11"/>
+              <a:t>o primeiro da fila, chance de 97%</a:t>
+            </a:r>
+          </a:p>
+        </p:txBody>
+      </p:sp>
+      <p:sp>
+        <p:nvSpPr>
+          <p:cNvPr id="10" name="Rounded Rectangle 9"/>
           <p:cNvSpPr/>
           <p:nvPr/>
         </p:nvSpPr>
         <p:spPr>
           <a:xfrm>
-            <a:off x="685800" y="2624328"/>
+            <a:off x="685800" y="2578608"/>
             <a:ext cx="10820095" cy="566928"/>
           </a:xfrm>
           <a:prstGeom prst="roundRect">
@@ -23639,14 +24765,14 @@
       </p:sp>
       <p:sp>
         <p:nvSpPr>
-          <p:cNvPr id="13" name="TextBox 12"/>
-          <p:cNvSpPr txBox="1"/>
-          <p:nvPr/>
-        </p:nvSpPr>
-        <p:spPr>
-          <a:xfrm>
-            <a:off x="886968" y="2800477"/>
-            <a:ext cx="3566160" cy="566928"/>
+          <p:cNvPr id="11" name="TextBox 10"/>
+          <p:cNvSpPr txBox="1"/>
+          <p:nvPr/>
+        </p:nvSpPr>
+        <p:spPr>
+          <a:xfrm>
+            <a:off x="886968" y="2754757"/>
+            <a:ext cx="4663440" cy="566928"/>
           </a:xfrm>
           <a:prstGeom prst="rect">
             <a:avLst/>
@@ -23671,21 +24797,21 @@
                 </a:solidFill>
                 <a:latin typeface="Arial"/>
               </a:rPr>
-              <a:t>noite 2 · o pipeline</a:t>
-            </a:r>
-          </a:p>
-        </p:txBody>
-      </p:sp>
-      <p:sp>
-        <p:nvSpPr>
-          <p:cNvPr id="14" name="TextBox 13"/>
-          <p:cNvSpPr txBox="1"/>
-          <p:nvPr/>
-        </p:nvSpPr>
-        <p:spPr>
-          <a:xfrm>
-            <a:off x="4727448" y="2800477"/>
-            <a:ext cx="1920240" cy="566928"/>
+              <a:t>2 · comentário e “Vendeu”</a:t>
+            </a:r>
+          </a:p>
+        </p:txBody>
+      </p:sp>
+      <p:sp>
+        <p:nvSpPr>
+          <p:cNvPr id="12" name="TextBox 11"/>
+          <p:cNvSpPr txBox="1"/>
+          <p:nvPr/>
+        </p:nvSpPr>
+        <p:spPr>
+          <a:xfrm>
+            <a:off x="5824728" y="2754757"/>
+            <a:ext cx="5608015" cy="566928"/>
           </a:xfrm>
           <a:prstGeom prst="rect">
             <a:avLst/>
@@ -23710,59 +24836,20 @@
                 </a:solidFill>
                 <a:latin typeface="Consolas"/>
               </a:rPr>
-              <a:t>191.080</a:t>
-            </a:r>
-          </a:p>
-        </p:txBody>
-      </p:sp>
-      <p:sp>
-        <p:nvSpPr>
-          <p:cNvPr id="15" name="TextBox 14"/>
-          <p:cNvSpPr txBox="1"/>
-          <p:nvPr/>
-        </p:nvSpPr>
-        <p:spPr>
-          <a:xfrm>
-            <a:off x="6922007" y="2800477"/>
-            <a:ext cx="4510735" cy="566928"/>
-          </a:xfrm>
-          <a:prstGeom prst="rect">
-            <a:avLst/>
-          </a:prstGeom>
-          <a:noFill/>
-        </p:spPr>
-        <p:txBody>
-          <a:bodyPr wrap="square" lIns="0" rIns="0" tIns="0" bIns="0" anchor="t">
-            <a:spAutoFit/>
-          </a:bodyPr>
-          <a:lstStyle/>
-          <a:p>
-            <a:pPr algn="l">
-              <a:lnSpc>
-                <a:spcPct val="100000"/>
-              </a:lnSpc>
-            </a:pPr>
-            <a:r>
-              <a:rPr sz="1300" b="0">
-                <a:solidFill>
-                  <a:srgbClr val="9BAAC0"/>
-                </a:solidFill>
-                <a:latin typeface="Consolas"/>
-              </a:rPr>
-              <a:t>linhas em gold.fato_vendas</a:t>
-            </a:r>
-          </a:p>
-        </p:txBody>
-      </p:sp>
-      <p:sp>
-        <p:nvSpPr>
-          <p:cNvPr id="16" name="Rounded Rectangle 15"/>
+              <a:t>o cartão vai de 0 para 1</a:t>
+            </a:r>
+          </a:p>
+        </p:txBody>
+      </p:sp>
+      <p:sp>
+        <p:nvSpPr>
+          <p:cNvPr id="13" name="Rounded Rectangle 12"/>
           <p:cNvSpPr/>
           <p:nvPr/>
         </p:nvSpPr>
         <p:spPr>
           <a:xfrm>
-            <a:off x="685800" y="3282696"/>
+            <a:off x="685800" y="3236976"/>
             <a:ext cx="10820095" cy="566928"/>
           </a:xfrm>
           <a:prstGeom prst="roundRect">
@@ -23804,14 +24891,14 @@
       </p:sp>
       <p:sp>
         <p:nvSpPr>
-          <p:cNvPr id="17" name="TextBox 16"/>
-          <p:cNvSpPr txBox="1"/>
-          <p:nvPr/>
-        </p:nvSpPr>
-        <p:spPr>
-          <a:xfrm>
-            <a:off x="886968" y="3458845"/>
-            <a:ext cx="3566160" cy="566928"/>
+          <p:cNvPr id="14" name="TextBox 13"/>
+          <p:cNvSpPr txBox="1"/>
+          <p:nvPr/>
+        </p:nvSpPr>
+        <p:spPr>
+          <a:xfrm>
+            <a:off x="886968" y="3413125"/>
+            <a:ext cx="4663440" cy="566928"/>
           </a:xfrm>
           <a:prstGeom prst="rect">
             <a:avLst/>
@@ -23836,21 +24923,21 @@
                 </a:solidFill>
                 <a:latin typeface="Arial"/>
               </a:rPr>
-              <a:t>noite 3 · a decisão</a:t>
-            </a:r>
-          </a:p>
-        </p:txBody>
-      </p:sp>
-      <p:sp>
-        <p:nvSpPr>
-          <p:cNvPr id="18" name="TextBox 17"/>
-          <p:cNvSpPr txBox="1"/>
-          <p:nvPr/>
-        </p:nvSpPr>
-        <p:spPr>
-          <a:xfrm>
-            <a:off x="4727448" y="3458845"/>
-            <a:ext cx="1920240" cy="566928"/>
+              <a:t>3 · SELECT na retorno_ligacao</a:t>
+            </a:r>
+          </a:p>
+        </p:txBody>
+      </p:sp>
+      <p:sp>
+        <p:nvSpPr>
+          <p:cNvPr id="15" name="TextBox 14"/>
+          <p:cNvSpPr txBox="1"/>
+          <p:nvPr/>
+        </p:nvSpPr>
+        <p:spPr>
+          <a:xfrm>
+            <a:off x="5824728" y="3413125"/>
+            <a:ext cx="5608015" cy="566928"/>
           </a:xfrm>
           <a:prstGeom prst="rect">
             <a:avLst/>
@@ -23875,59 +24962,20 @@
                 </a:solidFill>
                 <a:latin typeface="Consolas"/>
               </a:rPr>
-              <a:t>200</a:t>
-            </a:r>
-          </a:p>
-        </p:txBody>
-      </p:sp>
-      <p:sp>
-        <p:nvSpPr>
-          <p:cNvPr id="19" name="TextBox 18"/>
-          <p:cNvSpPr txBox="1"/>
-          <p:nvPr/>
-        </p:nvSpPr>
-        <p:spPr>
-          <a:xfrm>
-            <a:off x="6922007" y="3458845"/>
-            <a:ext cx="4510735" cy="566928"/>
-          </a:xfrm>
-          <a:prstGeom prst="rect">
-            <a:avLst/>
-          </a:prstGeom>
-          <a:noFill/>
-        </p:spPr>
-        <p:txBody>
-          <a:bodyPr wrap="square" lIns="0" rIns="0" tIns="0" bIns="0" anchor="t">
-            <a:spAutoFit/>
-          </a:bodyPr>
-          <a:lstStyle/>
-          <a:p>
-            <a:pPr algn="l">
-              <a:lnSpc>
-                <a:spcPct val="100000"/>
-              </a:lnSpc>
-            </a:pPr>
-            <a:r>
-              <a:rPr sz="1300" b="0">
-                <a:solidFill>
-                  <a:srgbClr val="9BAAC0"/>
-                </a:solidFill>
-                <a:latin typeface="Consolas"/>
-              </a:rPr>
-              <a:t>contatos na fila desta semana</a:t>
-            </a:r>
-          </a:p>
-        </p:txBody>
-      </p:sp>
-      <p:sp>
-        <p:nvSpPr>
-          <p:cNvPr id="20" name="Rounded Rectangle 19"/>
+              <a:t>a linha está lá, com o SEU e-mail</a:t>
+            </a:r>
+          </a:p>
+        </p:txBody>
+      </p:sp>
+      <p:sp>
+        <p:nvSpPr>
+          <p:cNvPr id="16" name="Rounded Rectangle 15"/>
           <p:cNvSpPr/>
           <p:nvPr/>
         </p:nvSpPr>
         <p:spPr>
           <a:xfrm>
-            <a:off x="685800" y="3941063"/>
+            <a:off x="685800" y="3895344"/>
             <a:ext cx="10820095" cy="566928"/>
           </a:xfrm>
           <a:prstGeom prst="roundRect">
@@ -23969,14 +25017,14 @@
       </p:sp>
       <p:sp>
         <p:nvSpPr>
-          <p:cNvPr id="21" name="TextBox 20"/>
-          <p:cNvSpPr txBox="1"/>
-          <p:nvPr/>
-        </p:nvSpPr>
-        <p:spPr>
-          <a:xfrm>
-            <a:off x="886968" y="4117213"/>
-            <a:ext cx="3566160" cy="566928"/>
+          <p:cNvPr id="17" name="TextBox 16"/>
+          <p:cNvSpPr txBox="1"/>
+          <p:nvPr/>
+        </p:nvSpPr>
+        <p:spPr>
+          <a:xfrm>
+            <a:off x="886968" y="4071493"/>
+            <a:ext cx="4663440" cy="566928"/>
           </a:xfrm>
           <a:prstGeom prst="rect">
             <a:avLst/>
@@ -24001,21 +25049,21 @@
                 </a:solidFill>
                 <a:latin typeface="Arial"/>
               </a:rPr>
-              <a:t>noite 4 · o retorno</a:t>
-            </a:r>
-          </a:p>
-        </p:txBody>
-      </p:sp>
-      <p:sp>
-        <p:nvSpPr>
-          <p:cNvPr id="22" name="TextBox 21"/>
-          <p:cNvSpPr txBox="1"/>
-          <p:nvPr/>
-        </p:nvSpPr>
-        <p:spPr>
-          <a:xfrm>
-            <a:off x="4727448" y="4117213"/>
-            <a:ext cx="1920240" cy="566928"/>
+              <a:t>4 · a mesma pergunta ao Genie</a:t>
+            </a:r>
+          </a:p>
+        </p:txBody>
+      </p:sp>
+      <p:sp>
+        <p:nvSpPr>
+          <p:cNvPr id="18" name="TextBox 17"/>
+          <p:cNvSpPr txBox="1"/>
+          <p:nvPr/>
+        </p:nvSpPr>
+        <p:spPr>
+          <a:xfrm>
+            <a:off x="5824728" y="4071493"/>
+            <a:ext cx="5608015" cy="566928"/>
           </a:xfrm>
           <a:prstGeom prst="rect">
             <a:avLst/>
@@ -24040,60 +25088,21 @@
                 </a:solidFill>
                 <a:latin typeface="Consolas"/>
               </a:rPr>
-              <a:t>1</a:t>
-            </a:r>
-          </a:p>
-        </p:txBody>
-      </p:sp>
-      <p:sp>
-        <p:nvSpPr>
-          <p:cNvPr id="23" name="TextBox 22"/>
-          <p:cNvSpPr txBox="1"/>
-          <p:nvPr/>
-        </p:nvSpPr>
-        <p:spPr>
-          <a:xfrm>
-            <a:off x="6922007" y="4117213"/>
-            <a:ext cx="4510735" cy="566928"/>
-          </a:xfrm>
-          <a:prstGeom prst="rect">
-            <a:avLst/>
-          </a:prstGeom>
-          <a:noFill/>
-        </p:spPr>
-        <p:txBody>
-          <a:bodyPr wrap="square" lIns="0" rIns="0" tIns="0" bIns="0" anchor="t">
-            <a:spAutoFit/>
-          </a:bodyPr>
-          <a:lstStyle/>
-          <a:p>
-            <a:pPr algn="l">
-              <a:lnSpc>
-                <a:spcPct val="100000"/>
-              </a:lnSpc>
-            </a:pPr>
-            <a:r>
-              <a:rPr sz="1300" b="1">
-                <a:solidFill>
-                  <a:srgbClr val="3B9DF5"/>
-                </a:solidFill>
-                <a:latin typeface="Consolas"/>
-              </a:rPr>
-              <a:t>ligações que o time registrou</a:t>
-            </a:r>
-          </a:p>
-        </p:txBody>
-      </p:sp>
-      <p:sp>
-        <p:nvSpPr>
-          <p:cNvPr id="24" name="Rounded Rectangle 23"/>
+              <a:t>responde 1 e 1 — e há 20 min respondia zero</a:t>
+            </a:r>
+          </a:p>
+        </p:txBody>
+      </p:sp>
+      <p:sp>
+        <p:nvSpPr>
+          <p:cNvPr id="19" name="Rounded Rectangle 18"/>
           <p:cNvSpPr/>
           <p:nvPr/>
         </p:nvSpPr>
         <p:spPr>
           <a:xfrm>
-            <a:off x="685800" y="5486400"/>
-            <a:ext cx="10820095" cy="640080"/>
+            <a:off x="685800" y="5394960"/>
+            <a:ext cx="10820095" cy="658368"/>
           </a:xfrm>
           <a:prstGeom prst="roundRect">
             <a:avLst>
@@ -24134,39 +25143,39 @@
       </p:sp>
       <p:sp>
         <p:nvSpPr>
-          <p:cNvPr id="25" name="TextBox 24"/>
-          <p:cNvSpPr txBox="1"/>
-          <p:nvPr/>
-        </p:nvSpPr>
-        <p:spPr>
-          <a:xfrm>
-            <a:off x="1069848" y="5694679"/>
-            <a:ext cx="10051999" cy="640080"/>
-          </a:xfrm>
-          <a:prstGeom prst="rect">
-            <a:avLst/>
-          </a:prstGeom>
-          <a:noFill/>
-        </p:spPr>
-        <p:txBody>
-          <a:bodyPr wrap="square" lIns="0" rIns="0" tIns="0" bIns="0" anchor="t">
-            <a:spAutoFit/>
-          </a:bodyPr>
-          <a:lstStyle/>
-          <a:p>
-            <a:pPr algn="l">
+          <p:cNvPr id="20" name="TextBox 19"/>
+          <p:cNvSpPr txBox="1"/>
+          <p:nvPr/>
+        </p:nvSpPr>
+        <p:spPr>
+          <a:xfrm>
+            <a:off x="1069848" y="5604256"/>
+            <a:ext cx="10051999" cy="658368"/>
+          </a:xfrm>
+          <a:prstGeom prst="rect">
+            <a:avLst/>
+          </a:prstGeom>
+          <a:noFill/>
+        </p:spPr>
+        <p:txBody>
+          <a:bodyPr wrap="square" lIns="0" rIns="0" tIns="0" bIns="0" anchor="t">
+            <a:spAutoFit/>
+          </a:bodyPr>
+          <a:lstStyle/>
+          <a:p>
+            <a:pPr algn="ctr">
               <a:lnSpc>
                 <a:spcPct val="128000"/>
               </a:lnSpc>
             </a:pPr>
             <a:r>
-              <a:rPr sz="1600" b="1">
+              <a:rPr sz="1700" b="1">
                 <a:solidFill>
                   <a:srgbClr val="FFFFFF"/>
                 </a:solidFill>
                 <a:latin typeface="Arial"/>
               </a:rPr>
-              <a:t>A última linha só tem número porque alguém clicou num botão aqui, agora.</a:t>
+              <a:t>Nenhuma linha do Genie mudou. Mudou o dado embaixo dele.</a:t>
             </a:r>
           </a:p>
         </p:txBody>
@@ -24231,7 +25240,7 @@
                 </a:solidFill>
                 <a:latin typeface="Arial"/>
               </a:rPr>
-              <a:t>NÃO É UM CURSO QUE VOCÊ ASSISTIU</a:t>
+              <a:t>O QUE EXISTE AGORA</a:t>
             </a:r>
           </a:p>
         </p:txBody>
@@ -24270,7 +25279,7 @@
                 </a:solidFill>
                 <a:latin typeface="Arial"/>
               </a:rPr>
-              <a:t>O que fica com você</a:t>
+              <a:t>O ciclo fechado</a:t>
             </a:r>
           </a:p>
         </p:txBody>
@@ -24322,8 +25331,8 @@
         </p:nvSpPr>
         <p:spPr>
           <a:xfrm>
-            <a:off x="685800" y="1600200"/>
-            <a:ext cx="3448202" cy="2286000"/>
+            <a:off x="685800" y="1691640"/>
+            <a:ext cx="10820095" cy="1569720"/>
           </a:xfrm>
           <a:prstGeom prst="roundRect">
             <a:avLst>
@@ -24370,212 +25379,95 @@
         </p:nvSpPr>
         <p:spPr>
           <a:xfrm>
-            <a:off x="941832" y="1837944"/>
-            <a:ext cx="2936138" cy="822960"/>
-          </a:xfrm>
-          <a:prstGeom prst="rect">
-            <a:avLst/>
-          </a:prstGeom>
-          <a:noFill/>
-        </p:spPr>
-        <p:txBody>
-          <a:bodyPr wrap="square" lIns="0" rIns="0" tIns="0" bIns="0" anchor="t">
-            <a:spAutoFit/>
-          </a:bodyPr>
-          <a:lstStyle/>
-          <a:p>
-            <a:pPr algn="l">
-              <a:lnSpc>
-                <a:spcPct val="105000"/>
-              </a:lnSpc>
-            </a:pPr>
-            <a:r>
-              <a:rPr sz="1700" b="1">
-                <a:solidFill>
-                  <a:srgbClr val="FFFFFF"/>
-                </a:solidFill>
-                <a:latin typeface="Arial"/>
-              </a:rPr>
-              <a:t>Um repositório</a:t>
-            </a:r>
-          </a:p>
-        </p:txBody>
-      </p:sp>
-      <p:sp>
-        <p:nvSpPr>
-          <p:cNvPr id="7" name="TextBox 6"/>
-          <p:cNvSpPr txBox="1"/>
-          <p:nvPr/>
-        </p:nvSpPr>
-        <p:spPr>
-          <a:xfrm>
-            <a:off x="941832" y="2247646"/>
-            <a:ext cx="2936138" cy="2286000"/>
-          </a:xfrm>
-          <a:prstGeom prst="rect">
-            <a:avLst/>
-          </a:prstGeom>
-          <a:noFill/>
-        </p:spPr>
-        <p:txBody>
-          <a:bodyPr wrap="square" lIns="0" rIns="0" tIns="0" bIns="0" anchor="t">
-            <a:spAutoFit/>
-          </a:bodyPr>
-          <a:lstStyle/>
-          <a:p>
-            <a:pPr algn="l">
-              <a:lnSpc>
-                <a:spcPct val="128000"/>
-              </a:lnSpc>
-            </a:pPr>
-            <a:r>
-              <a:rPr sz="1250" b="0">
-                <a:solidFill>
-                  <a:srgbClr val="9BAAC0"/>
-                </a:solidFill>
-                <a:latin typeface="Arial"/>
-              </a:rPr>
-              <a:t>Bundle versionado, 16 tarefas, testes que quebram o job, dois Genies e um app. Tudo em código, tudo no Git.</a:t>
-            </a:r>
-          </a:p>
-        </p:txBody>
-      </p:sp>
-      <p:sp>
-        <p:nvSpPr>
-          <p:cNvPr id="8" name="Rounded Rectangle 7"/>
+            <a:off x="2575407" y="1947672"/>
+            <a:ext cx="8930487" cy="1569720"/>
+          </a:xfrm>
+          <a:prstGeom prst="rect">
+            <a:avLst/>
+          </a:prstGeom>
+          <a:noFill/>
+        </p:spPr>
+        <p:txBody>
+          <a:bodyPr wrap="square" lIns="0" rIns="0" tIns="0" bIns="0" anchor="t">
+            <a:spAutoFit/>
+          </a:bodyPr>
+          <a:lstStyle/>
+          <a:p>
+            <a:pPr algn="l">
+              <a:lnSpc>
+                <a:spcPct val="150000"/>
+              </a:lnSpc>
+            </a:pPr>
+            <a:r>
+              <a:rPr sz="1400" b="1">
+                <a:solidFill>
+                  <a:srgbClr val="7CC8FF"/>
+                </a:solidFill>
+                <a:latin typeface="Consolas"/>
+              </a:rPr>
+              <a:t>  CSV  →  bronze  →  silver  →  gold  →  modelo  →  fila  →  app</a:t>
+            </a:r>
+          </a:p>
+          <a:p>
+            <a:pPr algn="l">
+              <a:lnSpc>
+                <a:spcPct val="150000"/>
+              </a:lnSpc>
+            </a:pPr>
+            <a:r>
+              <a:rPr sz="1400" b="1">
+                <a:solidFill>
+                  <a:srgbClr val="7CC8FF"/>
+                </a:solidFill>
+                <a:latin typeface="Consolas"/>
+              </a:rPr>
+              <a:t>                                  ↑                              │</a:t>
+            </a:r>
+          </a:p>
+          <a:p>
+            <a:pPr algn="l">
+              <a:lnSpc>
+                <a:spcPct val="150000"/>
+              </a:lnSpc>
+            </a:pPr>
+            <a:r>
+              <a:rPr sz="1400" b="1">
+                <a:solidFill>
+                  <a:srgbClr val="7CC8FF"/>
+                </a:solidFill>
+                <a:latin typeface="Consolas"/>
+              </a:rPr>
+              <a:t>                                  │        retorno da ligação    │</a:t>
+            </a:r>
+          </a:p>
+          <a:p>
+            <a:pPr algn="l">
+              <a:lnSpc>
+                <a:spcPct val="150000"/>
+              </a:lnSpc>
+            </a:pPr>
+            <a:r>
+              <a:rPr sz="1400" b="1">
+                <a:solidFill>
+                  <a:srgbClr val="7CC8FF"/>
+                </a:solidFill>
+                <a:latin typeface="Consolas"/>
+              </a:rPr>
+              <a:t>                                  └──────────────────────────────┘</a:t>
+            </a:r>
+          </a:p>
+        </p:txBody>
+      </p:sp>
+      <p:sp>
+        <p:nvSpPr>
+          <p:cNvPr id="7" name="Rounded Rectangle 6"/>
           <p:cNvSpPr/>
           <p:nvPr/>
         </p:nvSpPr>
         <p:spPr>
           <a:xfrm>
-            <a:off x="4371746" y="1600200"/>
-            <a:ext cx="3448202" cy="2286000"/>
-          </a:xfrm>
-          <a:prstGeom prst="roundRect">
-            <a:avLst>
-              <a:gd name="adj" fmla="val 8000"/>
-            </a:avLst>
-          </a:prstGeom>
-          <a:solidFill>
-            <a:srgbClr val="0D1522"/>
-          </a:solidFill>
-          <a:ln w="15875">
-            <a:solidFill>
-              <a:srgbClr val="1F3A5A"/>
-            </a:solidFill>
-          </a:ln>
-          <a:effectLst/>
-        </p:spPr>
-        <p:style>
-          <a:lnRef idx="1">
-            <a:schemeClr val="accent1"/>
-          </a:lnRef>
-          <a:fillRef idx="3">
-            <a:schemeClr val="accent1"/>
-          </a:fillRef>
-          <a:effectRef idx="2">
-            <a:schemeClr val="accent1"/>
-          </a:effectRef>
-          <a:fontRef idx="minor">
-            <a:schemeClr val="lt1"/>
-          </a:fontRef>
-        </p:style>
-        <p:txBody>
-          <a:bodyPr rtlCol="0" anchor="ctr"/>
-          <a:lstStyle/>
-          <a:p>
-            <a:pPr algn="ctr"/>
-          </a:p>
-        </p:txBody>
-      </p:sp>
-      <p:sp>
-        <p:nvSpPr>
-          <p:cNvPr id="9" name="TextBox 8"/>
-          <p:cNvSpPr txBox="1"/>
-          <p:nvPr/>
-        </p:nvSpPr>
-        <p:spPr>
-          <a:xfrm>
-            <a:off x="4627778" y="1837944"/>
-            <a:ext cx="2936138" cy="822960"/>
-          </a:xfrm>
-          <a:prstGeom prst="rect">
-            <a:avLst/>
-          </a:prstGeom>
-          <a:noFill/>
-        </p:spPr>
-        <p:txBody>
-          <a:bodyPr wrap="square" lIns="0" rIns="0" tIns="0" bIns="0" anchor="t">
-            <a:spAutoFit/>
-          </a:bodyPr>
-          <a:lstStyle/>
-          <a:p>
-            <a:pPr algn="l">
-              <a:lnSpc>
-                <a:spcPct val="105000"/>
-              </a:lnSpc>
-            </a:pPr>
-            <a:r>
-              <a:rPr sz="1700" b="1">
-                <a:solidFill>
-                  <a:srgbClr val="FFFFFF"/>
-                </a:solidFill>
-                <a:latin typeface="Arial"/>
-              </a:rPr>
-              <a:t>Um caso de negócio</a:t>
-            </a:r>
-          </a:p>
-        </p:txBody>
-      </p:sp>
-      <p:sp>
-        <p:nvSpPr>
-          <p:cNvPr id="10" name="TextBox 9"/>
-          <p:cNvSpPr txBox="1"/>
-          <p:nvPr/>
-        </p:nvSpPr>
-        <p:spPr>
-          <a:xfrm>
-            <a:off x="4627778" y="2247646"/>
-            <a:ext cx="2936138" cy="2286000"/>
-          </a:xfrm>
-          <a:prstGeom prst="rect">
-            <a:avLst/>
-          </a:prstGeom>
-          <a:noFill/>
-        </p:spPr>
-        <p:txBody>
-          <a:bodyPr wrap="square" lIns="0" rIns="0" tIns="0" bIns="0" anchor="t">
-            <a:spAutoFit/>
-          </a:bodyPr>
-          <a:lstStyle/>
-          <a:p>
-            <a:pPr algn="l">
-              <a:lnSpc>
-                <a:spcPct val="128000"/>
-              </a:lnSpc>
-            </a:pPr>
-            <a:r>
-              <a:rPr sz="1250" b="0">
-                <a:solidFill>
-                  <a:srgbClr val="9BAAC0"/>
-                </a:solidFill>
-                <a:latin typeface="Arial"/>
-              </a:rPr>
-              <a:t>“4,25× mais pedidos com a mesma equipe” é uma frase de entrevista. E você sabe explicar cada número dela.</a:t>
-            </a:r>
-          </a:p>
-        </p:txBody>
-      </p:sp>
-      <p:sp>
-        <p:nvSpPr>
-          <p:cNvPr id="11" name="Rounded Rectangle 10"/>
-          <p:cNvSpPr/>
-          <p:nvPr/>
-        </p:nvSpPr>
-        <p:spPr>
-          <a:xfrm>
-            <a:off x="8057692" y="1600200"/>
-            <a:ext cx="3448202" cy="2286000"/>
+            <a:off x="685800" y="3489960"/>
+            <a:ext cx="10820095" cy="1097280"/>
           </a:xfrm>
           <a:prstGeom prst="roundRect">
             <a:avLst>
@@ -24616,165 +25508,55 @@
       </p:sp>
       <p:sp>
         <p:nvSpPr>
-          <p:cNvPr id="12" name="TextBox 11"/>
-          <p:cNvSpPr txBox="1"/>
-          <p:nvPr/>
-        </p:nvSpPr>
-        <p:spPr>
-          <a:xfrm>
-            <a:off x="8313724" y="1837944"/>
-            <a:ext cx="2936138" cy="822960"/>
-          </a:xfrm>
-          <a:prstGeom prst="rect">
-            <a:avLst/>
-          </a:prstGeom>
-          <a:noFill/>
-        </p:spPr>
-        <p:txBody>
-          <a:bodyPr wrap="square" lIns="0" rIns="0" tIns="0" bIns="0" anchor="t">
-            <a:spAutoFit/>
-          </a:bodyPr>
-          <a:lstStyle/>
-          <a:p>
-            <a:pPr algn="l">
-              <a:lnSpc>
-                <a:spcPct val="105000"/>
-              </a:lnSpc>
-            </a:pPr>
-            <a:r>
-              <a:rPr sz="1700" b="1">
-                <a:solidFill>
-                  <a:srgbClr val="3B9DF5"/>
-                </a:solidFill>
-                <a:latin typeface="Arial"/>
-              </a:rPr>
-              <a:t>Um método</a:t>
-            </a:r>
-          </a:p>
-        </p:txBody>
-      </p:sp>
-      <p:sp>
-        <p:nvSpPr>
-          <p:cNvPr id="13" name="TextBox 12"/>
-          <p:cNvSpPr txBox="1"/>
-          <p:nvPr/>
-        </p:nvSpPr>
-        <p:spPr>
-          <a:xfrm>
-            <a:off x="8313724" y="2247646"/>
-            <a:ext cx="2936138" cy="2286000"/>
-          </a:xfrm>
-          <a:prstGeom prst="rect">
-            <a:avLst/>
-          </a:prstGeom>
-          <a:noFill/>
-        </p:spPr>
-        <p:txBody>
-          <a:bodyPr wrap="square" lIns="0" rIns="0" tIns="0" bIns="0" anchor="t">
-            <a:spAutoFit/>
-          </a:bodyPr>
-          <a:lstStyle/>
-          <a:p>
-            <a:pPr algn="l">
+          <p:cNvPr id="8" name="TextBox 7"/>
+          <p:cNvSpPr txBox="1"/>
+          <p:nvPr/>
+        </p:nvSpPr>
+        <p:spPr>
+          <a:xfrm>
+            <a:off x="1069848" y="3788664"/>
+            <a:ext cx="10051999" cy="1097280"/>
+          </a:xfrm>
+          <a:prstGeom prst="rect">
+            <a:avLst/>
+          </a:prstGeom>
+          <a:noFill/>
+        </p:spPr>
+        <p:txBody>
+          <a:bodyPr wrap="square" lIns="0" rIns="0" tIns="0" bIns="0" anchor="t">
+            <a:spAutoFit/>
+          </a:bodyPr>
+          <a:lstStyle/>
+          <a:p>
+            <a:pPr algn="ctr">
               <a:lnSpc>
                 <a:spcPct val="128000"/>
               </a:lnSpc>
             </a:pPr>
             <a:r>
-              <a:rPr sz="1250" b="0">
-                <a:solidFill>
-                  <a:srgbClr val="9BAAC0"/>
-                </a:solidFill>
-                <a:latin typeface="Arial"/>
-              </a:rPr>
-              <a:t>Prompt, deploy, conferência contra o banco. Repetido quinze vezes em quatro noites.</a:t>
-            </a:r>
-          </a:p>
-        </p:txBody>
-      </p:sp>
-      <p:sp>
-        <p:nvSpPr>
-          <p:cNvPr id="14" name="Rounded Rectangle 13"/>
-          <p:cNvSpPr/>
-          <p:nvPr/>
-        </p:nvSpPr>
-        <p:spPr>
-          <a:xfrm>
-            <a:off x="685800" y="5394960"/>
-            <a:ext cx="10820095" cy="640080"/>
-          </a:xfrm>
-          <a:prstGeom prst="roundRect">
-            <a:avLst>
-              <a:gd name="adj" fmla="val 8000"/>
-            </a:avLst>
-          </a:prstGeom>
-          <a:solidFill>
-            <a:srgbClr val="142337"/>
-          </a:solidFill>
-          <a:ln w="19050">
-            <a:solidFill>
-              <a:srgbClr val="3B9DF5"/>
-            </a:solidFill>
-          </a:ln>
-          <a:effectLst/>
-        </p:spPr>
-        <p:style>
-          <a:lnRef idx="1">
-            <a:schemeClr val="accent1"/>
-          </a:lnRef>
-          <a:fillRef idx="3">
-            <a:schemeClr val="accent1"/>
-          </a:fillRef>
-          <a:effectRef idx="2">
-            <a:schemeClr val="accent1"/>
-          </a:effectRef>
-          <a:fontRef idx="minor">
-            <a:schemeClr val="lt1"/>
-          </a:fontRef>
-        </p:style>
-        <p:txBody>
-          <a:bodyPr rtlCol="0" anchor="ctr"/>
-          <a:lstStyle/>
-          <a:p>
-            <a:pPr algn="ctr"/>
-          </a:p>
-        </p:txBody>
-      </p:sp>
-      <p:sp>
-        <p:nvSpPr>
-          <p:cNvPr id="15" name="TextBox 14"/>
-          <p:cNvSpPr txBox="1"/>
-          <p:nvPr/>
-        </p:nvSpPr>
-        <p:spPr>
-          <a:xfrm>
-            <a:off x="1069848" y="5603240"/>
-            <a:ext cx="10051999" cy="640080"/>
-          </a:xfrm>
-          <a:prstGeom prst="rect">
-            <a:avLst/>
-          </a:prstGeom>
-          <a:noFill/>
-        </p:spPr>
-        <p:txBody>
-          <a:bodyPr wrap="square" lIns="0" rIns="0" tIns="0" bIns="0" anchor="t">
-            <a:spAutoFit/>
-          </a:bodyPr>
-          <a:lstStyle/>
-          <a:p>
-            <a:pPr algn="l">
+              <a:rPr sz="1650" b="1">
+                <a:solidFill>
+                  <a:srgbClr val="FFFFFF"/>
+                </a:solidFill>
+                <a:latin typeface="Arial"/>
+              </a:rPr>
+              <a:t>Quatro noites. Um catálogo, um pipeline de 16 tarefas, um modelo, dois Genies e um app.</a:t>
+            </a:r>
+          </a:p>
+          <a:p>
+            <a:pPr algn="ctr">
               <a:lnSpc>
                 <a:spcPct val="128000"/>
               </a:lnSpc>
             </a:pPr>
             <a:r>
-              <a:rPr sz="1600" b="1">
+              <a:rPr sz="1650" b="1">
                 <a:solidFill>
                   <a:srgbClr val="FFFFFF"/>
                 </a:solidFill>
                 <a:latin typeface="Arial"/>
               </a:rPr>
-              <a:t>Rode o 99-limpar de cada noite e refaça sozinho. É aí que assenta.</a:t>
+              <a:t>E o dado dá a volta inteira.</a:t>
             </a:r>
           </a:p>
         </p:txBody>
@@ -24839,7 +25621,7 @@
                 </a:solidFill>
                 <a:latin typeface="Arial"/>
               </a:rPr>
-              <a:t>SE VOCÊ QUER CONTINUAR</a:t>
+              <a:t>UMA QUERY SÓ</a:t>
             </a:r>
           </a:p>
         </p:txBody>
@@ -24878,7 +25660,7 @@
                 </a:solidFill>
                 <a:latin typeface="Arial"/>
               </a:rPr>
-              <a:t>Por onde seguir</a:t>
+              <a:t>A imersão inteira, em quatro linhas</a:t>
             </a:r>
           </a:p>
         </p:txBody>
@@ -24924,14 +25706,131 @@
       </p:sp>
       <p:sp>
         <p:nvSpPr>
-          <p:cNvPr id="5" name="Rounded Rectangle 4"/>
+          <p:cNvPr id="5" name="TextBox 4"/>
+          <p:cNvSpPr txBox="1"/>
+          <p:nvPr/>
+        </p:nvSpPr>
+        <p:spPr>
+          <a:xfrm>
+            <a:off x="886968" y="1600200"/>
+            <a:ext cx="3566160" cy="274320"/>
+          </a:xfrm>
+          <a:prstGeom prst="rect">
+            <a:avLst/>
+          </a:prstGeom>
+          <a:noFill/>
+        </p:spPr>
+        <p:txBody>
+          <a:bodyPr wrap="square" lIns="0" rIns="0" tIns="0" bIns="0" anchor="t">
+            <a:spAutoFit/>
+          </a:bodyPr>
+          <a:lstStyle/>
+          <a:p>
+            <a:pPr algn="l">
+              <a:lnSpc>
+                <a:spcPct val="100000"/>
+              </a:lnSpc>
+            </a:pPr>
+            <a:r>
+              <a:rPr sz="1100" b="1" spc="120">
+                <a:solidFill>
+                  <a:srgbClr val="3B9DF5"/>
+                </a:solidFill>
+                <a:latin typeface="Arial"/>
+              </a:rPr>
+              <a:t>ETAPA</a:t>
+            </a:r>
+          </a:p>
+        </p:txBody>
+      </p:sp>
+      <p:sp>
+        <p:nvSpPr>
+          <p:cNvPr id="6" name="TextBox 5"/>
+          <p:cNvSpPr txBox="1"/>
+          <p:nvPr/>
+        </p:nvSpPr>
+        <p:spPr>
+          <a:xfrm>
+            <a:off x="4727448" y="1600200"/>
+            <a:ext cx="1920240" cy="274320"/>
+          </a:xfrm>
+          <a:prstGeom prst="rect">
+            <a:avLst/>
+          </a:prstGeom>
+          <a:noFill/>
+        </p:spPr>
+        <p:txBody>
+          <a:bodyPr wrap="square" lIns="0" rIns="0" tIns="0" bIns="0" anchor="t">
+            <a:spAutoFit/>
+          </a:bodyPr>
+          <a:lstStyle/>
+          <a:p>
+            <a:pPr algn="l">
+              <a:lnSpc>
+                <a:spcPct val="100000"/>
+              </a:lnSpc>
+            </a:pPr>
+            <a:r>
+              <a:rPr sz="1100" b="1" spc="120">
+                <a:solidFill>
+                  <a:srgbClr val="3B9DF5"/>
+                </a:solidFill>
+                <a:latin typeface="Arial"/>
+              </a:rPr>
+              <a:t>NÚMERO</a:t>
+            </a:r>
+          </a:p>
+        </p:txBody>
+      </p:sp>
+      <p:sp>
+        <p:nvSpPr>
+          <p:cNvPr id="7" name="TextBox 6"/>
+          <p:cNvSpPr txBox="1"/>
+          <p:nvPr/>
+        </p:nvSpPr>
+        <p:spPr>
+          <a:xfrm>
+            <a:off x="6922007" y="1600200"/>
+            <a:ext cx="4510735" cy="274320"/>
+          </a:xfrm>
+          <a:prstGeom prst="rect">
+            <a:avLst/>
+          </a:prstGeom>
+          <a:noFill/>
+        </p:spPr>
+        <p:txBody>
+          <a:bodyPr wrap="square" lIns="0" rIns="0" tIns="0" bIns="0" anchor="t">
+            <a:spAutoFit/>
+          </a:bodyPr>
+          <a:lstStyle/>
+          <a:p>
+            <a:pPr algn="l">
+              <a:lnSpc>
+                <a:spcPct val="100000"/>
+              </a:lnSpc>
+            </a:pPr>
+            <a:r>
+              <a:rPr sz="1100" b="1" spc="120">
+                <a:solidFill>
+                  <a:srgbClr val="3B9DF5"/>
+                </a:solidFill>
+                <a:latin typeface="Arial"/>
+              </a:rPr>
+              <a:t>O QUE É</a:t>
+            </a:r>
+          </a:p>
+        </p:txBody>
+      </p:sp>
+      <p:sp>
+        <p:nvSpPr>
+          <p:cNvPr id="8" name="Rounded Rectangle 7"/>
           <p:cNvSpPr/>
           <p:nvPr/>
         </p:nvSpPr>
         <p:spPr>
           <a:xfrm>
-            <a:off x="685800" y="1554480"/>
-            <a:ext cx="10820095" cy="603504"/>
+            <a:off x="685800" y="1965960"/>
+            <a:ext cx="10820095" cy="566928"/>
           </a:xfrm>
           <a:prstGeom prst="roundRect">
             <a:avLst>
@@ -24972,14 +25871,14 @@
       </p:sp>
       <p:sp>
         <p:nvSpPr>
-          <p:cNvPr id="6" name="TextBox 5"/>
-          <p:cNvSpPr txBox="1"/>
-          <p:nvPr/>
-        </p:nvSpPr>
-        <p:spPr>
-          <a:xfrm>
-            <a:off x="996696" y="1744789"/>
-            <a:ext cx="4937759" cy="603504"/>
+          <p:cNvPr id="9" name="TextBox 8"/>
+          <p:cNvSpPr txBox="1"/>
+          <p:nvPr/>
+        </p:nvSpPr>
+        <p:spPr>
+          <a:xfrm>
+            <a:off x="886968" y="2142109"/>
+            <a:ext cx="3566160" cy="566928"/>
           </a:xfrm>
           <a:prstGeom prst="rect">
             <a:avLst/>
@@ -24998,27 +25897,27 @@
               </a:lnSpc>
             </a:pPr>
             <a:r>
-              <a:rPr sz="1350" b="1">
+              <a:rPr sz="1300" b="1">
                 <a:solidFill>
                   <a:srgbClr val="FFFFFF"/>
                 </a:solidFill>
                 <a:latin typeface="Arial"/>
               </a:rPr>
-              <a:t>Refazer as quatro noites sozinho</a:t>
-            </a:r>
-          </a:p>
-        </p:txBody>
-      </p:sp>
-      <p:sp>
-        <p:nvSpPr>
-          <p:cNvPr id="7" name="TextBox 6"/>
-          <p:cNvSpPr txBox="1"/>
-          <p:nvPr/>
-        </p:nvSpPr>
-        <p:spPr>
-          <a:xfrm>
-            <a:off x="6117336" y="1744789"/>
-            <a:ext cx="5059375" cy="603504"/>
+              <a:t>noite 1 · o dado</a:t>
+            </a:r>
+          </a:p>
+        </p:txBody>
+      </p:sp>
+      <p:sp>
+        <p:nvSpPr>
+          <p:cNvPr id="10" name="TextBox 9"/>
+          <p:cNvSpPr txBox="1"/>
+          <p:nvPr/>
+        </p:nvSpPr>
+        <p:spPr>
+          <a:xfrm>
+            <a:off x="4727448" y="2142109"/>
+            <a:ext cx="1920240" cy="566928"/>
           </a:xfrm>
           <a:prstGeom prst="rect">
             <a:avLst/>
@@ -25037,27 +25936,66 @@
               </a:lnSpc>
             </a:pPr>
             <a:r>
-              <a:rPr sz="1350" b="0">
+              <a:rPr sz="1300" b="0">
                 <a:solidFill>
                   <a:srgbClr val="9BAAC0"/>
                 </a:solidFill>
-                <a:latin typeface="Arial"/>
-              </a:rPr>
-              <a:t>os scripts 99-limpar devolvem o ambiente ao estado anterior</a:t>
-            </a:r>
-          </a:p>
-        </p:txBody>
-      </p:sp>
-      <p:sp>
-        <p:nvSpPr>
-          <p:cNvPr id="8" name="Rounded Rectangle 7"/>
+                <a:latin typeface="Consolas"/>
+              </a:rPr>
+              <a:t>28.729</a:t>
+            </a:r>
+          </a:p>
+        </p:txBody>
+      </p:sp>
+      <p:sp>
+        <p:nvSpPr>
+          <p:cNvPr id="11" name="TextBox 10"/>
+          <p:cNvSpPr txBox="1"/>
+          <p:nvPr/>
+        </p:nvSpPr>
+        <p:spPr>
+          <a:xfrm>
+            <a:off x="6922007" y="2142109"/>
+            <a:ext cx="4510735" cy="566928"/>
+          </a:xfrm>
+          <a:prstGeom prst="rect">
+            <a:avLst/>
+          </a:prstGeom>
+          <a:noFill/>
+        </p:spPr>
+        <p:txBody>
+          <a:bodyPr wrap="square" lIns="0" rIns="0" tIns="0" bIns="0" anchor="t">
+            <a:spAutoFit/>
+          </a:bodyPr>
+          <a:lstStyle/>
+          <a:p>
+            <a:pPr algn="l">
+              <a:lnSpc>
+                <a:spcPct val="100000"/>
+              </a:lnSpc>
+            </a:pPr>
+            <a:r>
+              <a:rPr sz="1300" b="0">
+                <a:solidFill>
+                  <a:srgbClr val="9BAAC0"/>
+                </a:solidFill>
+                <a:latin typeface="Consolas"/>
+              </a:rPr>
+              <a:t>pedidos que chegaram do ERP</a:t>
+            </a:r>
+          </a:p>
+        </p:txBody>
+      </p:sp>
+      <p:sp>
+        <p:nvSpPr>
+          <p:cNvPr id="12" name="Rounded Rectangle 11"/>
           <p:cNvSpPr/>
           <p:nvPr/>
         </p:nvSpPr>
         <p:spPr>
           <a:xfrm>
-            <a:off x="685800" y="2286000"/>
-            <a:ext cx="10820095" cy="603504"/>
+            <a:off x="685800" y="2624328"/>
+            <a:ext cx="10820095" cy="566928"/>
           </a:xfrm>
           <a:prstGeom prst="roundRect">
             <a:avLst>
@@ -25098,14 +26036,14 @@
       </p:sp>
       <p:sp>
         <p:nvSpPr>
-          <p:cNvPr id="9" name="TextBox 8"/>
-          <p:cNvSpPr txBox="1"/>
-          <p:nvPr/>
-        </p:nvSpPr>
-        <p:spPr>
-          <a:xfrm>
-            <a:off x="996696" y="2476309"/>
-            <a:ext cx="4937759" cy="603504"/>
+          <p:cNvPr id="13" name="TextBox 12"/>
+          <p:cNvSpPr txBox="1"/>
+          <p:nvPr/>
+        </p:nvSpPr>
+        <p:spPr>
+          <a:xfrm>
+            <a:off x="886968" y="2800477"/>
+            <a:ext cx="3566160" cy="566928"/>
           </a:xfrm>
           <a:prstGeom prst="rect">
             <a:avLst/>
@@ -25124,27 +26062,27 @@
               </a:lnSpc>
             </a:pPr>
             <a:r>
-              <a:rPr sz="1350" b="1">
+              <a:rPr sz="1300" b="1">
                 <a:solidFill>
                   <a:srgbClr val="FFFFFF"/>
                 </a:solidFill>
                 <a:latin typeface="Arial"/>
               </a:rPr>
-              <a:t>Trocar o dataset pelo seu</a:t>
-            </a:r>
-          </a:p>
-        </p:txBody>
-      </p:sp>
-      <p:sp>
-        <p:nvSpPr>
-          <p:cNvPr id="10" name="TextBox 9"/>
-          <p:cNvSpPr txBox="1"/>
-          <p:nvPr/>
-        </p:nvSpPr>
-        <p:spPr>
-          <a:xfrm>
-            <a:off x="6117336" y="2476309"/>
-            <a:ext cx="5059375" cy="603504"/>
+              <a:t>noite 2 · o pipeline</a:t>
+            </a:r>
+          </a:p>
+        </p:txBody>
+      </p:sp>
+      <p:sp>
+        <p:nvSpPr>
+          <p:cNvPr id="14" name="TextBox 13"/>
+          <p:cNvSpPr txBox="1"/>
+          <p:nvPr/>
+        </p:nvSpPr>
+        <p:spPr>
+          <a:xfrm>
+            <a:off x="4727448" y="2800477"/>
+            <a:ext cx="1920240" cy="566928"/>
           </a:xfrm>
           <a:prstGeom prst="rect">
             <a:avLst/>
@@ -25163,27 +26101,66 @@
               </a:lnSpc>
             </a:pPr>
             <a:r>
-              <a:rPr sz="1350" b="0">
+              <a:rPr sz="1300" b="0">
                 <a:solidFill>
                   <a:srgbClr val="9BAAC0"/>
                 </a:solidFill>
-                <a:latin typeface="Arial"/>
-              </a:rPr>
-              <a:t>o formato é CSV; a sujeira do seu ERP é mais interessante que a nossa</a:t>
-            </a:r>
-          </a:p>
-        </p:txBody>
-      </p:sp>
-      <p:sp>
-        <p:nvSpPr>
-          <p:cNvPr id="11" name="Rounded Rectangle 10"/>
+                <a:latin typeface="Consolas"/>
+              </a:rPr>
+              <a:t>191.080</a:t>
+            </a:r>
+          </a:p>
+        </p:txBody>
+      </p:sp>
+      <p:sp>
+        <p:nvSpPr>
+          <p:cNvPr id="15" name="TextBox 14"/>
+          <p:cNvSpPr txBox="1"/>
+          <p:nvPr/>
+        </p:nvSpPr>
+        <p:spPr>
+          <a:xfrm>
+            <a:off x="6922007" y="2800477"/>
+            <a:ext cx="4510735" cy="566928"/>
+          </a:xfrm>
+          <a:prstGeom prst="rect">
+            <a:avLst/>
+          </a:prstGeom>
+          <a:noFill/>
+        </p:spPr>
+        <p:txBody>
+          <a:bodyPr wrap="square" lIns="0" rIns="0" tIns="0" bIns="0" anchor="t">
+            <a:spAutoFit/>
+          </a:bodyPr>
+          <a:lstStyle/>
+          <a:p>
+            <a:pPr algn="l">
+              <a:lnSpc>
+                <a:spcPct val="100000"/>
+              </a:lnSpc>
+            </a:pPr>
+            <a:r>
+              <a:rPr sz="1300" b="0">
+                <a:solidFill>
+                  <a:srgbClr val="9BAAC0"/>
+                </a:solidFill>
+                <a:latin typeface="Consolas"/>
+              </a:rPr>
+              <a:t>linhas em gold.fato_vendas</a:t>
+            </a:r>
+          </a:p>
+        </p:txBody>
+      </p:sp>
+      <p:sp>
+        <p:nvSpPr>
+          <p:cNvPr id="16" name="Rounded Rectangle 15"/>
           <p:cNvSpPr/>
           <p:nvPr/>
         </p:nvSpPr>
         <p:spPr>
           <a:xfrm>
-            <a:off x="685800" y="3017520"/>
-            <a:ext cx="10820095" cy="603504"/>
+            <a:off x="685800" y="3282696"/>
+            <a:ext cx="10820095" cy="566928"/>
           </a:xfrm>
           <a:prstGeom prst="roundRect">
             <a:avLst>
@@ -25224,14 +26201,14 @@
       </p:sp>
       <p:sp>
         <p:nvSpPr>
-          <p:cNvPr id="12" name="TextBox 11"/>
-          <p:cNvSpPr txBox="1"/>
-          <p:nvPr/>
-        </p:nvSpPr>
-        <p:spPr>
-          <a:xfrm>
-            <a:off x="996696" y="3207829"/>
-            <a:ext cx="4937759" cy="603504"/>
+          <p:cNvPr id="17" name="TextBox 16"/>
+          <p:cNvSpPr txBox="1"/>
+          <p:nvPr/>
+        </p:nvSpPr>
+        <p:spPr>
+          <a:xfrm>
+            <a:off x="886968" y="3458845"/>
+            <a:ext cx="3566160" cy="566928"/>
           </a:xfrm>
           <a:prstGeom prst="rect">
             <a:avLst/>
@@ -25250,27 +26227,27 @@
               </a:lnSpc>
             </a:pPr>
             <a:r>
-              <a:rPr sz="1350" b="1">
+              <a:rPr sz="1300" b="1">
                 <a:solidFill>
                   <a:srgbClr val="FFFFFF"/>
                 </a:solidFill>
                 <a:latin typeface="Arial"/>
               </a:rPr>
-              <a:t>Agendar o job e monitorar</a:t>
-            </a:r>
-          </a:p>
-        </p:txBody>
-      </p:sp>
-      <p:sp>
-        <p:nvSpPr>
-          <p:cNvPr id="13" name="TextBox 12"/>
-          <p:cNvSpPr txBox="1"/>
-          <p:nvPr/>
-        </p:nvSpPr>
-        <p:spPr>
-          <a:xfrm>
-            <a:off x="6117336" y="3207829"/>
-            <a:ext cx="5059375" cy="603504"/>
+              <a:t>noite 3 · a decisão</a:t>
+            </a:r>
+          </a:p>
+        </p:txBody>
+      </p:sp>
+      <p:sp>
+        <p:nvSpPr>
+          <p:cNvPr id="18" name="TextBox 17"/>
+          <p:cNvSpPr txBox="1"/>
+          <p:nvPr/>
+        </p:nvSpPr>
+        <p:spPr>
+          <a:xfrm>
+            <a:off x="4727448" y="3458845"/>
+            <a:ext cx="1920240" cy="566928"/>
           </a:xfrm>
           <a:prstGeom prst="rect">
             <a:avLst/>
@@ -25289,27 +26266,66 @@
               </a:lnSpc>
             </a:pPr>
             <a:r>
-              <a:rPr sz="1350" b="0">
+              <a:rPr sz="1300" b="0">
                 <a:solidFill>
                   <a:srgbClr val="9BAAC0"/>
                 </a:solidFill>
-                <a:latin typeface="Arial"/>
-              </a:rPr>
-              <a:t>o pipeline já é agendado — falta você olhar o que ele faz sem você</a:t>
-            </a:r>
-          </a:p>
-        </p:txBody>
-      </p:sp>
-      <p:sp>
-        <p:nvSpPr>
-          <p:cNvPr id="14" name="Rounded Rectangle 13"/>
+                <a:latin typeface="Consolas"/>
+              </a:rPr>
+              <a:t>200</a:t>
+            </a:r>
+          </a:p>
+        </p:txBody>
+      </p:sp>
+      <p:sp>
+        <p:nvSpPr>
+          <p:cNvPr id="19" name="TextBox 18"/>
+          <p:cNvSpPr txBox="1"/>
+          <p:nvPr/>
+        </p:nvSpPr>
+        <p:spPr>
+          <a:xfrm>
+            <a:off x="6922007" y="3458845"/>
+            <a:ext cx="4510735" cy="566928"/>
+          </a:xfrm>
+          <a:prstGeom prst="rect">
+            <a:avLst/>
+          </a:prstGeom>
+          <a:noFill/>
+        </p:spPr>
+        <p:txBody>
+          <a:bodyPr wrap="square" lIns="0" rIns="0" tIns="0" bIns="0" anchor="t">
+            <a:spAutoFit/>
+          </a:bodyPr>
+          <a:lstStyle/>
+          <a:p>
+            <a:pPr algn="l">
+              <a:lnSpc>
+                <a:spcPct val="100000"/>
+              </a:lnSpc>
+            </a:pPr>
+            <a:r>
+              <a:rPr sz="1300" b="0">
+                <a:solidFill>
+                  <a:srgbClr val="9BAAC0"/>
+                </a:solidFill>
+                <a:latin typeface="Consolas"/>
+              </a:rPr>
+              <a:t>contatos na fila desta semana</a:t>
+            </a:r>
+          </a:p>
+        </p:txBody>
+      </p:sp>
+      <p:sp>
+        <p:nvSpPr>
+          <p:cNvPr id="20" name="Rounded Rectangle 19"/>
           <p:cNvSpPr/>
           <p:nvPr/>
         </p:nvSpPr>
         <p:spPr>
           <a:xfrm>
-            <a:off x="685800" y="3749039"/>
-            <a:ext cx="10820095" cy="603504"/>
+            <a:off x="685800" y="3941063"/>
+            <a:ext cx="10820095" cy="566928"/>
           </a:xfrm>
           <a:prstGeom prst="roundRect">
             <a:avLst>
@@ -25350,14 +26366,14 @@
       </p:sp>
       <p:sp>
         <p:nvSpPr>
-          <p:cNvPr id="15" name="TextBox 14"/>
-          <p:cNvSpPr txBox="1"/>
-          <p:nvPr/>
-        </p:nvSpPr>
-        <p:spPr>
-          <a:xfrm>
-            <a:off x="996696" y="3939349"/>
-            <a:ext cx="4937759" cy="603504"/>
+          <p:cNvPr id="21" name="TextBox 20"/>
+          <p:cNvSpPr txBox="1"/>
+          <p:nvPr/>
+        </p:nvSpPr>
+        <p:spPr>
+          <a:xfrm>
+            <a:off x="886968" y="4117213"/>
+            <a:ext cx="3566160" cy="566928"/>
           </a:xfrm>
           <a:prstGeom prst="rect">
             <a:avLst/>
@@ -25376,27 +26392,66 @@
               </a:lnSpc>
             </a:pPr>
             <a:r>
-              <a:rPr sz="1350" b="1">
+              <a:rPr sz="1300" b="1">
+                <a:solidFill>
+                  <a:srgbClr val="FFFFFF"/>
+                </a:solidFill>
+                <a:latin typeface="Arial"/>
+              </a:rPr>
+              <a:t>noite 4 · o retorno</a:t>
+            </a:r>
+          </a:p>
+        </p:txBody>
+      </p:sp>
+      <p:sp>
+        <p:nvSpPr>
+          <p:cNvPr id="22" name="TextBox 21"/>
+          <p:cNvSpPr txBox="1"/>
+          <p:nvPr/>
+        </p:nvSpPr>
+        <p:spPr>
+          <a:xfrm>
+            <a:off x="4727448" y="4117213"/>
+            <a:ext cx="1920240" cy="566928"/>
+          </a:xfrm>
+          <a:prstGeom prst="rect">
+            <a:avLst/>
+          </a:prstGeom>
+          <a:noFill/>
+        </p:spPr>
+        <p:txBody>
+          <a:bodyPr wrap="square" lIns="0" rIns="0" tIns="0" bIns="0" anchor="t">
+            <a:spAutoFit/>
+          </a:bodyPr>
+          <a:lstStyle/>
+          <a:p>
+            <a:pPr algn="l">
+              <a:lnSpc>
+                <a:spcPct val="100000"/>
+              </a:lnSpc>
+            </a:pPr>
+            <a:r>
+              <a:rPr sz="1300" b="1">
                 <a:solidFill>
                   <a:srgbClr val="3B9DF5"/>
                 </a:solidFill>
-                <a:latin typeface="Arial"/>
-              </a:rPr>
-              <a:t>Retreinar com o retorno real</a:t>
-            </a:r>
-          </a:p>
-        </p:txBody>
-      </p:sp>
-      <p:sp>
-        <p:nvSpPr>
-          <p:cNvPr id="16" name="TextBox 15"/>
-          <p:cNvSpPr txBox="1"/>
-          <p:nvPr/>
-        </p:nvSpPr>
-        <p:spPr>
-          <a:xfrm>
-            <a:off x="6117336" y="3939349"/>
-            <a:ext cx="5059375" cy="603504"/>
+                <a:latin typeface="Consolas"/>
+              </a:rPr>
+              <a:t>1</a:t>
+            </a:r>
+          </a:p>
+        </p:txBody>
+      </p:sp>
+      <p:sp>
+        <p:nvSpPr>
+          <p:cNvPr id="23" name="TextBox 22"/>
+          <p:cNvSpPr txBox="1"/>
+          <p:nvPr/>
+        </p:nvSpPr>
+        <p:spPr>
+          <a:xfrm>
+            <a:off x="6922007" y="4117213"/>
+            <a:ext cx="4510735" cy="566928"/>
           </a:xfrm>
           <a:prstGeom prst="rect">
             <a:avLst/>
@@ -25415,27 +26470,27 @@
               </a:lnSpc>
             </a:pPr>
             <a:r>
-              <a:rPr sz="1350" b="0">
-                <a:solidFill>
-                  <a:srgbClr val="9BAAC0"/>
-                </a:solidFill>
-                <a:latin typeface="Arial"/>
-              </a:rPr>
-              <a:t>daqui a um mês, gold.retorno_ligacao tem dado suficiente para virar rótulo</a:t>
-            </a:r>
-          </a:p>
-        </p:txBody>
-      </p:sp>
-      <p:sp>
-        <p:nvSpPr>
-          <p:cNvPr id="17" name="Rounded Rectangle 16"/>
+              <a:rPr sz="1300" b="1">
+                <a:solidFill>
+                  <a:srgbClr val="3B9DF5"/>
+                </a:solidFill>
+                <a:latin typeface="Consolas"/>
+              </a:rPr>
+              <a:t>ligações que o time registrou</a:t>
+            </a:r>
+          </a:p>
+        </p:txBody>
+      </p:sp>
+      <p:sp>
+        <p:nvSpPr>
+          <p:cNvPr id="24" name="Rounded Rectangle 23"/>
           <p:cNvSpPr/>
           <p:nvPr/>
         </p:nvSpPr>
         <p:spPr>
           <a:xfrm>
-            <a:off x="685800" y="5669280"/>
-            <a:ext cx="10820095" cy="603504"/>
+            <a:off x="685800" y="5486400"/>
+            <a:ext cx="10820095" cy="640080"/>
           </a:xfrm>
           <a:prstGeom prst="roundRect">
             <a:avLst>
@@ -25476,14 +26531,14 @@
       </p:sp>
       <p:sp>
         <p:nvSpPr>
-          <p:cNvPr id="18" name="TextBox 17"/>
-          <p:cNvSpPr txBox="1"/>
-          <p:nvPr/>
-        </p:nvSpPr>
-        <p:spPr>
-          <a:xfrm>
-            <a:off x="1069848" y="5863336"/>
-            <a:ext cx="10051999" cy="603504"/>
+          <p:cNvPr id="25" name="TextBox 24"/>
+          <p:cNvSpPr txBox="1"/>
+          <p:nvPr/>
+        </p:nvSpPr>
+        <p:spPr>
+          <a:xfrm>
+            <a:off x="1069848" y="5694679"/>
+            <a:ext cx="10051999" cy="640080"/>
           </a:xfrm>
           <a:prstGeom prst="rect">
             <a:avLst/>
@@ -25502,13 +26557,13 @@
               </a:lnSpc>
             </a:pPr>
             <a:r>
-              <a:rPr sz="1550" b="1">
+              <a:rPr sz="1600" b="1">
                 <a:solidFill>
                   <a:srgbClr val="FFFFFF"/>
                 </a:solidFill>
                 <a:latin typeface="Arial"/>
               </a:rPr>
-              <a:t>O último item é o projeto ficando mais inteligente sozinho — porque o ciclo fechou.</a:t>
+              <a:t>A última linha só tem número porque alguém clicou num botão aqui, agora.</a:t>
             </a:r>
           </a:p>
         </p:txBody>
@@ -25522,6 +26577,2364 @@
 </file>
 
 <file path=ppt/slides/slide44.xml><?xml version="1.0" encoding="utf-8"?>
+<p:sld xmlns:a="http://schemas.openxmlformats.org/drawingml/2006/main" xmlns:p="http://schemas.openxmlformats.org/presentationml/2006/main" xmlns:r="http://schemas.openxmlformats.org/officeDocument/2006/relationships">
+  <p:cSld>
+    <p:bg>
+      <p:bgPr>
+        <a:solidFill>
+          <a:srgbClr val="070C16"/>
+        </a:solidFill>
+        <a:effectLst/>
+      </p:bgPr>
+    </p:bg>
+    <p:spTree>
+      <p:nvGrpSpPr>
+        <p:cNvPr id="1" name=""/>
+        <p:cNvGrpSpPr/>
+        <p:nvPr/>
+      </p:nvGrpSpPr>
+      <p:grpSpPr/>
+      <p:sp>
+        <p:nvSpPr>
+          <p:cNvPr id="2" name="TextBox 1"/>
+          <p:cNvSpPr txBox="1"/>
+          <p:nvPr/>
+        </p:nvSpPr>
+        <p:spPr>
+          <a:xfrm>
+            <a:off x="685800" y="457200"/>
+            <a:ext cx="10820095" cy="256032"/>
+          </a:xfrm>
+          <a:prstGeom prst="rect">
+            <a:avLst/>
+          </a:prstGeom>
+          <a:noFill/>
+        </p:spPr>
+        <p:txBody>
+          <a:bodyPr wrap="square" lIns="0" rIns="0" tIns="0" bIns="0" anchor="t">
+            <a:spAutoFit/>
+          </a:bodyPr>
+          <a:lstStyle/>
+          <a:p>
+            <a:pPr algn="l">
+              <a:lnSpc>
+                <a:spcPct val="100000"/>
+              </a:lnSpc>
+            </a:pPr>
+            <a:r>
+              <a:rPr sz="1150" b="1" spc="180">
+                <a:solidFill>
+                  <a:srgbClr val="3B9DF5"/>
+                </a:solidFill>
+                <a:latin typeface="Arial"/>
+              </a:rPr>
+              <a:t>NÃO É UM CURSO QUE VOCÊ ASSISTIU</a:t>
+            </a:r>
+          </a:p>
+        </p:txBody>
+      </p:sp>
+      <p:sp>
+        <p:nvSpPr>
+          <p:cNvPr id="3" name="TextBox 2"/>
+          <p:cNvSpPr txBox="1"/>
+          <p:nvPr/>
+        </p:nvSpPr>
+        <p:spPr>
+          <a:xfrm>
+            <a:off x="685800" y="804672"/>
+            <a:ext cx="10820095" cy="566928"/>
+          </a:xfrm>
+          <a:prstGeom prst="rect">
+            <a:avLst/>
+          </a:prstGeom>
+          <a:noFill/>
+        </p:spPr>
+        <p:txBody>
+          <a:bodyPr wrap="square" lIns="0" rIns="0" tIns="0" bIns="0" anchor="t">
+            <a:spAutoFit/>
+          </a:bodyPr>
+          <a:lstStyle/>
+          <a:p>
+            <a:pPr algn="l">
+              <a:lnSpc>
+                <a:spcPct val="95000"/>
+              </a:lnSpc>
+            </a:pPr>
+            <a:r>
+              <a:rPr sz="3600" b="1" spc="-30">
+                <a:solidFill>
+                  <a:srgbClr val="FFFFFF"/>
+                </a:solidFill>
+                <a:latin typeface="Arial"/>
+              </a:rPr>
+              <a:t>O que fica com você</a:t>
+            </a:r>
+          </a:p>
+        </p:txBody>
+      </p:sp>
+      <p:sp>
+        <p:nvSpPr>
+          <p:cNvPr id="4" name="TextBox 3"/>
+          <p:cNvSpPr txBox="1"/>
+          <p:nvPr/>
+        </p:nvSpPr>
+        <p:spPr>
+          <a:xfrm>
+            <a:off x="685800" y="6382512"/>
+            <a:ext cx="5486400" cy="274320"/>
+          </a:xfrm>
+          <a:prstGeom prst="rect">
+            <a:avLst/>
+          </a:prstGeom>
+          <a:noFill/>
+        </p:spPr>
+        <p:txBody>
+          <a:bodyPr wrap="square" lIns="0" rIns="0" tIns="0" bIns="0" anchor="t">
+            <a:spAutoFit/>
+          </a:bodyPr>
+          <a:lstStyle/>
+          <a:p>
+            <a:pPr algn="l">
+              <a:lnSpc>
+                <a:spcPct val="100000"/>
+              </a:lnSpc>
+            </a:pPr>
+            <a:r>
+              <a:rPr sz="900" b="1" spc="120">
+                <a:solidFill>
+                  <a:srgbClr val="566A85"/>
+                </a:solidFill>
+                <a:latin typeface="Arial"/>
+              </a:rPr>
+              <a:t>JORNADA DE DADOS</a:t>
+            </a:r>
+          </a:p>
+        </p:txBody>
+      </p:sp>
+      <p:sp>
+        <p:nvSpPr>
+          <p:cNvPr id="5" name="Rounded Rectangle 4"/>
+          <p:cNvSpPr/>
+          <p:nvPr/>
+        </p:nvSpPr>
+        <p:spPr>
+          <a:xfrm>
+            <a:off x="685800" y="1600200"/>
+            <a:ext cx="3448202" cy="2286000"/>
+          </a:xfrm>
+          <a:prstGeom prst="roundRect">
+            <a:avLst>
+              <a:gd name="adj" fmla="val 8000"/>
+            </a:avLst>
+          </a:prstGeom>
+          <a:solidFill>
+            <a:srgbClr val="0D1522"/>
+          </a:solidFill>
+          <a:ln w="15875">
+            <a:solidFill>
+              <a:srgbClr val="1F3A5A"/>
+            </a:solidFill>
+          </a:ln>
+          <a:effectLst/>
+        </p:spPr>
+        <p:style>
+          <a:lnRef idx="1">
+            <a:schemeClr val="accent1"/>
+          </a:lnRef>
+          <a:fillRef idx="3">
+            <a:schemeClr val="accent1"/>
+          </a:fillRef>
+          <a:effectRef idx="2">
+            <a:schemeClr val="accent1"/>
+          </a:effectRef>
+          <a:fontRef idx="minor">
+            <a:schemeClr val="lt1"/>
+          </a:fontRef>
+        </p:style>
+        <p:txBody>
+          <a:bodyPr rtlCol="0" anchor="ctr"/>
+          <a:lstStyle/>
+          <a:p>
+            <a:pPr algn="ctr"/>
+          </a:p>
+        </p:txBody>
+      </p:sp>
+      <p:sp>
+        <p:nvSpPr>
+          <p:cNvPr id="6" name="TextBox 5"/>
+          <p:cNvSpPr txBox="1"/>
+          <p:nvPr/>
+        </p:nvSpPr>
+        <p:spPr>
+          <a:xfrm>
+            <a:off x="941832" y="1837944"/>
+            <a:ext cx="2936138" cy="822960"/>
+          </a:xfrm>
+          <a:prstGeom prst="rect">
+            <a:avLst/>
+          </a:prstGeom>
+          <a:noFill/>
+        </p:spPr>
+        <p:txBody>
+          <a:bodyPr wrap="square" lIns="0" rIns="0" tIns="0" bIns="0" anchor="t">
+            <a:spAutoFit/>
+          </a:bodyPr>
+          <a:lstStyle/>
+          <a:p>
+            <a:pPr algn="l">
+              <a:lnSpc>
+                <a:spcPct val="105000"/>
+              </a:lnSpc>
+            </a:pPr>
+            <a:r>
+              <a:rPr sz="1700" b="1">
+                <a:solidFill>
+                  <a:srgbClr val="FFFFFF"/>
+                </a:solidFill>
+                <a:latin typeface="Arial"/>
+              </a:rPr>
+              <a:t>Um repositório</a:t>
+            </a:r>
+          </a:p>
+        </p:txBody>
+      </p:sp>
+      <p:sp>
+        <p:nvSpPr>
+          <p:cNvPr id="7" name="TextBox 6"/>
+          <p:cNvSpPr txBox="1"/>
+          <p:nvPr/>
+        </p:nvSpPr>
+        <p:spPr>
+          <a:xfrm>
+            <a:off x="941832" y="2247646"/>
+            <a:ext cx="2936138" cy="2286000"/>
+          </a:xfrm>
+          <a:prstGeom prst="rect">
+            <a:avLst/>
+          </a:prstGeom>
+          <a:noFill/>
+        </p:spPr>
+        <p:txBody>
+          <a:bodyPr wrap="square" lIns="0" rIns="0" tIns="0" bIns="0" anchor="t">
+            <a:spAutoFit/>
+          </a:bodyPr>
+          <a:lstStyle/>
+          <a:p>
+            <a:pPr algn="l">
+              <a:lnSpc>
+                <a:spcPct val="128000"/>
+              </a:lnSpc>
+            </a:pPr>
+            <a:r>
+              <a:rPr sz="1250" b="0">
+                <a:solidFill>
+                  <a:srgbClr val="9BAAC0"/>
+                </a:solidFill>
+                <a:latin typeface="Arial"/>
+              </a:rPr>
+              <a:t>Bundle versionado, 16 tarefas, testes que quebram o job, dois Genies e um app. Tudo em código, tudo no Git.</a:t>
+            </a:r>
+          </a:p>
+        </p:txBody>
+      </p:sp>
+      <p:sp>
+        <p:nvSpPr>
+          <p:cNvPr id="8" name="Rounded Rectangle 7"/>
+          <p:cNvSpPr/>
+          <p:nvPr/>
+        </p:nvSpPr>
+        <p:spPr>
+          <a:xfrm>
+            <a:off x="4371746" y="1600200"/>
+            <a:ext cx="3448202" cy="2286000"/>
+          </a:xfrm>
+          <a:prstGeom prst="roundRect">
+            <a:avLst>
+              <a:gd name="adj" fmla="val 8000"/>
+            </a:avLst>
+          </a:prstGeom>
+          <a:solidFill>
+            <a:srgbClr val="0D1522"/>
+          </a:solidFill>
+          <a:ln w="15875">
+            <a:solidFill>
+              <a:srgbClr val="1F3A5A"/>
+            </a:solidFill>
+          </a:ln>
+          <a:effectLst/>
+        </p:spPr>
+        <p:style>
+          <a:lnRef idx="1">
+            <a:schemeClr val="accent1"/>
+          </a:lnRef>
+          <a:fillRef idx="3">
+            <a:schemeClr val="accent1"/>
+          </a:fillRef>
+          <a:effectRef idx="2">
+            <a:schemeClr val="accent1"/>
+          </a:effectRef>
+          <a:fontRef idx="minor">
+            <a:schemeClr val="lt1"/>
+          </a:fontRef>
+        </p:style>
+        <p:txBody>
+          <a:bodyPr rtlCol="0" anchor="ctr"/>
+          <a:lstStyle/>
+          <a:p>
+            <a:pPr algn="ctr"/>
+          </a:p>
+        </p:txBody>
+      </p:sp>
+      <p:sp>
+        <p:nvSpPr>
+          <p:cNvPr id="9" name="TextBox 8"/>
+          <p:cNvSpPr txBox="1"/>
+          <p:nvPr/>
+        </p:nvSpPr>
+        <p:spPr>
+          <a:xfrm>
+            <a:off x="4627778" y="1837944"/>
+            <a:ext cx="2936138" cy="822960"/>
+          </a:xfrm>
+          <a:prstGeom prst="rect">
+            <a:avLst/>
+          </a:prstGeom>
+          <a:noFill/>
+        </p:spPr>
+        <p:txBody>
+          <a:bodyPr wrap="square" lIns="0" rIns="0" tIns="0" bIns="0" anchor="t">
+            <a:spAutoFit/>
+          </a:bodyPr>
+          <a:lstStyle/>
+          <a:p>
+            <a:pPr algn="l">
+              <a:lnSpc>
+                <a:spcPct val="105000"/>
+              </a:lnSpc>
+            </a:pPr>
+            <a:r>
+              <a:rPr sz="1700" b="1">
+                <a:solidFill>
+                  <a:srgbClr val="FFFFFF"/>
+                </a:solidFill>
+                <a:latin typeface="Arial"/>
+              </a:rPr>
+              <a:t>Um caso de negócio</a:t>
+            </a:r>
+          </a:p>
+        </p:txBody>
+      </p:sp>
+      <p:sp>
+        <p:nvSpPr>
+          <p:cNvPr id="10" name="TextBox 9"/>
+          <p:cNvSpPr txBox="1"/>
+          <p:nvPr/>
+        </p:nvSpPr>
+        <p:spPr>
+          <a:xfrm>
+            <a:off x="4627778" y="2247646"/>
+            <a:ext cx="2936138" cy="2286000"/>
+          </a:xfrm>
+          <a:prstGeom prst="rect">
+            <a:avLst/>
+          </a:prstGeom>
+          <a:noFill/>
+        </p:spPr>
+        <p:txBody>
+          <a:bodyPr wrap="square" lIns="0" rIns="0" tIns="0" bIns="0" anchor="t">
+            <a:spAutoFit/>
+          </a:bodyPr>
+          <a:lstStyle/>
+          <a:p>
+            <a:pPr algn="l">
+              <a:lnSpc>
+                <a:spcPct val="128000"/>
+              </a:lnSpc>
+            </a:pPr>
+            <a:r>
+              <a:rPr sz="1250" b="0">
+                <a:solidFill>
+                  <a:srgbClr val="9BAAC0"/>
+                </a:solidFill>
+                <a:latin typeface="Arial"/>
+              </a:rPr>
+              <a:t>“4,25× mais pedidos com a mesma equipe” é uma frase de entrevista. E você sabe explicar cada número dela.</a:t>
+            </a:r>
+          </a:p>
+        </p:txBody>
+      </p:sp>
+      <p:sp>
+        <p:nvSpPr>
+          <p:cNvPr id="11" name="Rounded Rectangle 10"/>
+          <p:cNvSpPr/>
+          <p:nvPr/>
+        </p:nvSpPr>
+        <p:spPr>
+          <a:xfrm>
+            <a:off x="8057692" y="1600200"/>
+            <a:ext cx="3448202" cy="2286000"/>
+          </a:xfrm>
+          <a:prstGeom prst="roundRect">
+            <a:avLst>
+              <a:gd name="adj" fmla="val 8000"/>
+            </a:avLst>
+          </a:prstGeom>
+          <a:solidFill>
+            <a:srgbClr val="142337"/>
+          </a:solidFill>
+          <a:ln w="19050">
+            <a:solidFill>
+              <a:srgbClr val="3B9DF5"/>
+            </a:solidFill>
+          </a:ln>
+          <a:effectLst/>
+        </p:spPr>
+        <p:style>
+          <a:lnRef idx="1">
+            <a:schemeClr val="accent1"/>
+          </a:lnRef>
+          <a:fillRef idx="3">
+            <a:schemeClr val="accent1"/>
+          </a:fillRef>
+          <a:effectRef idx="2">
+            <a:schemeClr val="accent1"/>
+          </a:effectRef>
+          <a:fontRef idx="minor">
+            <a:schemeClr val="lt1"/>
+          </a:fontRef>
+        </p:style>
+        <p:txBody>
+          <a:bodyPr rtlCol="0" anchor="ctr"/>
+          <a:lstStyle/>
+          <a:p>
+            <a:pPr algn="ctr"/>
+          </a:p>
+        </p:txBody>
+      </p:sp>
+      <p:sp>
+        <p:nvSpPr>
+          <p:cNvPr id="12" name="TextBox 11"/>
+          <p:cNvSpPr txBox="1"/>
+          <p:nvPr/>
+        </p:nvSpPr>
+        <p:spPr>
+          <a:xfrm>
+            <a:off x="8313724" y="1837944"/>
+            <a:ext cx="2936138" cy="822960"/>
+          </a:xfrm>
+          <a:prstGeom prst="rect">
+            <a:avLst/>
+          </a:prstGeom>
+          <a:noFill/>
+        </p:spPr>
+        <p:txBody>
+          <a:bodyPr wrap="square" lIns="0" rIns="0" tIns="0" bIns="0" anchor="t">
+            <a:spAutoFit/>
+          </a:bodyPr>
+          <a:lstStyle/>
+          <a:p>
+            <a:pPr algn="l">
+              <a:lnSpc>
+                <a:spcPct val="105000"/>
+              </a:lnSpc>
+            </a:pPr>
+            <a:r>
+              <a:rPr sz="1700" b="1">
+                <a:solidFill>
+                  <a:srgbClr val="3B9DF5"/>
+                </a:solidFill>
+                <a:latin typeface="Arial"/>
+              </a:rPr>
+              <a:t>Um método</a:t>
+            </a:r>
+          </a:p>
+        </p:txBody>
+      </p:sp>
+      <p:sp>
+        <p:nvSpPr>
+          <p:cNvPr id="13" name="TextBox 12"/>
+          <p:cNvSpPr txBox="1"/>
+          <p:nvPr/>
+        </p:nvSpPr>
+        <p:spPr>
+          <a:xfrm>
+            <a:off x="8313724" y="2247646"/>
+            <a:ext cx="2936138" cy="2286000"/>
+          </a:xfrm>
+          <a:prstGeom prst="rect">
+            <a:avLst/>
+          </a:prstGeom>
+          <a:noFill/>
+        </p:spPr>
+        <p:txBody>
+          <a:bodyPr wrap="square" lIns="0" rIns="0" tIns="0" bIns="0" anchor="t">
+            <a:spAutoFit/>
+          </a:bodyPr>
+          <a:lstStyle/>
+          <a:p>
+            <a:pPr algn="l">
+              <a:lnSpc>
+                <a:spcPct val="128000"/>
+              </a:lnSpc>
+            </a:pPr>
+            <a:r>
+              <a:rPr sz="1250" b="0">
+                <a:solidFill>
+                  <a:srgbClr val="9BAAC0"/>
+                </a:solidFill>
+                <a:latin typeface="Arial"/>
+              </a:rPr>
+              <a:t>Prompt, deploy, conferência contra o banco. Repetido quinze vezes em quatro noites.</a:t>
+            </a:r>
+          </a:p>
+        </p:txBody>
+      </p:sp>
+      <p:sp>
+        <p:nvSpPr>
+          <p:cNvPr id="14" name="Rounded Rectangle 13"/>
+          <p:cNvSpPr/>
+          <p:nvPr/>
+        </p:nvSpPr>
+        <p:spPr>
+          <a:xfrm>
+            <a:off x="685800" y="5394960"/>
+            <a:ext cx="10820095" cy="640080"/>
+          </a:xfrm>
+          <a:prstGeom prst="roundRect">
+            <a:avLst>
+              <a:gd name="adj" fmla="val 8000"/>
+            </a:avLst>
+          </a:prstGeom>
+          <a:solidFill>
+            <a:srgbClr val="142337"/>
+          </a:solidFill>
+          <a:ln w="19050">
+            <a:solidFill>
+              <a:srgbClr val="3B9DF5"/>
+            </a:solidFill>
+          </a:ln>
+          <a:effectLst/>
+        </p:spPr>
+        <p:style>
+          <a:lnRef idx="1">
+            <a:schemeClr val="accent1"/>
+          </a:lnRef>
+          <a:fillRef idx="3">
+            <a:schemeClr val="accent1"/>
+          </a:fillRef>
+          <a:effectRef idx="2">
+            <a:schemeClr val="accent1"/>
+          </a:effectRef>
+          <a:fontRef idx="minor">
+            <a:schemeClr val="lt1"/>
+          </a:fontRef>
+        </p:style>
+        <p:txBody>
+          <a:bodyPr rtlCol="0" anchor="ctr"/>
+          <a:lstStyle/>
+          <a:p>
+            <a:pPr algn="ctr"/>
+          </a:p>
+        </p:txBody>
+      </p:sp>
+      <p:sp>
+        <p:nvSpPr>
+          <p:cNvPr id="15" name="TextBox 14"/>
+          <p:cNvSpPr txBox="1"/>
+          <p:nvPr/>
+        </p:nvSpPr>
+        <p:spPr>
+          <a:xfrm>
+            <a:off x="1069848" y="5603240"/>
+            <a:ext cx="10051999" cy="640080"/>
+          </a:xfrm>
+          <a:prstGeom prst="rect">
+            <a:avLst/>
+          </a:prstGeom>
+          <a:noFill/>
+        </p:spPr>
+        <p:txBody>
+          <a:bodyPr wrap="square" lIns="0" rIns="0" tIns="0" bIns="0" anchor="t">
+            <a:spAutoFit/>
+          </a:bodyPr>
+          <a:lstStyle/>
+          <a:p>
+            <a:pPr algn="l">
+              <a:lnSpc>
+                <a:spcPct val="128000"/>
+              </a:lnSpc>
+            </a:pPr>
+            <a:r>
+              <a:rPr sz="1600" b="1">
+                <a:solidFill>
+                  <a:srgbClr val="FFFFFF"/>
+                </a:solidFill>
+                <a:latin typeface="Arial"/>
+              </a:rPr>
+              <a:t>Rode o 99-limpar de cada noite e refaça sozinho. É aí que assenta.</a:t>
+            </a:r>
+          </a:p>
+        </p:txBody>
+      </p:sp>
+    </p:spTree>
+  </p:cSld>
+  <p:clrMapOvr>
+    <a:masterClrMapping/>
+  </p:clrMapOvr>
+</p:sld>
+</file>
+
+<file path=ppt/slides/slide45.xml><?xml version="1.0" encoding="utf-8"?>
+<p:sld xmlns:a="http://schemas.openxmlformats.org/drawingml/2006/main" xmlns:p="http://schemas.openxmlformats.org/presentationml/2006/main" xmlns:r="http://schemas.openxmlformats.org/officeDocument/2006/relationships">
+  <p:cSld>
+    <p:bg>
+      <p:bgPr>
+        <a:solidFill>
+          <a:srgbClr val="070C16"/>
+        </a:solidFill>
+        <a:effectLst/>
+      </p:bgPr>
+    </p:bg>
+    <p:spTree>
+      <p:nvGrpSpPr>
+        <p:cNvPr id="1" name=""/>
+        <p:cNvGrpSpPr/>
+        <p:nvPr/>
+      </p:nvGrpSpPr>
+      <p:grpSpPr/>
+      <p:sp>
+        <p:nvSpPr>
+          <p:cNvPr id="2" name="TextBox 1"/>
+          <p:cNvSpPr txBox="1"/>
+          <p:nvPr/>
+        </p:nvSpPr>
+        <p:spPr>
+          <a:xfrm>
+            <a:off x="685800" y="457200"/>
+            <a:ext cx="10820095" cy="256032"/>
+          </a:xfrm>
+          <a:prstGeom prst="rect">
+            <a:avLst/>
+          </a:prstGeom>
+          <a:noFill/>
+        </p:spPr>
+        <p:txBody>
+          <a:bodyPr wrap="square" lIns="0" rIns="0" tIns="0" bIns="0" anchor="t">
+            <a:spAutoFit/>
+          </a:bodyPr>
+          <a:lstStyle/>
+          <a:p>
+            <a:pPr algn="l">
+              <a:lnSpc>
+                <a:spcPct val="100000"/>
+              </a:lnSpc>
+            </a:pPr>
+            <a:r>
+              <a:rPr sz="1150" b="1" spc="180">
+                <a:solidFill>
+                  <a:srgbClr val="3B9DF5"/>
+                </a:solidFill>
+                <a:latin typeface="Arial"/>
+              </a:rPr>
+              <a:t>SE VOCÊ QUER CONTINUAR</a:t>
+            </a:r>
+          </a:p>
+        </p:txBody>
+      </p:sp>
+      <p:sp>
+        <p:nvSpPr>
+          <p:cNvPr id="3" name="TextBox 2"/>
+          <p:cNvSpPr txBox="1"/>
+          <p:nvPr/>
+        </p:nvSpPr>
+        <p:spPr>
+          <a:xfrm>
+            <a:off x="685800" y="804672"/>
+            <a:ext cx="10820095" cy="566928"/>
+          </a:xfrm>
+          <a:prstGeom prst="rect">
+            <a:avLst/>
+          </a:prstGeom>
+          <a:noFill/>
+        </p:spPr>
+        <p:txBody>
+          <a:bodyPr wrap="square" lIns="0" rIns="0" tIns="0" bIns="0" anchor="t">
+            <a:spAutoFit/>
+          </a:bodyPr>
+          <a:lstStyle/>
+          <a:p>
+            <a:pPr algn="l">
+              <a:lnSpc>
+                <a:spcPct val="95000"/>
+              </a:lnSpc>
+            </a:pPr>
+            <a:r>
+              <a:rPr sz="3600" b="1" spc="-30">
+                <a:solidFill>
+                  <a:srgbClr val="FFFFFF"/>
+                </a:solidFill>
+                <a:latin typeface="Arial"/>
+              </a:rPr>
+              <a:t>Por onde seguir</a:t>
+            </a:r>
+          </a:p>
+        </p:txBody>
+      </p:sp>
+      <p:sp>
+        <p:nvSpPr>
+          <p:cNvPr id="4" name="TextBox 3"/>
+          <p:cNvSpPr txBox="1"/>
+          <p:nvPr/>
+        </p:nvSpPr>
+        <p:spPr>
+          <a:xfrm>
+            <a:off x="685800" y="6382512"/>
+            <a:ext cx="5486400" cy="274320"/>
+          </a:xfrm>
+          <a:prstGeom prst="rect">
+            <a:avLst/>
+          </a:prstGeom>
+          <a:noFill/>
+        </p:spPr>
+        <p:txBody>
+          <a:bodyPr wrap="square" lIns="0" rIns="0" tIns="0" bIns="0" anchor="t">
+            <a:spAutoFit/>
+          </a:bodyPr>
+          <a:lstStyle/>
+          <a:p>
+            <a:pPr algn="l">
+              <a:lnSpc>
+                <a:spcPct val="100000"/>
+              </a:lnSpc>
+            </a:pPr>
+            <a:r>
+              <a:rPr sz="900" b="1" spc="120">
+                <a:solidFill>
+                  <a:srgbClr val="566A85"/>
+                </a:solidFill>
+                <a:latin typeface="Arial"/>
+              </a:rPr>
+              <a:t>JORNADA DE DADOS</a:t>
+            </a:r>
+          </a:p>
+        </p:txBody>
+      </p:sp>
+      <p:sp>
+        <p:nvSpPr>
+          <p:cNvPr id="5" name="Rounded Rectangle 4"/>
+          <p:cNvSpPr/>
+          <p:nvPr/>
+        </p:nvSpPr>
+        <p:spPr>
+          <a:xfrm>
+            <a:off x="685800" y="1554480"/>
+            <a:ext cx="10820095" cy="603504"/>
+          </a:xfrm>
+          <a:prstGeom prst="roundRect">
+            <a:avLst>
+              <a:gd name="adj" fmla="val 8000"/>
+            </a:avLst>
+          </a:prstGeom>
+          <a:solidFill>
+            <a:srgbClr val="0D1522"/>
+          </a:solidFill>
+          <a:ln w="15875">
+            <a:solidFill>
+              <a:srgbClr val="1F3A5A"/>
+            </a:solidFill>
+          </a:ln>
+          <a:effectLst/>
+        </p:spPr>
+        <p:style>
+          <a:lnRef idx="1">
+            <a:schemeClr val="accent1"/>
+          </a:lnRef>
+          <a:fillRef idx="3">
+            <a:schemeClr val="accent1"/>
+          </a:fillRef>
+          <a:effectRef idx="2">
+            <a:schemeClr val="accent1"/>
+          </a:effectRef>
+          <a:fontRef idx="minor">
+            <a:schemeClr val="lt1"/>
+          </a:fontRef>
+        </p:style>
+        <p:txBody>
+          <a:bodyPr rtlCol="0" anchor="ctr"/>
+          <a:lstStyle/>
+          <a:p>
+            <a:pPr algn="ctr"/>
+          </a:p>
+        </p:txBody>
+      </p:sp>
+      <p:sp>
+        <p:nvSpPr>
+          <p:cNvPr id="6" name="TextBox 5"/>
+          <p:cNvSpPr txBox="1"/>
+          <p:nvPr/>
+        </p:nvSpPr>
+        <p:spPr>
+          <a:xfrm>
+            <a:off x="996696" y="1744789"/>
+            <a:ext cx="4937759" cy="603504"/>
+          </a:xfrm>
+          <a:prstGeom prst="rect">
+            <a:avLst/>
+          </a:prstGeom>
+          <a:noFill/>
+        </p:spPr>
+        <p:txBody>
+          <a:bodyPr wrap="square" lIns="0" rIns="0" tIns="0" bIns="0" anchor="t">
+            <a:spAutoFit/>
+          </a:bodyPr>
+          <a:lstStyle/>
+          <a:p>
+            <a:pPr algn="l">
+              <a:lnSpc>
+                <a:spcPct val="100000"/>
+              </a:lnSpc>
+            </a:pPr>
+            <a:r>
+              <a:rPr sz="1350" b="1">
+                <a:solidFill>
+                  <a:srgbClr val="FFFFFF"/>
+                </a:solidFill>
+                <a:latin typeface="Arial"/>
+              </a:rPr>
+              <a:t>Refazer as quatro noites sozinho</a:t>
+            </a:r>
+          </a:p>
+        </p:txBody>
+      </p:sp>
+      <p:sp>
+        <p:nvSpPr>
+          <p:cNvPr id="7" name="TextBox 6"/>
+          <p:cNvSpPr txBox="1"/>
+          <p:nvPr/>
+        </p:nvSpPr>
+        <p:spPr>
+          <a:xfrm>
+            <a:off x="6117336" y="1744789"/>
+            <a:ext cx="5059375" cy="603504"/>
+          </a:xfrm>
+          <a:prstGeom prst="rect">
+            <a:avLst/>
+          </a:prstGeom>
+          <a:noFill/>
+        </p:spPr>
+        <p:txBody>
+          <a:bodyPr wrap="square" lIns="0" rIns="0" tIns="0" bIns="0" anchor="t">
+            <a:spAutoFit/>
+          </a:bodyPr>
+          <a:lstStyle/>
+          <a:p>
+            <a:pPr algn="l">
+              <a:lnSpc>
+                <a:spcPct val="100000"/>
+              </a:lnSpc>
+            </a:pPr>
+            <a:r>
+              <a:rPr sz="1350" b="0">
+                <a:solidFill>
+                  <a:srgbClr val="9BAAC0"/>
+                </a:solidFill>
+                <a:latin typeface="Arial"/>
+              </a:rPr>
+              <a:t>os scripts 99-limpar devolvem o ambiente ao estado anterior</a:t>
+            </a:r>
+          </a:p>
+        </p:txBody>
+      </p:sp>
+      <p:sp>
+        <p:nvSpPr>
+          <p:cNvPr id="8" name="Rounded Rectangle 7"/>
+          <p:cNvSpPr/>
+          <p:nvPr/>
+        </p:nvSpPr>
+        <p:spPr>
+          <a:xfrm>
+            <a:off x="685800" y="2286000"/>
+            <a:ext cx="10820095" cy="603504"/>
+          </a:xfrm>
+          <a:prstGeom prst="roundRect">
+            <a:avLst>
+              <a:gd name="adj" fmla="val 8000"/>
+            </a:avLst>
+          </a:prstGeom>
+          <a:solidFill>
+            <a:srgbClr val="0D1522"/>
+          </a:solidFill>
+          <a:ln w="15875">
+            <a:solidFill>
+              <a:srgbClr val="1F3A5A"/>
+            </a:solidFill>
+          </a:ln>
+          <a:effectLst/>
+        </p:spPr>
+        <p:style>
+          <a:lnRef idx="1">
+            <a:schemeClr val="accent1"/>
+          </a:lnRef>
+          <a:fillRef idx="3">
+            <a:schemeClr val="accent1"/>
+          </a:fillRef>
+          <a:effectRef idx="2">
+            <a:schemeClr val="accent1"/>
+          </a:effectRef>
+          <a:fontRef idx="minor">
+            <a:schemeClr val="lt1"/>
+          </a:fontRef>
+        </p:style>
+        <p:txBody>
+          <a:bodyPr rtlCol="0" anchor="ctr"/>
+          <a:lstStyle/>
+          <a:p>
+            <a:pPr algn="ctr"/>
+          </a:p>
+        </p:txBody>
+      </p:sp>
+      <p:sp>
+        <p:nvSpPr>
+          <p:cNvPr id="9" name="TextBox 8"/>
+          <p:cNvSpPr txBox="1"/>
+          <p:nvPr/>
+        </p:nvSpPr>
+        <p:spPr>
+          <a:xfrm>
+            <a:off x="996696" y="2476309"/>
+            <a:ext cx="4937759" cy="603504"/>
+          </a:xfrm>
+          <a:prstGeom prst="rect">
+            <a:avLst/>
+          </a:prstGeom>
+          <a:noFill/>
+        </p:spPr>
+        <p:txBody>
+          <a:bodyPr wrap="square" lIns="0" rIns="0" tIns="0" bIns="0" anchor="t">
+            <a:spAutoFit/>
+          </a:bodyPr>
+          <a:lstStyle/>
+          <a:p>
+            <a:pPr algn="l">
+              <a:lnSpc>
+                <a:spcPct val="100000"/>
+              </a:lnSpc>
+            </a:pPr>
+            <a:r>
+              <a:rPr sz="1350" b="1">
+                <a:solidFill>
+                  <a:srgbClr val="FFFFFF"/>
+                </a:solidFill>
+                <a:latin typeface="Arial"/>
+              </a:rPr>
+              <a:t>Trocar o dataset pelo seu</a:t>
+            </a:r>
+          </a:p>
+        </p:txBody>
+      </p:sp>
+      <p:sp>
+        <p:nvSpPr>
+          <p:cNvPr id="10" name="TextBox 9"/>
+          <p:cNvSpPr txBox="1"/>
+          <p:nvPr/>
+        </p:nvSpPr>
+        <p:spPr>
+          <a:xfrm>
+            <a:off x="6117336" y="2476309"/>
+            <a:ext cx="5059375" cy="603504"/>
+          </a:xfrm>
+          <a:prstGeom prst="rect">
+            <a:avLst/>
+          </a:prstGeom>
+          <a:noFill/>
+        </p:spPr>
+        <p:txBody>
+          <a:bodyPr wrap="square" lIns="0" rIns="0" tIns="0" bIns="0" anchor="t">
+            <a:spAutoFit/>
+          </a:bodyPr>
+          <a:lstStyle/>
+          <a:p>
+            <a:pPr algn="l">
+              <a:lnSpc>
+                <a:spcPct val="100000"/>
+              </a:lnSpc>
+            </a:pPr>
+            <a:r>
+              <a:rPr sz="1350" b="0">
+                <a:solidFill>
+                  <a:srgbClr val="9BAAC0"/>
+                </a:solidFill>
+                <a:latin typeface="Arial"/>
+              </a:rPr>
+              <a:t>o formato é CSV; a sujeira do seu ERP é mais interessante que a nossa</a:t>
+            </a:r>
+          </a:p>
+        </p:txBody>
+      </p:sp>
+      <p:sp>
+        <p:nvSpPr>
+          <p:cNvPr id="11" name="Rounded Rectangle 10"/>
+          <p:cNvSpPr/>
+          <p:nvPr/>
+        </p:nvSpPr>
+        <p:spPr>
+          <a:xfrm>
+            <a:off x="685800" y="3017520"/>
+            <a:ext cx="10820095" cy="603504"/>
+          </a:xfrm>
+          <a:prstGeom prst="roundRect">
+            <a:avLst>
+              <a:gd name="adj" fmla="val 8000"/>
+            </a:avLst>
+          </a:prstGeom>
+          <a:solidFill>
+            <a:srgbClr val="0D1522"/>
+          </a:solidFill>
+          <a:ln w="15875">
+            <a:solidFill>
+              <a:srgbClr val="1F3A5A"/>
+            </a:solidFill>
+          </a:ln>
+          <a:effectLst/>
+        </p:spPr>
+        <p:style>
+          <a:lnRef idx="1">
+            <a:schemeClr val="accent1"/>
+          </a:lnRef>
+          <a:fillRef idx="3">
+            <a:schemeClr val="accent1"/>
+          </a:fillRef>
+          <a:effectRef idx="2">
+            <a:schemeClr val="accent1"/>
+          </a:effectRef>
+          <a:fontRef idx="minor">
+            <a:schemeClr val="lt1"/>
+          </a:fontRef>
+        </p:style>
+        <p:txBody>
+          <a:bodyPr rtlCol="0" anchor="ctr"/>
+          <a:lstStyle/>
+          <a:p>
+            <a:pPr algn="ctr"/>
+          </a:p>
+        </p:txBody>
+      </p:sp>
+      <p:sp>
+        <p:nvSpPr>
+          <p:cNvPr id="12" name="TextBox 11"/>
+          <p:cNvSpPr txBox="1"/>
+          <p:nvPr/>
+        </p:nvSpPr>
+        <p:spPr>
+          <a:xfrm>
+            <a:off x="996696" y="3207829"/>
+            <a:ext cx="4937759" cy="603504"/>
+          </a:xfrm>
+          <a:prstGeom prst="rect">
+            <a:avLst/>
+          </a:prstGeom>
+          <a:noFill/>
+        </p:spPr>
+        <p:txBody>
+          <a:bodyPr wrap="square" lIns="0" rIns="0" tIns="0" bIns="0" anchor="t">
+            <a:spAutoFit/>
+          </a:bodyPr>
+          <a:lstStyle/>
+          <a:p>
+            <a:pPr algn="l">
+              <a:lnSpc>
+                <a:spcPct val="100000"/>
+              </a:lnSpc>
+            </a:pPr>
+            <a:r>
+              <a:rPr sz="1350" b="1">
+                <a:solidFill>
+                  <a:srgbClr val="FFFFFF"/>
+                </a:solidFill>
+                <a:latin typeface="Arial"/>
+              </a:rPr>
+              <a:t>Agendar o job e monitorar</a:t>
+            </a:r>
+          </a:p>
+        </p:txBody>
+      </p:sp>
+      <p:sp>
+        <p:nvSpPr>
+          <p:cNvPr id="13" name="TextBox 12"/>
+          <p:cNvSpPr txBox="1"/>
+          <p:nvPr/>
+        </p:nvSpPr>
+        <p:spPr>
+          <a:xfrm>
+            <a:off x="6117336" y="3207829"/>
+            <a:ext cx="5059375" cy="603504"/>
+          </a:xfrm>
+          <a:prstGeom prst="rect">
+            <a:avLst/>
+          </a:prstGeom>
+          <a:noFill/>
+        </p:spPr>
+        <p:txBody>
+          <a:bodyPr wrap="square" lIns="0" rIns="0" tIns="0" bIns="0" anchor="t">
+            <a:spAutoFit/>
+          </a:bodyPr>
+          <a:lstStyle/>
+          <a:p>
+            <a:pPr algn="l">
+              <a:lnSpc>
+                <a:spcPct val="100000"/>
+              </a:lnSpc>
+            </a:pPr>
+            <a:r>
+              <a:rPr sz="1350" b="0">
+                <a:solidFill>
+                  <a:srgbClr val="9BAAC0"/>
+                </a:solidFill>
+                <a:latin typeface="Arial"/>
+              </a:rPr>
+              <a:t>o pipeline já é agendado — falta você olhar o que ele faz sem você</a:t>
+            </a:r>
+          </a:p>
+        </p:txBody>
+      </p:sp>
+      <p:sp>
+        <p:nvSpPr>
+          <p:cNvPr id="14" name="Rounded Rectangle 13"/>
+          <p:cNvSpPr/>
+          <p:nvPr/>
+        </p:nvSpPr>
+        <p:spPr>
+          <a:xfrm>
+            <a:off x="685800" y="3749039"/>
+            <a:ext cx="10820095" cy="603504"/>
+          </a:xfrm>
+          <a:prstGeom prst="roundRect">
+            <a:avLst>
+              <a:gd name="adj" fmla="val 8000"/>
+            </a:avLst>
+          </a:prstGeom>
+          <a:solidFill>
+            <a:srgbClr val="142337"/>
+          </a:solidFill>
+          <a:ln w="19050">
+            <a:solidFill>
+              <a:srgbClr val="3B9DF5"/>
+            </a:solidFill>
+          </a:ln>
+          <a:effectLst/>
+        </p:spPr>
+        <p:style>
+          <a:lnRef idx="1">
+            <a:schemeClr val="accent1"/>
+          </a:lnRef>
+          <a:fillRef idx="3">
+            <a:schemeClr val="accent1"/>
+          </a:fillRef>
+          <a:effectRef idx="2">
+            <a:schemeClr val="accent1"/>
+          </a:effectRef>
+          <a:fontRef idx="minor">
+            <a:schemeClr val="lt1"/>
+          </a:fontRef>
+        </p:style>
+        <p:txBody>
+          <a:bodyPr rtlCol="0" anchor="ctr"/>
+          <a:lstStyle/>
+          <a:p>
+            <a:pPr algn="ctr"/>
+          </a:p>
+        </p:txBody>
+      </p:sp>
+      <p:sp>
+        <p:nvSpPr>
+          <p:cNvPr id="15" name="TextBox 14"/>
+          <p:cNvSpPr txBox="1"/>
+          <p:nvPr/>
+        </p:nvSpPr>
+        <p:spPr>
+          <a:xfrm>
+            <a:off x="996696" y="3939349"/>
+            <a:ext cx="4937759" cy="603504"/>
+          </a:xfrm>
+          <a:prstGeom prst="rect">
+            <a:avLst/>
+          </a:prstGeom>
+          <a:noFill/>
+        </p:spPr>
+        <p:txBody>
+          <a:bodyPr wrap="square" lIns="0" rIns="0" tIns="0" bIns="0" anchor="t">
+            <a:spAutoFit/>
+          </a:bodyPr>
+          <a:lstStyle/>
+          <a:p>
+            <a:pPr algn="l">
+              <a:lnSpc>
+                <a:spcPct val="100000"/>
+              </a:lnSpc>
+            </a:pPr>
+            <a:r>
+              <a:rPr sz="1350" b="1">
+                <a:solidFill>
+                  <a:srgbClr val="3B9DF5"/>
+                </a:solidFill>
+                <a:latin typeface="Arial"/>
+              </a:rPr>
+              <a:t>Retreinar com o retorno real</a:t>
+            </a:r>
+          </a:p>
+        </p:txBody>
+      </p:sp>
+      <p:sp>
+        <p:nvSpPr>
+          <p:cNvPr id="16" name="TextBox 15"/>
+          <p:cNvSpPr txBox="1"/>
+          <p:nvPr/>
+        </p:nvSpPr>
+        <p:spPr>
+          <a:xfrm>
+            <a:off x="6117336" y="3939349"/>
+            <a:ext cx="5059375" cy="603504"/>
+          </a:xfrm>
+          <a:prstGeom prst="rect">
+            <a:avLst/>
+          </a:prstGeom>
+          <a:noFill/>
+        </p:spPr>
+        <p:txBody>
+          <a:bodyPr wrap="square" lIns="0" rIns="0" tIns="0" bIns="0" anchor="t">
+            <a:spAutoFit/>
+          </a:bodyPr>
+          <a:lstStyle/>
+          <a:p>
+            <a:pPr algn="l">
+              <a:lnSpc>
+                <a:spcPct val="100000"/>
+              </a:lnSpc>
+            </a:pPr>
+            <a:r>
+              <a:rPr sz="1350" b="0">
+                <a:solidFill>
+                  <a:srgbClr val="9BAAC0"/>
+                </a:solidFill>
+                <a:latin typeface="Arial"/>
+              </a:rPr>
+              <a:t>daqui a um mês, gold.retorno_ligacao tem dado suficiente para virar rótulo</a:t>
+            </a:r>
+          </a:p>
+        </p:txBody>
+      </p:sp>
+      <p:sp>
+        <p:nvSpPr>
+          <p:cNvPr id="17" name="Rounded Rectangle 16"/>
+          <p:cNvSpPr/>
+          <p:nvPr/>
+        </p:nvSpPr>
+        <p:spPr>
+          <a:xfrm>
+            <a:off x="685800" y="5669280"/>
+            <a:ext cx="10820095" cy="603504"/>
+          </a:xfrm>
+          <a:prstGeom prst="roundRect">
+            <a:avLst>
+              <a:gd name="adj" fmla="val 8000"/>
+            </a:avLst>
+          </a:prstGeom>
+          <a:solidFill>
+            <a:srgbClr val="142337"/>
+          </a:solidFill>
+          <a:ln w="19050">
+            <a:solidFill>
+              <a:srgbClr val="3B9DF5"/>
+            </a:solidFill>
+          </a:ln>
+          <a:effectLst/>
+        </p:spPr>
+        <p:style>
+          <a:lnRef idx="1">
+            <a:schemeClr val="accent1"/>
+          </a:lnRef>
+          <a:fillRef idx="3">
+            <a:schemeClr val="accent1"/>
+          </a:fillRef>
+          <a:effectRef idx="2">
+            <a:schemeClr val="accent1"/>
+          </a:effectRef>
+          <a:fontRef idx="minor">
+            <a:schemeClr val="lt1"/>
+          </a:fontRef>
+        </p:style>
+        <p:txBody>
+          <a:bodyPr rtlCol="0" anchor="ctr"/>
+          <a:lstStyle/>
+          <a:p>
+            <a:pPr algn="ctr"/>
+          </a:p>
+        </p:txBody>
+      </p:sp>
+      <p:sp>
+        <p:nvSpPr>
+          <p:cNvPr id="18" name="TextBox 17"/>
+          <p:cNvSpPr txBox="1"/>
+          <p:nvPr/>
+        </p:nvSpPr>
+        <p:spPr>
+          <a:xfrm>
+            <a:off x="1069848" y="5863336"/>
+            <a:ext cx="10051999" cy="603504"/>
+          </a:xfrm>
+          <a:prstGeom prst="rect">
+            <a:avLst/>
+          </a:prstGeom>
+          <a:noFill/>
+        </p:spPr>
+        <p:txBody>
+          <a:bodyPr wrap="square" lIns="0" rIns="0" tIns="0" bIns="0" anchor="t">
+            <a:spAutoFit/>
+          </a:bodyPr>
+          <a:lstStyle/>
+          <a:p>
+            <a:pPr algn="l">
+              <a:lnSpc>
+                <a:spcPct val="128000"/>
+              </a:lnSpc>
+            </a:pPr>
+            <a:r>
+              <a:rPr sz="1550" b="1">
+                <a:solidFill>
+                  <a:srgbClr val="FFFFFF"/>
+                </a:solidFill>
+                <a:latin typeface="Arial"/>
+              </a:rPr>
+              <a:t>O último item é o projeto ficando mais inteligente sozinho — porque o ciclo fechou.</a:t>
+            </a:r>
+          </a:p>
+        </p:txBody>
+      </p:sp>
+    </p:spTree>
+  </p:cSld>
+  <p:clrMapOvr>
+    <a:masterClrMapping/>
+  </p:clrMapOvr>
+</p:sld>
+</file>
+
+<file path=ppt/slides/slide46.xml><?xml version="1.0" encoding="utf-8"?>
+<p:sld xmlns:a="http://schemas.openxmlformats.org/drawingml/2006/main" xmlns:p="http://schemas.openxmlformats.org/presentationml/2006/main" xmlns:r="http://schemas.openxmlformats.org/officeDocument/2006/relationships">
+  <p:cSld>
+    <p:bg>
+      <p:bgPr>
+        <a:solidFill>
+          <a:srgbClr val="070C16"/>
+        </a:solidFill>
+        <a:effectLst/>
+      </p:bgPr>
+    </p:bg>
+    <p:spTree>
+      <p:nvGrpSpPr>
+        <p:cNvPr id="1" name=""/>
+        <p:cNvGrpSpPr/>
+        <p:nvPr/>
+      </p:nvGrpSpPr>
+      <p:grpSpPr/>
+      <p:sp>
+        <p:nvSpPr>
+          <p:cNvPr id="2" name="TextBox 1"/>
+          <p:cNvSpPr txBox="1"/>
+          <p:nvPr/>
+        </p:nvSpPr>
+        <p:spPr>
+          <a:xfrm>
+            <a:off x="685800" y="457200"/>
+            <a:ext cx="10820095" cy="256032"/>
+          </a:xfrm>
+          <a:prstGeom prst="rect">
+            <a:avLst/>
+          </a:prstGeom>
+          <a:noFill/>
+        </p:spPr>
+        <p:txBody>
+          <a:bodyPr wrap="square" lIns="0" rIns="0" tIns="0" bIns="0" anchor="t">
+            <a:spAutoFit/>
+          </a:bodyPr>
+          <a:lstStyle/>
+          <a:p>
+            <a:pPr algn="l">
+              <a:lnSpc>
+                <a:spcPct val="100000"/>
+              </a:lnSpc>
+            </a:pPr>
+            <a:r>
+              <a:rPr sz="1150" b="1" spc="180">
+                <a:solidFill>
+                  <a:srgbClr val="3B9DF5"/>
+                </a:solidFill>
+                <a:latin typeface="Arial"/>
+              </a:rPr>
+              <a:t>PARA LER COM CALMA AMANHÃ</a:t>
+            </a:r>
+          </a:p>
+        </p:txBody>
+      </p:sp>
+      <p:sp>
+        <p:nvSpPr>
+          <p:cNvPr id="3" name="TextBox 2"/>
+          <p:cNvSpPr txBox="1"/>
+          <p:nvPr/>
+        </p:nvSpPr>
+        <p:spPr>
+          <a:xfrm>
+            <a:off x="685800" y="804672"/>
+            <a:ext cx="10820095" cy="566928"/>
+          </a:xfrm>
+          <a:prstGeom prst="rect">
+            <a:avLst/>
+          </a:prstGeom>
+          <a:noFill/>
+        </p:spPr>
+        <p:txBody>
+          <a:bodyPr wrap="square" lIns="0" rIns="0" tIns="0" bIns="0" anchor="t">
+            <a:spAutoFit/>
+          </a:bodyPr>
+          <a:lstStyle/>
+          <a:p>
+            <a:pPr algn="l">
+              <a:lnSpc>
+                <a:spcPct val="95000"/>
+              </a:lnSpc>
+            </a:pPr>
+            <a:r>
+              <a:rPr sz="3600" b="1" spc="-30">
+                <a:solidFill>
+                  <a:srgbClr val="FFFFFF"/>
+                </a:solidFill>
+                <a:latin typeface="Arial"/>
+              </a:rPr>
+              <a:t>A documentação do que a gente usou</a:t>
+            </a:r>
+          </a:p>
+        </p:txBody>
+      </p:sp>
+      <p:sp>
+        <p:nvSpPr>
+          <p:cNvPr id="4" name="TextBox 3"/>
+          <p:cNvSpPr txBox="1"/>
+          <p:nvPr/>
+        </p:nvSpPr>
+        <p:spPr>
+          <a:xfrm>
+            <a:off x="685800" y="1508760"/>
+            <a:ext cx="10820095" cy="365760"/>
+          </a:xfrm>
+          <a:prstGeom prst="rect">
+            <a:avLst/>
+          </a:prstGeom>
+          <a:noFill/>
+        </p:spPr>
+        <p:txBody>
+          <a:bodyPr wrap="square" lIns="0" rIns="0" tIns="0" bIns="0" anchor="t">
+            <a:spAutoFit/>
+          </a:bodyPr>
+          <a:lstStyle/>
+          <a:p>
+            <a:pPr algn="l">
+              <a:lnSpc>
+                <a:spcPct val="115000"/>
+              </a:lnSpc>
+            </a:pPr>
+            <a:r>
+              <a:rPr sz="1400" b="0">
+                <a:solidFill>
+                  <a:srgbClr val="9BAAC0"/>
+                </a:solidFill>
+                <a:latin typeface="Arial"/>
+              </a:rPr>
+              <a:t>Tudo desta noite está documentado. Estes são os pontos de partida — o resto se acha a partir deles.</a:t>
+            </a:r>
+          </a:p>
+        </p:txBody>
+      </p:sp>
+      <p:sp>
+        <p:nvSpPr>
+          <p:cNvPr id="5" name="TextBox 4"/>
+          <p:cNvSpPr txBox="1"/>
+          <p:nvPr/>
+        </p:nvSpPr>
+        <p:spPr>
+          <a:xfrm>
+            <a:off x="685800" y="6382512"/>
+            <a:ext cx="5486400" cy="274320"/>
+          </a:xfrm>
+          <a:prstGeom prst="rect">
+            <a:avLst/>
+          </a:prstGeom>
+          <a:noFill/>
+        </p:spPr>
+        <p:txBody>
+          <a:bodyPr wrap="square" lIns="0" rIns="0" tIns="0" bIns="0" anchor="t">
+            <a:spAutoFit/>
+          </a:bodyPr>
+          <a:lstStyle/>
+          <a:p>
+            <a:pPr algn="l">
+              <a:lnSpc>
+                <a:spcPct val="100000"/>
+              </a:lnSpc>
+            </a:pPr>
+            <a:r>
+              <a:rPr sz="900" b="1" spc="120">
+                <a:solidFill>
+                  <a:srgbClr val="566A85"/>
+                </a:solidFill>
+                <a:latin typeface="Arial"/>
+              </a:rPr>
+              <a:t>JORNADA DE DADOS</a:t>
+            </a:r>
+          </a:p>
+        </p:txBody>
+      </p:sp>
+      <p:sp>
+        <p:nvSpPr>
+          <p:cNvPr id="6" name="TextBox 5"/>
+          <p:cNvSpPr txBox="1"/>
+          <p:nvPr/>
+        </p:nvSpPr>
+        <p:spPr>
+          <a:xfrm>
+            <a:off x="996696" y="2066543"/>
+            <a:ext cx="4206240" cy="274320"/>
+          </a:xfrm>
+          <a:prstGeom prst="rect">
+            <a:avLst/>
+          </a:prstGeom>
+          <a:noFill/>
+        </p:spPr>
+        <p:txBody>
+          <a:bodyPr wrap="square" lIns="0" rIns="0" tIns="0" bIns="0" anchor="t">
+            <a:spAutoFit/>
+          </a:bodyPr>
+          <a:lstStyle/>
+          <a:p>
+            <a:pPr algn="l">
+              <a:lnSpc>
+                <a:spcPct val="100000"/>
+              </a:lnSpc>
+            </a:pPr>
+            <a:r>
+              <a:rPr sz="1100" b="1" spc="140">
+                <a:solidFill>
+                  <a:srgbClr val="3B9DF5"/>
+                </a:solidFill>
+                <a:latin typeface="Arial"/>
+              </a:rPr>
+              <a:t>O ASSUNTO</a:t>
+            </a:r>
+          </a:p>
+        </p:txBody>
+      </p:sp>
+      <p:sp>
+        <p:nvSpPr>
+          <p:cNvPr id="7" name="TextBox 6"/>
+          <p:cNvSpPr txBox="1"/>
+          <p:nvPr/>
+        </p:nvSpPr>
+        <p:spPr>
+          <a:xfrm>
+            <a:off x="5202936" y="2066543"/>
+            <a:ext cx="5973775" cy="274320"/>
+          </a:xfrm>
+          <a:prstGeom prst="rect">
+            <a:avLst/>
+          </a:prstGeom>
+          <a:noFill/>
+        </p:spPr>
+        <p:txBody>
+          <a:bodyPr wrap="square" lIns="0" rIns="0" tIns="0" bIns="0" anchor="t">
+            <a:spAutoFit/>
+          </a:bodyPr>
+          <a:lstStyle/>
+          <a:p>
+            <a:pPr algn="l">
+              <a:lnSpc>
+                <a:spcPct val="100000"/>
+              </a:lnSpc>
+            </a:pPr>
+            <a:r>
+              <a:rPr sz="1100" b="1" spc="140">
+                <a:solidFill>
+                  <a:srgbClr val="3B9DF5"/>
+                </a:solidFill>
+                <a:latin typeface="Arial"/>
+              </a:rPr>
+              <a:t>ONDE LER</a:t>
+            </a:r>
+          </a:p>
+        </p:txBody>
+      </p:sp>
+      <p:sp>
+        <p:nvSpPr>
+          <p:cNvPr id="8" name="Rounded Rectangle 7"/>
+          <p:cNvSpPr/>
+          <p:nvPr/>
+        </p:nvSpPr>
+        <p:spPr>
+          <a:xfrm>
+            <a:off x="685800" y="2450591"/>
+            <a:ext cx="10820095" cy="548640"/>
+          </a:xfrm>
+          <a:prstGeom prst="roundRect">
+            <a:avLst>
+              <a:gd name="adj" fmla="val 8000"/>
+            </a:avLst>
+          </a:prstGeom>
+          <a:solidFill>
+            <a:srgbClr val="0D1522"/>
+          </a:solidFill>
+          <a:ln w="15875">
+            <a:solidFill>
+              <a:srgbClr val="1F3A5A"/>
+            </a:solidFill>
+          </a:ln>
+          <a:effectLst/>
+        </p:spPr>
+        <p:style>
+          <a:lnRef idx="1">
+            <a:schemeClr val="accent1"/>
+          </a:lnRef>
+          <a:fillRef idx="3">
+            <a:schemeClr val="accent1"/>
+          </a:fillRef>
+          <a:effectRef idx="2">
+            <a:schemeClr val="accent1"/>
+          </a:effectRef>
+          <a:fontRef idx="minor">
+            <a:schemeClr val="lt1"/>
+          </a:fontRef>
+        </p:style>
+        <p:txBody>
+          <a:bodyPr rtlCol="0" anchor="ctr"/>
+          <a:lstStyle/>
+          <a:p>
+            <a:pPr algn="ctr"/>
+          </a:p>
+        </p:txBody>
+      </p:sp>
+      <p:sp>
+        <p:nvSpPr>
+          <p:cNvPr id="9" name="TextBox 8"/>
+          <p:cNvSpPr txBox="1"/>
+          <p:nvPr/>
+        </p:nvSpPr>
+        <p:spPr>
+          <a:xfrm>
+            <a:off x="996696" y="2613469"/>
+            <a:ext cx="4023359" cy="548640"/>
+          </a:xfrm>
+          <a:prstGeom prst="rect">
+            <a:avLst/>
+          </a:prstGeom>
+          <a:noFill/>
+        </p:spPr>
+        <p:txBody>
+          <a:bodyPr wrap="square" lIns="0" rIns="0" tIns="0" bIns="0" anchor="t">
+            <a:spAutoFit/>
+          </a:bodyPr>
+          <a:lstStyle/>
+          <a:p>
+            <a:pPr algn="l">
+              <a:lnSpc>
+                <a:spcPct val="100000"/>
+              </a:lnSpc>
+            </a:pPr>
+            <a:r>
+              <a:rPr sz="1350" b="1">
+                <a:solidFill>
+                  <a:srgbClr val="FFFFFF"/>
+                </a:solidFill>
+                <a:latin typeface="Arial"/>
+              </a:rPr>
+              <a:t>Databricks Apps</a:t>
+            </a:r>
+          </a:p>
+        </p:txBody>
+      </p:sp>
+      <p:sp>
+        <p:nvSpPr>
+          <p:cNvPr id="10" name="TextBox 9"/>
+          <p:cNvSpPr txBox="1"/>
+          <p:nvPr/>
+        </p:nvSpPr>
+        <p:spPr>
+          <a:xfrm>
+            <a:off x="5202936" y="2613469"/>
+            <a:ext cx="5973775" cy="548640"/>
+          </a:xfrm>
+          <a:prstGeom prst="rect">
+            <a:avLst/>
+          </a:prstGeom>
+          <a:noFill/>
+        </p:spPr>
+        <p:txBody>
+          <a:bodyPr wrap="square" lIns="0" rIns="0" tIns="0" bIns="0" anchor="t">
+            <a:spAutoFit/>
+          </a:bodyPr>
+          <a:lstStyle/>
+          <a:p>
+            <a:pPr algn="l">
+              <a:lnSpc>
+                <a:spcPct val="100000"/>
+              </a:lnSpc>
+            </a:pPr>
+            <a:r>
+              <a:rPr sz="1350" b="0">
+                <a:solidFill>
+                  <a:srgbClr val="9BAAC0"/>
+                </a:solidFill>
+                <a:latin typeface="Arial"/>
+              </a:rPr>
+              <a:t>docs.databricks.com/dev-tools/databricks-apps · o que é, frameworks e deploy</a:t>
+            </a:r>
+          </a:p>
+        </p:txBody>
+      </p:sp>
+      <p:sp>
+        <p:nvSpPr>
+          <p:cNvPr id="11" name="Rounded Rectangle 10"/>
+          <p:cNvSpPr/>
+          <p:nvPr/>
+        </p:nvSpPr>
+        <p:spPr>
+          <a:xfrm>
+            <a:off x="685800" y="3127248"/>
+            <a:ext cx="10820095" cy="548640"/>
+          </a:xfrm>
+          <a:prstGeom prst="roundRect">
+            <a:avLst>
+              <a:gd name="adj" fmla="val 8000"/>
+            </a:avLst>
+          </a:prstGeom>
+          <a:solidFill>
+            <a:srgbClr val="142337"/>
+          </a:solidFill>
+          <a:ln w="19050">
+            <a:solidFill>
+              <a:srgbClr val="3B9DF5"/>
+            </a:solidFill>
+          </a:ln>
+          <a:effectLst/>
+        </p:spPr>
+        <p:style>
+          <a:lnRef idx="1">
+            <a:schemeClr val="accent1"/>
+          </a:lnRef>
+          <a:fillRef idx="3">
+            <a:schemeClr val="accent1"/>
+          </a:fillRef>
+          <a:effectRef idx="2">
+            <a:schemeClr val="accent1"/>
+          </a:effectRef>
+          <a:fontRef idx="minor">
+            <a:schemeClr val="lt1"/>
+          </a:fontRef>
+        </p:style>
+        <p:txBody>
+          <a:bodyPr rtlCol="0" anchor="ctr"/>
+          <a:lstStyle/>
+          <a:p>
+            <a:pPr algn="ctr"/>
+          </a:p>
+        </p:txBody>
+      </p:sp>
+      <p:sp>
+        <p:nvSpPr>
+          <p:cNvPr id="12" name="TextBox 11"/>
+          <p:cNvSpPr txBox="1"/>
+          <p:nvPr/>
+        </p:nvSpPr>
+        <p:spPr>
+          <a:xfrm>
+            <a:off x="996696" y="3290125"/>
+            <a:ext cx="4023359" cy="548640"/>
+          </a:xfrm>
+          <a:prstGeom prst="rect">
+            <a:avLst/>
+          </a:prstGeom>
+          <a:noFill/>
+        </p:spPr>
+        <p:txBody>
+          <a:bodyPr wrap="square" lIns="0" rIns="0" tIns="0" bIns="0" anchor="t">
+            <a:spAutoFit/>
+          </a:bodyPr>
+          <a:lstStyle/>
+          <a:p>
+            <a:pPr algn="l">
+              <a:lnSpc>
+                <a:spcPct val="100000"/>
+              </a:lnSpc>
+            </a:pPr>
+            <a:r>
+              <a:rPr sz="1350" b="1">
+                <a:solidFill>
+                  <a:srgbClr val="3B9DF5"/>
+                </a:solidFill>
+                <a:latin typeface="Arial"/>
+              </a:rPr>
+              <a:t>Apps · conceitos e permissões</a:t>
+            </a:r>
+          </a:p>
+        </p:txBody>
+      </p:sp>
+      <p:sp>
+        <p:nvSpPr>
+          <p:cNvPr id="13" name="TextBox 12"/>
+          <p:cNvSpPr txBox="1"/>
+          <p:nvPr/>
+        </p:nvSpPr>
+        <p:spPr>
+          <a:xfrm>
+            <a:off x="5202936" y="3290125"/>
+            <a:ext cx="5973775" cy="548640"/>
+          </a:xfrm>
+          <a:prstGeom prst="rect">
+            <a:avLst/>
+          </a:prstGeom>
+          <a:noFill/>
+        </p:spPr>
+        <p:txBody>
+          <a:bodyPr wrap="square" lIns="0" rIns="0" tIns="0" bIns="0" anchor="t">
+            <a:spAutoFit/>
+          </a:bodyPr>
+          <a:lstStyle/>
+          <a:p>
+            <a:pPr algn="l">
+              <a:lnSpc>
+                <a:spcPct val="100000"/>
+              </a:lnSpc>
+            </a:pPr>
+            <a:r>
+              <a:rPr sz="1350" b="0">
+                <a:solidFill>
+                  <a:srgbClr val="9BAAC0"/>
+                </a:solidFill>
+                <a:latin typeface="Arial"/>
+              </a:rPr>
+              <a:t>.../databricks-apps/key-concepts · o service principal e o modelo de acesso</a:t>
+            </a:r>
+          </a:p>
+        </p:txBody>
+      </p:sp>
+      <p:sp>
+        <p:nvSpPr>
+          <p:cNvPr id="14" name="Rounded Rectangle 13"/>
+          <p:cNvSpPr/>
+          <p:nvPr/>
+        </p:nvSpPr>
+        <p:spPr>
+          <a:xfrm>
+            <a:off x="685800" y="3803904"/>
+            <a:ext cx="10820095" cy="548640"/>
+          </a:xfrm>
+          <a:prstGeom prst="roundRect">
+            <a:avLst>
+              <a:gd name="adj" fmla="val 8000"/>
+            </a:avLst>
+          </a:prstGeom>
+          <a:solidFill>
+            <a:srgbClr val="0D1522"/>
+          </a:solidFill>
+          <a:ln w="15875">
+            <a:solidFill>
+              <a:srgbClr val="1F3A5A"/>
+            </a:solidFill>
+          </a:ln>
+          <a:effectLst/>
+        </p:spPr>
+        <p:style>
+          <a:lnRef idx="1">
+            <a:schemeClr val="accent1"/>
+          </a:lnRef>
+          <a:fillRef idx="3">
+            <a:schemeClr val="accent1"/>
+          </a:fillRef>
+          <a:effectRef idx="2">
+            <a:schemeClr val="accent1"/>
+          </a:effectRef>
+          <a:fontRef idx="minor">
+            <a:schemeClr val="lt1"/>
+          </a:fontRef>
+        </p:style>
+        <p:txBody>
+          <a:bodyPr rtlCol="0" anchor="ctr"/>
+          <a:lstStyle/>
+          <a:p>
+            <a:pPr algn="ctr"/>
+          </a:p>
+        </p:txBody>
+      </p:sp>
+      <p:sp>
+        <p:nvSpPr>
+          <p:cNvPr id="15" name="TextBox 14"/>
+          <p:cNvSpPr txBox="1"/>
+          <p:nvPr/>
+        </p:nvSpPr>
+        <p:spPr>
+          <a:xfrm>
+            <a:off x="996696" y="3966781"/>
+            <a:ext cx="4023359" cy="548640"/>
+          </a:xfrm>
+          <a:prstGeom prst="rect">
+            <a:avLst/>
+          </a:prstGeom>
+          <a:noFill/>
+        </p:spPr>
+        <p:txBody>
+          <a:bodyPr wrap="square" lIns="0" rIns="0" tIns="0" bIns="0" anchor="t">
+            <a:spAutoFit/>
+          </a:bodyPr>
+          <a:lstStyle/>
+          <a:p>
+            <a:pPr algn="l">
+              <a:lnSpc>
+                <a:spcPct val="100000"/>
+              </a:lnSpc>
+            </a:pPr>
+            <a:r>
+              <a:rPr sz="1350" b="1">
+                <a:solidFill>
+                  <a:srgbClr val="FFFFFF"/>
+                </a:solidFill>
+                <a:latin typeface="Arial"/>
+              </a:rPr>
+              <a:t>Apps · boas práticas</a:t>
+            </a:r>
+          </a:p>
+        </p:txBody>
+      </p:sp>
+      <p:sp>
+        <p:nvSpPr>
+          <p:cNvPr id="16" name="TextBox 15"/>
+          <p:cNvSpPr txBox="1"/>
+          <p:nvPr/>
+        </p:nvSpPr>
+        <p:spPr>
+          <a:xfrm>
+            <a:off x="5202936" y="3966781"/>
+            <a:ext cx="5973775" cy="548640"/>
+          </a:xfrm>
+          <a:prstGeom prst="rect">
+            <a:avLst/>
+          </a:prstGeom>
+          <a:noFill/>
+        </p:spPr>
+        <p:txBody>
+          <a:bodyPr wrap="square" lIns="0" rIns="0" tIns="0" bIns="0" anchor="t">
+            <a:spAutoFit/>
+          </a:bodyPr>
+          <a:lstStyle/>
+          <a:p>
+            <a:pPr algn="l">
+              <a:lnSpc>
+                <a:spcPct val="100000"/>
+              </a:lnSpc>
+            </a:pPr>
+            <a:r>
+              <a:rPr sz="1350" b="0">
+                <a:solidFill>
+                  <a:srgbClr val="9BAAC0"/>
+                </a:solidFill>
+                <a:latin typeface="Arial"/>
+              </a:rPr>
+              <a:t>.../databricks-apps/best-practices</a:t>
+            </a:r>
+          </a:p>
+        </p:txBody>
+      </p:sp>
+      <p:sp>
+        <p:nvSpPr>
+          <p:cNvPr id="17" name="Rounded Rectangle 16"/>
+          <p:cNvSpPr/>
+          <p:nvPr/>
+        </p:nvSpPr>
+        <p:spPr>
+          <a:xfrm>
+            <a:off x="685800" y="4480560"/>
+            <a:ext cx="10820095" cy="548640"/>
+          </a:xfrm>
+          <a:prstGeom prst="roundRect">
+            <a:avLst>
+              <a:gd name="adj" fmla="val 8000"/>
+            </a:avLst>
+          </a:prstGeom>
+          <a:solidFill>
+            <a:srgbClr val="0D1522"/>
+          </a:solidFill>
+          <a:ln w="15875">
+            <a:solidFill>
+              <a:srgbClr val="1F3A5A"/>
+            </a:solidFill>
+          </a:ln>
+          <a:effectLst/>
+        </p:spPr>
+        <p:style>
+          <a:lnRef idx="1">
+            <a:schemeClr val="accent1"/>
+          </a:lnRef>
+          <a:fillRef idx="3">
+            <a:schemeClr val="accent1"/>
+          </a:fillRef>
+          <a:effectRef idx="2">
+            <a:schemeClr val="accent1"/>
+          </a:effectRef>
+          <a:fontRef idx="minor">
+            <a:schemeClr val="lt1"/>
+          </a:fontRef>
+        </p:style>
+        <p:txBody>
+          <a:bodyPr rtlCol="0" anchor="ctr"/>
+          <a:lstStyle/>
+          <a:p>
+            <a:pPr algn="ctr"/>
+          </a:p>
+        </p:txBody>
+      </p:sp>
+      <p:sp>
+        <p:nvSpPr>
+          <p:cNvPr id="18" name="TextBox 17"/>
+          <p:cNvSpPr txBox="1"/>
+          <p:nvPr/>
+        </p:nvSpPr>
+        <p:spPr>
+          <a:xfrm>
+            <a:off x="996696" y="4643437"/>
+            <a:ext cx="4023359" cy="548640"/>
+          </a:xfrm>
+          <a:prstGeom prst="rect">
+            <a:avLst/>
+          </a:prstGeom>
+          <a:noFill/>
+        </p:spPr>
+        <p:txBody>
+          <a:bodyPr wrap="square" lIns="0" rIns="0" tIns="0" bIns="0" anchor="t">
+            <a:spAutoFit/>
+          </a:bodyPr>
+          <a:lstStyle/>
+          <a:p>
+            <a:pPr algn="l">
+              <a:lnSpc>
+                <a:spcPct val="100000"/>
+              </a:lnSpc>
+            </a:pPr>
+            <a:r>
+              <a:rPr sz="1350" b="1">
+                <a:solidFill>
+                  <a:srgbClr val="FFFFFF"/>
+                </a:solidFill>
+                <a:latin typeface="Arial"/>
+              </a:rPr>
+              <a:t>AI/BI Genie</a:t>
+            </a:r>
+          </a:p>
+        </p:txBody>
+      </p:sp>
+      <p:sp>
+        <p:nvSpPr>
+          <p:cNvPr id="19" name="TextBox 18"/>
+          <p:cNvSpPr txBox="1"/>
+          <p:nvPr/>
+        </p:nvSpPr>
+        <p:spPr>
+          <a:xfrm>
+            <a:off x="5202936" y="4643437"/>
+            <a:ext cx="5973775" cy="548640"/>
+          </a:xfrm>
+          <a:prstGeom prst="rect">
+            <a:avLst/>
+          </a:prstGeom>
+          <a:noFill/>
+        </p:spPr>
+        <p:txBody>
+          <a:bodyPr wrap="square" lIns="0" rIns="0" tIns="0" bIns="0" anchor="t">
+            <a:spAutoFit/>
+          </a:bodyPr>
+          <a:lstStyle/>
+          <a:p>
+            <a:pPr algn="l">
+              <a:lnSpc>
+                <a:spcPct val="100000"/>
+              </a:lnSpc>
+            </a:pPr>
+            <a:r>
+              <a:rPr sz="1350" b="0">
+                <a:solidFill>
+                  <a:srgbClr val="9BAAC0"/>
+                </a:solidFill>
+                <a:latin typeface="Arial"/>
+              </a:rPr>
+              <a:t>docs.databricks.com/genie · a experiência de perguntar em português</a:t>
+            </a:r>
+          </a:p>
+        </p:txBody>
+      </p:sp>
+      <p:sp>
+        <p:nvSpPr>
+          <p:cNvPr id="20" name="Rounded Rectangle 19"/>
+          <p:cNvSpPr/>
+          <p:nvPr/>
+        </p:nvSpPr>
+        <p:spPr>
+          <a:xfrm>
+            <a:off x="685800" y="5157216"/>
+            <a:ext cx="10820095" cy="548640"/>
+          </a:xfrm>
+          <a:prstGeom prst="roundRect">
+            <a:avLst>
+              <a:gd name="adj" fmla="val 8000"/>
+            </a:avLst>
+          </a:prstGeom>
+          <a:solidFill>
+            <a:srgbClr val="0D1522"/>
+          </a:solidFill>
+          <a:ln w="15875">
+            <a:solidFill>
+              <a:srgbClr val="1F3A5A"/>
+            </a:solidFill>
+          </a:ln>
+          <a:effectLst/>
+        </p:spPr>
+        <p:style>
+          <a:lnRef idx="1">
+            <a:schemeClr val="accent1"/>
+          </a:lnRef>
+          <a:fillRef idx="3">
+            <a:schemeClr val="accent1"/>
+          </a:fillRef>
+          <a:effectRef idx="2">
+            <a:schemeClr val="accent1"/>
+          </a:effectRef>
+          <a:fontRef idx="minor">
+            <a:schemeClr val="lt1"/>
+          </a:fontRef>
+        </p:style>
+        <p:txBody>
+          <a:bodyPr rtlCol="0" anchor="ctr"/>
+          <a:lstStyle/>
+          <a:p>
+            <a:pPr algn="ctr"/>
+          </a:p>
+        </p:txBody>
+      </p:sp>
+      <p:sp>
+        <p:nvSpPr>
+          <p:cNvPr id="21" name="TextBox 20"/>
+          <p:cNvSpPr txBox="1"/>
+          <p:nvPr/>
+        </p:nvSpPr>
+        <p:spPr>
+          <a:xfrm>
+            <a:off x="996696" y="5320093"/>
+            <a:ext cx="4023359" cy="548640"/>
+          </a:xfrm>
+          <a:prstGeom prst="rect">
+            <a:avLst/>
+          </a:prstGeom>
+          <a:noFill/>
+        </p:spPr>
+        <p:txBody>
+          <a:bodyPr wrap="square" lIns="0" rIns="0" tIns="0" bIns="0" anchor="t">
+            <a:spAutoFit/>
+          </a:bodyPr>
+          <a:lstStyle/>
+          <a:p>
+            <a:pPr algn="l">
+              <a:lnSpc>
+                <a:spcPct val="100000"/>
+              </a:lnSpc>
+            </a:pPr>
+            <a:r>
+              <a:rPr sz="1350" b="1">
+                <a:solidFill>
+                  <a:srgbClr val="FFFFFF"/>
+                </a:solidFill>
+                <a:latin typeface="Arial"/>
+              </a:rPr>
+              <a:t>Genie Agents · afinar</a:t>
+            </a:r>
+          </a:p>
+        </p:txBody>
+      </p:sp>
+      <p:sp>
+        <p:nvSpPr>
+          <p:cNvPr id="22" name="TextBox 21"/>
+          <p:cNvSpPr txBox="1"/>
+          <p:nvPr/>
+        </p:nvSpPr>
+        <p:spPr>
+          <a:xfrm>
+            <a:off x="5202936" y="5320093"/>
+            <a:ext cx="5973775" cy="548640"/>
+          </a:xfrm>
+          <a:prstGeom prst="rect">
+            <a:avLst/>
+          </a:prstGeom>
+          <a:noFill/>
+        </p:spPr>
+        <p:txBody>
+          <a:bodyPr wrap="square" lIns="0" rIns="0" tIns="0" bIns="0" anchor="t">
+            <a:spAutoFit/>
+          </a:bodyPr>
+          <a:lstStyle/>
+          <a:p>
+            <a:pPr algn="l">
+              <a:lnSpc>
+                <a:spcPct val="100000"/>
+              </a:lnSpc>
+            </a:pPr>
+            <a:r>
+              <a:rPr sz="1350" b="0">
+                <a:solidFill>
+                  <a:srgbClr val="9BAAC0"/>
+                </a:solidFill>
+                <a:latin typeface="Arial"/>
+              </a:rPr>
+              <a:t>docs.databricks.com/genie-agents/tune-quality · instruções e qualidade da resposta</a:t>
+            </a:r>
+          </a:p>
+        </p:txBody>
+      </p:sp>
+      <p:sp>
+        <p:nvSpPr>
+          <p:cNvPr id="23" name="Rounded Rectangle 22"/>
+          <p:cNvSpPr/>
+          <p:nvPr/>
+        </p:nvSpPr>
+        <p:spPr>
+          <a:xfrm>
+            <a:off x="685800" y="5833872"/>
+            <a:ext cx="10820095" cy="548640"/>
+          </a:xfrm>
+          <a:prstGeom prst="roundRect">
+            <a:avLst>
+              <a:gd name="adj" fmla="val 8000"/>
+            </a:avLst>
+          </a:prstGeom>
+          <a:solidFill>
+            <a:srgbClr val="0D1522"/>
+          </a:solidFill>
+          <a:ln w="15875">
+            <a:solidFill>
+              <a:srgbClr val="1F3A5A"/>
+            </a:solidFill>
+          </a:ln>
+          <a:effectLst/>
+        </p:spPr>
+        <p:style>
+          <a:lnRef idx="1">
+            <a:schemeClr val="accent1"/>
+          </a:lnRef>
+          <a:fillRef idx="3">
+            <a:schemeClr val="accent1"/>
+          </a:fillRef>
+          <a:effectRef idx="2">
+            <a:schemeClr val="accent1"/>
+          </a:effectRef>
+          <a:fontRef idx="minor">
+            <a:schemeClr val="lt1"/>
+          </a:fontRef>
+        </p:style>
+        <p:txBody>
+          <a:bodyPr rtlCol="0" anchor="ctr"/>
+          <a:lstStyle/>
+          <a:p>
+            <a:pPr algn="ctr"/>
+          </a:p>
+        </p:txBody>
+      </p:sp>
+      <p:sp>
+        <p:nvSpPr>
+          <p:cNvPr id="24" name="TextBox 23"/>
+          <p:cNvSpPr txBox="1"/>
+          <p:nvPr/>
+        </p:nvSpPr>
+        <p:spPr>
+          <a:xfrm>
+            <a:off x="996696" y="5996749"/>
+            <a:ext cx="4023359" cy="548640"/>
+          </a:xfrm>
+          <a:prstGeom prst="rect">
+            <a:avLst/>
+          </a:prstGeom>
+          <a:noFill/>
+        </p:spPr>
+        <p:txBody>
+          <a:bodyPr wrap="square" lIns="0" rIns="0" tIns="0" bIns="0" anchor="t">
+            <a:spAutoFit/>
+          </a:bodyPr>
+          <a:lstStyle/>
+          <a:p>
+            <a:pPr algn="l">
+              <a:lnSpc>
+                <a:spcPct val="100000"/>
+              </a:lnSpc>
+            </a:pPr>
+            <a:r>
+              <a:rPr sz="1350" b="1">
+                <a:solidFill>
+                  <a:srgbClr val="FFFFFF"/>
+                </a:solidFill>
+                <a:latin typeface="Arial"/>
+              </a:rPr>
+              <a:t>Unity Catalog · privilégios</a:t>
+            </a:r>
+          </a:p>
+        </p:txBody>
+      </p:sp>
+      <p:sp>
+        <p:nvSpPr>
+          <p:cNvPr id="25" name="TextBox 24"/>
+          <p:cNvSpPr txBox="1"/>
+          <p:nvPr/>
+        </p:nvSpPr>
+        <p:spPr>
+          <a:xfrm>
+            <a:off x="5202936" y="5996749"/>
+            <a:ext cx="5973775" cy="548640"/>
+          </a:xfrm>
+          <a:prstGeom prst="rect">
+            <a:avLst/>
+          </a:prstGeom>
+          <a:noFill/>
+        </p:spPr>
+        <p:txBody>
+          <a:bodyPr wrap="square" lIns="0" rIns="0" tIns="0" bIns="0" anchor="t">
+            <a:spAutoFit/>
+          </a:bodyPr>
+          <a:lstStyle/>
+          <a:p>
+            <a:pPr algn="l">
+              <a:lnSpc>
+                <a:spcPct val="100000"/>
+              </a:lnSpc>
+            </a:pPr>
+            <a:r>
+              <a:rPr sz="1350" b="0">
+                <a:solidFill>
+                  <a:srgbClr val="9BAAC0"/>
+                </a:solidFill>
+                <a:latin typeface="Arial"/>
+              </a:rPr>
+              <a:t>docs.databricks.com/data-governance/unity-catalog/manage-privileges · o GRANT</a:t>
+            </a:r>
+          </a:p>
+        </p:txBody>
+      </p:sp>
+    </p:spTree>
+  </p:cSld>
+  <p:clrMapOvr>
+    <a:masterClrMapping/>
+  </p:clrMapOvr>
+</p:sld>
+</file>
+
+<file path=ppt/slides/slide47.xml><?xml version="1.0" encoding="utf-8"?>
 <p:sld xmlns:a="http://schemas.openxmlformats.org/drawingml/2006/main" xmlns:p="http://schemas.openxmlformats.org/presentationml/2006/main" xmlns:r="http://schemas.openxmlformats.org/officeDocument/2006/relationships">
   <p:cSld>
     <p:bg>

--- a/aulas/aula-04-app-e-genie/slides/aula-04-app-e-genie.pptx
+++ b/aulas/aula-04-app-e-genie/slides/aula-04-app-e-genie.pptx
@@ -16157,7 +16157,7 @@
                 </a:solidFill>
                 <a:latin typeface="Arial"/>
               </a:rPr>
-              <a:t>Quem, hoje, consegue usar isso?</a:t>
+              <a:t>O que era preciso saber para usar</a:t>
             </a:r>
           </a:p>
         </p:txBody>
@@ -16274,7 +16274,7 @@
                 </a:solidFill>
                 <a:latin typeface="Arial"/>
               </a:rPr>
-              <a:t>QUEM CONSEGUE USAR</a:t>
+              <a:t>O QUE ERA PRECISO SABER</a:t>
             </a:r>
           </a:p>
         </p:txBody>
@@ -16400,7 +16400,7 @@
                 </a:solidFill>
                 <a:latin typeface="Arial"/>
               </a:rPr>
-              <a:t>Quem escreve SQL</a:t>
+              <a:t>SQL</a:t>
             </a:r>
           </a:p>
         </p:txBody>
@@ -16487,7 +16487,7 @@
                 </a:solidFill>
                 <a:latin typeface="Arial"/>
               </a:rPr>
-              <a:t>Noite 2 · o pipeline que roda sozinho</a:t>
+              <a:t>Noite 2 · o pipeline, o dashboard e o Genie</a:t>
             </a:r>
           </a:p>
         </p:txBody>
@@ -16526,7 +16526,7 @@
                 </a:solidFill>
                 <a:latin typeface="Arial"/>
               </a:rPr>
-              <a:t>Quem escreve SQL</a:t>
+              <a:t>Python e PySpark</a:t>
             </a:r>
           </a:p>
         </p:txBody>
@@ -16540,132 +16540,6 @@
         <p:spPr>
           <a:xfrm>
             <a:off x="685800" y="3465576"/>
-            <a:ext cx="10820095" cy="658368"/>
-          </a:xfrm>
-          <a:prstGeom prst="roundRect">
-            <a:avLst>
-              <a:gd name="adj" fmla="val 8000"/>
-            </a:avLst>
-          </a:prstGeom>
-          <a:solidFill>
-            <a:srgbClr val="0D1522"/>
-          </a:solidFill>
-          <a:ln w="15875">
-            <a:solidFill>
-              <a:srgbClr val="1F3A5A"/>
-            </a:solidFill>
-          </a:ln>
-          <a:effectLst/>
-        </p:spPr>
-        <p:style>
-          <a:lnRef idx="1">
-            <a:schemeClr val="accent1"/>
-          </a:lnRef>
-          <a:fillRef idx="3">
-            <a:schemeClr val="accent1"/>
-          </a:fillRef>
-          <a:effectRef idx="2">
-            <a:schemeClr val="accent1"/>
-          </a:effectRef>
-          <a:fontRef idx="minor">
-            <a:schemeClr val="lt1"/>
-          </a:fontRef>
-        </p:style>
-        <p:txBody>
-          <a:bodyPr rtlCol="0" anchor="ctr"/>
-          <a:lstStyle/>
-          <a:p>
-            <a:pPr algn="ctr"/>
-          </a:p>
-        </p:txBody>
-      </p:sp>
-      <p:sp>
-        <p:nvSpPr>
-          <p:cNvPr id="14" name="TextBox 13"/>
-          <p:cNvSpPr txBox="1"/>
-          <p:nvPr/>
-        </p:nvSpPr>
-        <p:spPr>
-          <a:xfrm>
-            <a:off x="996696" y="3683317"/>
-            <a:ext cx="4937759" cy="658368"/>
-          </a:xfrm>
-          <a:prstGeom prst="rect">
-            <a:avLst/>
-          </a:prstGeom>
-          <a:noFill/>
-        </p:spPr>
-        <p:txBody>
-          <a:bodyPr wrap="square" lIns="0" rIns="0" tIns="0" bIns="0" anchor="t">
-            <a:spAutoFit/>
-          </a:bodyPr>
-          <a:lstStyle/>
-          <a:p>
-            <a:pPr algn="l">
-              <a:lnSpc>
-                <a:spcPct val="100000"/>
-              </a:lnSpc>
-            </a:pPr>
-            <a:r>
-              <a:rPr sz="1350" b="1">
-                <a:solidFill>
-                  <a:srgbClr val="FFFFFF"/>
-                </a:solidFill>
-                <a:latin typeface="Arial"/>
-              </a:rPr>
-              <a:t>Noite 2 · o dashboard e o Genie</a:t>
-            </a:r>
-          </a:p>
-        </p:txBody>
-      </p:sp>
-      <p:sp>
-        <p:nvSpPr>
-          <p:cNvPr id="15" name="TextBox 14"/>
-          <p:cNvSpPr txBox="1"/>
-          <p:nvPr/>
-        </p:nvSpPr>
-        <p:spPr>
-          <a:xfrm>
-            <a:off x="6117336" y="3683317"/>
-            <a:ext cx="5059375" cy="658368"/>
-          </a:xfrm>
-          <a:prstGeom prst="rect">
-            <a:avLst/>
-          </a:prstGeom>
-          <a:noFill/>
-        </p:spPr>
-        <p:txBody>
-          <a:bodyPr wrap="square" lIns="0" rIns="0" tIns="0" bIns="0" anchor="t">
-            <a:spAutoFit/>
-          </a:bodyPr>
-          <a:lstStyle/>
-          <a:p>
-            <a:pPr algn="l">
-              <a:lnSpc>
-                <a:spcPct val="100000"/>
-              </a:lnSpc>
-            </a:pPr>
-            <a:r>
-              <a:rPr sz="1350" b="0">
-                <a:solidFill>
-                  <a:srgbClr val="9BAAC0"/>
-                </a:solidFill>
-                <a:latin typeface="Arial"/>
-              </a:rPr>
-              <a:t>Quem abre o dashboard — e é a única porta aberta</a:t>
-            </a:r>
-          </a:p>
-        </p:txBody>
-      </p:sp>
-      <p:sp>
-        <p:nvSpPr>
-          <p:cNvPr id="16" name="Rounded Rectangle 15"/>
-          <p:cNvSpPr/>
-          <p:nvPr/>
-        </p:nvSpPr>
-        <p:spPr>
-          <a:xfrm>
-            <a:off x="685800" y="4251960"/>
             <a:ext cx="10820095" cy="658368"/>
           </a:xfrm>
           <a:prstGeom prst="roundRect">
@@ -16707,6 +16581,132 @@
       </p:sp>
       <p:sp>
         <p:nvSpPr>
+          <p:cNvPr id="14" name="TextBox 13"/>
+          <p:cNvSpPr txBox="1"/>
+          <p:nvPr/>
+        </p:nvSpPr>
+        <p:spPr>
+          <a:xfrm>
+            <a:off x="996696" y="3683317"/>
+            <a:ext cx="4937759" cy="658368"/>
+          </a:xfrm>
+          <a:prstGeom prst="rect">
+            <a:avLst/>
+          </a:prstGeom>
+          <a:noFill/>
+        </p:spPr>
+        <p:txBody>
+          <a:bodyPr wrap="square" lIns="0" rIns="0" tIns="0" bIns="0" anchor="t">
+            <a:spAutoFit/>
+          </a:bodyPr>
+          <a:lstStyle/>
+          <a:p>
+            <a:pPr algn="l">
+              <a:lnSpc>
+                <a:spcPct val="100000"/>
+              </a:lnSpc>
+            </a:pPr>
+            <a:r>
+              <a:rPr sz="1350" b="1">
+                <a:solidFill>
+                  <a:srgbClr val="FF6B5A"/>
+                </a:solidFill>
+                <a:latin typeface="Arial"/>
+              </a:rPr>
+              <a:t>Noite 3 · o modelo e a fila dos 200</a:t>
+            </a:r>
+          </a:p>
+        </p:txBody>
+      </p:sp>
+      <p:sp>
+        <p:nvSpPr>
+          <p:cNvPr id="15" name="TextBox 14"/>
+          <p:cNvSpPr txBox="1"/>
+          <p:nvPr/>
+        </p:nvSpPr>
+        <p:spPr>
+          <a:xfrm>
+            <a:off x="6117336" y="3683317"/>
+            <a:ext cx="5059375" cy="658368"/>
+          </a:xfrm>
+          <a:prstGeom prst="rect">
+            <a:avLst/>
+          </a:prstGeom>
+          <a:noFill/>
+        </p:spPr>
+        <p:txBody>
+          <a:bodyPr wrap="square" lIns="0" rIns="0" tIns="0" bIns="0" anchor="t">
+            <a:spAutoFit/>
+          </a:bodyPr>
+          <a:lstStyle/>
+          <a:p>
+            <a:pPr algn="l">
+              <a:lnSpc>
+                <a:spcPct val="100000"/>
+              </a:lnSpc>
+            </a:pPr>
+            <a:r>
+              <a:rPr sz="1350" b="0">
+                <a:solidFill>
+                  <a:srgbClr val="9BAAC0"/>
+                </a:solidFill>
+                <a:latin typeface="Arial"/>
+              </a:rPr>
+              <a:t>ML e SQL</a:t>
+            </a:r>
+          </a:p>
+        </p:txBody>
+      </p:sp>
+      <p:sp>
+        <p:nvSpPr>
+          <p:cNvPr id="16" name="Rounded Rectangle 15"/>
+          <p:cNvSpPr/>
+          <p:nvPr/>
+        </p:nvSpPr>
+        <p:spPr>
+          <a:xfrm>
+            <a:off x="685800" y="4251960"/>
+            <a:ext cx="10820095" cy="658368"/>
+          </a:xfrm>
+          <a:prstGeom prst="roundRect">
+            <a:avLst>
+              <a:gd name="adj" fmla="val 8000"/>
+            </a:avLst>
+          </a:prstGeom>
+          <a:solidFill>
+            <a:srgbClr val="142337"/>
+          </a:solidFill>
+          <a:ln w="19050">
+            <a:solidFill>
+              <a:srgbClr val="3B9DF5"/>
+            </a:solidFill>
+          </a:ln>
+          <a:effectLst/>
+        </p:spPr>
+        <p:style>
+          <a:lnRef idx="1">
+            <a:schemeClr val="accent1"/>
+          </a:lnRef>
+          <a:fillRef idx="3">
+            <a:schemeClr val="accent1"/>
+          </a:fillRef>
+          <a:effectRef idx="2">
+            <a:schemeClr val="accent1"/>
+          </a:effectRef>
+          <a:fontRef idx="minor">
+            <a:schemeClr val="lt1"/>
+          </a:fontRef>
+        </p:style>
+        <p:txBody>
+          <a:bodyPr rtlCol="0" anchor="ctr"/>
+          <a:lstStyle/>
+          <a:p>
+            <a:pPr algn="ctr"/>
+          </a:p>
+        </p:txBody>
+      </p:sp>
+      <p:sp>
+        <p:nvSpPr>
           <p:cNvPr id="17" name="TextBox 16"/>
           <p:cNvSpPr txBox="1"/>
           <p:nvPr/>
@@ -16735,11 +16735,11 @@
             <a:r>
               <a:rPr sz="1350" b="1">
                 <a:solidFill>
-                  <a:srgbClr val="FF6B5A"/>
-                </a:solidFill>
-                <a:latin typeface="Arial"/>
-              </a:rPr>
-              <a:t>Noite 3 · o modelo e a fila dos 200</a:t>
+                  <a:srgbClr val="3B9DF5"/>
+                </a:solidFill>
+                <a:latin typeface="Arial"/>
+              </a:rPr>
+              <a:t>Noite 4 · o app e o Genie da direção</a:t>
             </a:r>
           </a:p>
         </p:txBody>
@@ -16778,7 +16778,7 @@
                 </a:solidFill>
                 <a:latin typeface="Arial"/>
               </a:rPr>
-              <a:t>Quem escreve SQL</a:t>
+              <a:t>nada — e é a aula de hoje</a:t>
             </a:r>
           </a:p>
         </p:txBody>
